--- a/workshops/running-openclaw-on-nebius.pptx
+++ b/workshops/running-openclaw-on-nebius.pptx
@@ -26,10 +26,9 @@
     <p:sldId id="274" r:id="rId20"/>
     <p:sldId id="275" r:id="rId21"/>
     <p:sldId id="276" r:id="rId22"/>
-    <p:sldId id="277" r:id="rId23"/>
   </p:sldIdLst>
   <p:notesMasterIdLst>
-    <p:notesMasterId r:id="rId24"/>
+    <p:notesMasterId r:id="rId23"/>
   </p:notesMasterIdLst>
   <p:sldSz cx="9144000" cy="5143500"/>
   <p:notesSz cx="5143500" cy="9144000"/>
@@ -1691,94 +1690,6 @@
             <a:fld id="{F7021451-1387-4CA6-816F-3879F97B5CBC}" type="slidenum">
               <a:rPr lang="en-US"/>
               <a:t>21</a:t>
-            </a:fld>
-            <a:endParaRPr lang="en-US"/>
-          </a:p>
-        </p:txBody>
-      </p:sp>
-    </p:spTree>
-    <p:extLst>
-      <p:ext uri="{BB962C8B-B14F-4D97-AF65-F5344CB8AC3E}">
-        <p14:creationId xmlns:p14="http://schemas.microsoft.com/office/powerpoint/2010/main" val="1024086991"/>
-      </p:ext>
-    </p:extLst>
-  </p:cSld>
-  <p:clrMapOvr>
-    <a:masterClrMapping/>
-  </p:clrMapOvr>
-</p:notes>
-</file>
-
-<file path=ppt/notesSlides/notesSlide22.xml><?xml version="1.0" encoding="utf-8"?>
-<p:notes xmlns:a="http://schemas.openxmlformats.org/drawingml/2006/main" xmlns:r="http://schemas.openxmlformats.org/officeDocument/2006/relationships" xmlns:p="http://schemas.openxmlformats.org/presentationml/2006/main">
-  <p:cSld>
-    <p:spTree>
-      <p:nvGrpSpPr>
-        <p:cNvPr id="1" name=""/>
-        <p:cNvGrpSpPr/>
-        <p:nvPr/>
-      </p:nvGrpSpPr>
-      <p:grpSpPr>
-        <a:xfrm>
-          <a:off x="0" y="0"/>
-          <a:ext cx="0" cy="0"/>
-          <a:chOff x="0" y="0"/>
-          <a:chExt cx="0" cy="0"/>
-        </a:xfrm>
-      </p:grpSpPr>
-      <p:sp>
-        <p:nvSpPr>
-          <p:cNvPr id="2" name="Slide Image Placeholder 1"/>
-          <p:cNvSpPr>
-            <a:spLocks noGrp="1" noRot="1" noChangeAspect="1"/>
-          </p:cNvSpPr>
-          <p:nvPr>
-            <p:ph type="sldImg"/>
-          </p:nvPr>
-        </p:nvSpPr>
-        <p:spPr/>
-      </p:sp>
-      <p:sp>
-        <p:nvSpPr>
-          <p:cNvPr id="3" name="Notes Placeholder 2"/>
-          <p:cNvSpPr>
-            <a:spLocks noGrp="1"/>
-          </p:cNvSpPr>
-          <p:nvPr>
-            <p:ph type="body" idx="1"/>
-          </p:nvPr>
-        </p:nvSpPr>
-        <p:spPr/>
-        <p:txBody>
-          <a:bodyPr/>
-          <a:lstStyle/>
-          <a:p>
-            <a:r>
-              <a:rPr lang="en-US" dirty="0"/>
-              <a:t/>
-            </a:r>
-            <a:endParaRPr lang="en-US" dirty="0"/>
-          </a:p>
-        </p:txBody>
-      </p:sp>
-      <p:sp>
-        <p:nvSpPr>
-          <p:cNvPr id="4" name="Slide Number Placeholder 3"/>
-          <p:cNvSpPr>
-            <a:spLocks noGrp="1"/>
-          </p:cNvSpPr>
-          <p:nvPr>
-            <p:ph type="sldNum" sz="quarter" idx="10"/>
-          </p:nvPr>
-        </p:nvSpPr>
-        <p:spPr/>
-        <p:txBody>
-          <a:bodyPr/>
-          <a:lstStyle/>
-          <a:p>
-            <a:fld id="{F7021451-1387-4CA6-816F-3879F97B5CBC}" type="slidenum">
-              <a:rPr lang="en-US"/>
-              <a:t>22</a:t>
             </a:fld>
             <a:endParaRPr lang="en-US"/>
           </a:p>
@@ -3251,7 +3162,7 @@
                 <a:ea typeface="Arial" pitchFamily="34" charset="-122"/>
                 <a:cs typeface="Arial" pitchFamily="34" charset="-120"/>
               </a:rPr>
-              <a:t>Open your browser:  http://localhost:18789</a:t>
+              <a:t>Open:  http://localhost:18789</a:t>
             </a:r>
             <a:endParaRPr lang="en-US" sz="1400" dirty="0"/>
           </a:p>
@@ -3259,52 +3170,13 @@
       </p:sp>
       <p:sp>
         <p:nvSpPr>
-          <p:cNvPr id="9" name="Text 7"/>
+          <p:cNvPr id="9" name="Shape 7"/>
           <p:cNvSpPr/>
           <p:nvPr/>
         </p:nvSpPr>
         <p:spPr>
           <a:xfrm>
             <a:off x="731520" y="2560320"/>
-            <a:ext cx="2743200" cy="274320"/>
-          </a:xfrm>
-          <a:prstGeom prst="rect">
-            <a:avLst/>
-          </a:prstGeom>
-          <a:noFill/>
-          <a:ln/>
-        </p:spPr>
-        <p:txBody>
-          <a:bodyPr wrap="square" rtlCol="0" anchor="ctr"/>
-          <a:lstStyle/>
-          <a:p>
-            <a:pPr indent="0" marL="0">
-              <a:buNone/>
-            </a:pPr>
-            <a:r>
-              <a:rPr lang="en-US" sz="1300" dirty="0">
-                <a:solidFill>
-                  <a:srgbClr val="9CA3AF"/>
-                </a:solidFill>
-                <a:latin typeface="Arial" pitchFamily="34" charset="0"/>
-                <a:ea typeface="Arial" pitchFamily="34" charset="-122"/>
-                <a:cs typeface="Arial" pitchFamily="34" charset="-120"/>
-              </a:rPr>
-              <a:t>Verify models:</a:t>
-            </a:r>
-            <a:endParaRPr lang="en-US" sz="1300" dirty="0"/>
-          </a:p>
-        </p:txBody>
-      </p:sp>
-      <p:sp>
-        <p:nvSpPr>
-          <p:cNvPr id="10" name="Shape 8"/>
-          <p:cNvSpPr/>
-          <p:nvPr/>
-        </p:nvSpPr>
-        <p:spPr>
-          <a:xfrm>
-            <a:off x="731520" y="2926080"/>
             <a:ext cx="7680960" cy="731520"/>
           </a:xfrm>
           <a:prstGeom prst="roundRect">
@@ -3320,13 +3192,13 @@
       </p:sp>
       <p:sp>
         <p:nvSpPr>
-          <p:cNvPr id="11" name="Text 9"/>
+          <p:cNvPr id="10" name="Text 8"/>
           <p:cNvSpPr/>
           <p:nvPr/>
         </p:nvSpPr>
         <p:spPr>
           <a:xfrm>
-            <a:off x="868680" y="2999232"/>
+            <a:off x="868680" y="2633472"/>
             <a:ext cx="7406640" cy="585216"/>
           </a:xfrm>
           <a:prstGeom prst="rect">
@@ -3357,7 +3229,7 @@
                 <a:ea typeface="Courier New" pitchFamily="34" charset="-122"/>
                 <a:cs typeface="Courier New" pitchFamily="34" charset="-120"/>
               </a:rPr>
-              <a:t>/models          # List all available models</a:t>
+              <a:t>/models          # List all models</a:t>
             </a:r>
             <a:endParaRPr lang="en-US" sz="1000" dirty="0"/>
           </a:p>
@@ -3380,7 +3252,7 @@
                 <a:ea typeface="Courier New" pitchFamily="34" charset="-122"/>
                 <a:cs typeface="Courier New" pitchFamily="34" charset="-120"/>
               </a:rPr>
-              <a:t>/model llama70b  # Switch to Llama 3.1 70B</a:t>
+              <a:t>/model llama70b  # Switch model</a:t>
             </a:r>
             <a:endParaRPr lang="en-US" sz="1000" dirty="0"/>
           </a:p>
@@ -3403,7 +3275,7 @@
                 <a:ea typeface="Courier New" pitchFamily="34" charset="-122"/>
                 <a:cs typeface="Courier New" pitchFamily="34" charset="-120"/>
               </a:rPr>
-              <a:t>/status          # Check current model</a:t>
+              <a:t>/status          # Check connection</a:t>
             </a:r>
             <a:endParaRPr lang="en-US" sz="1000" dirty="0"/>
           </a:p>
@@ -3411,13 +3283,13 @@
       </p:sp>
       <p:sp>
         <p:nvSpPr>
-          <p:cNvPr id="12" name="Text 10"/>
+          <p:cNvPr id="11" name="Text 9"/>
           <p:cNvSpPr/>
           <p:nvPr/>
         </p:nvSpPr>
         <p:spPr>
           <a:xfrm>
-            <a:off x="731520" y="3931920"/>
+            <a:off x="731520" y="3657600"/>
             <a:ext cx="7315200" cy="457200"/>
           </a:xfrm>
           <a:prstGeom prst="rect">
@@ -3442,7 +3314,7 @@
                 <a:ea typeface="Arial" pitchFamily="34" charset="-122"/>
                 <a:cs typeface="Arial" pitchFamily="34" charset="-120"/>
               </a:rPr>
-              <a:t>Your agent is live. Connected to Llama 3.1 70B on Nebius. No GPU on your machine.</a:t>
+              <a:t>Your agent is live. No GPU on your machine.</a:t>
             </a:r>
             <a:endParaRPr lang="en-US" sz="1400" dirty="0"/>
           </a:p>
@@ -4415,7 +4287,7 @@
                           <a:ea typeface="Arial" pitchFamily="34" charset="-122"/>
                           <a:cs typeface="Arial" pitchFamily="34" charset="-120"/>
                         </a:rPr>
-                        <a:t>High throughput, simple tasks</a:t>
+                        <a:t>High throughput</a:t>
                       </a:r>
                       <a:endParaRPr lang="en-US" sz="900" dirty="0">
                         <a:latin typeface="Arial" charset="0"/>
@@ -4963,7 +4835,7 @@
                           <a:ea typeface="Arial" pitchFamily="34" charset="-122"/>
                           <a:cs typeface="Arial" pitchFamily="34" charset="-120"/>
                         </a:rPr>
-                        <a:t>Code generation, multilingual</a:t>
+                        <a:t>Code, multilingual</a:t>
                       </a:r>
                       <a:endParaRPr lang="en-US" sz="900" dirty="0">
                         <a:latin typeface="Arial" charset="0"/>
@@ -5237,7 +5109,7 @@
                           <a:ea typeface="Arial" pitchFamily="34" charset="-122"/>
                           <a:cs typeface="Arial" pitchFamily="34" charset="-120"/>
                         </a:rPr>
-                        <a:t>European languages, code</a:t>
+                        <a:t>European languages</a:t>
                       </a:r>
                       <a:endParaRPr lang="en-US" sz="900" dirty="0">
                         <a:latin typeface="Arial" charset="0"/>
@@ -5293,112 +5165,6 @@
           </a:graphicData>
         </a:graphic>
       </p:graphicFrame>
-      <p:sp>
-        <p:nvSpPr>
-          <p:cNvPr id="7" name="Text 4"/>
-          <p:cNvSpPr/>
-          <p:nvPr/>
-        </p:nvSpPr>
-        <p:spPr>
-          <a:xfrm>
-            <a:off x="731520" y="3474720"/>
-            <a:ext cx="3657600" cy="274320"/>
-          </a:xfrm>
-          <a:prstGeom prst="rect">
-            <a:avLst/>
-          </a:prstGeom>
-          <a:noFill/>
-          <a:ln/>
-        </p:spPr>
-        <p:txBody>
-          <a:bodyPr wrap="square" rtlCol="0" anchor="ctr"/>
-          <a:lstStyle/>
-          <a:p>
-            <a:pPr indent="0" marL="0">
-              <a:buNone/>
-            </a:pPr>
-            <a:r>
-              <a:rPr lang="en-US" sz="1200" dirty="0">
-                <a:solidFill>
-                  <a:srgbClr val="9CA3AF"/>
-                </a:solidFill>
-                <a:latin typeface="Arial" pitchFamily="34" charset="0"/>
-                <a:ea typeface="Arial" pitchFamily="34" charset="-122"/>
-                <a:cs typeface="Arial" pitchFamily="34" charset="-120"/>
-              </a:rPr>
-              <a:t>Switch models anytime:</a:t>
-            </a:r>
-            <a:endParaRPr lang="en-US" sz="1200" dirty="0"/>
-          </a:p>
-        </p:txBody>
-      </p:sp>
-      <p:sp>
-        <p:nvSpPr>
-          <p:cNvPr id="8" name="Shape 5"/>
-          <p:cNvSpPr/>
-          <p:nvPr/>
-        </p:nvSpPr>
-        <p:spPr>
-          <a:xfrm>
-            <a:off x="731520" y="3840480"/>
-            <a:ext cx="7680960" cy="411480"/>
-          </a:xfrm>
-          <a:prstGeom prst="roundRect">
-            <a:avLst>
-              <a:gd name="adj" fmla="val 17778"/>
-            </a:avLst>
-          </a:prstGeom>
-          <a:solidFill>
-            <a:srgbClr val="161927"/>
-          </a:solidFill>
-          <a:ln/>
-        </p:spPr>
-      </p:sp>
-      <p:sp>
-        <p:nvSpPr>
-          <p:cNvPr id="9" name="Text 6"/>
-          <p:cNvSpPr/>
-          <p:nvPr/>
-        </p:nvSpPr>
-        <p:spPr>
-          <a:xfrm>
-            <a:off x="868680" y="3913632"/>
-            <a:ext cx="7406640" cy="265176"/>
-          </a:xfrm>
-          <a:prstGeom prst="rect">
-            <a:avLst/>
-          </a:prstGeom>
-          <a:noFill/>
-          <a:ln/>
-        </p:spPr>
-        <p:txBody>
-          <a:bodyPr wrap="square" rtlCol="0" anchor="t"/>
-          <a:lstStyle/>
-          <a:p>
-            <a:pPr indent="0" marL="0">
-              <a:spcBef>
-                <a:spcPts val="200"/>
-              </a:spcBef>
-              <a:spcAft>
-                <a:spcPts val="200"/>
-              </a:spcAft>
-              <a:buNone/>
-            </a:pPr>
-            <a:r>
-              <a:rPr lang="en-US" sz="1000" dirty="0">
-                <a:solidFill>
-                  <a:srgbClr val="B8FF4A"/>
-                </a:solidFill>
-                <a:latin typeface="Courier New" pitchFamily="34" charset="0"/>
-                <a:ea typeface="Courier New" pitchFamily="34" charset="-122"/>
-                <a:cs typeface="Courier New" pitchFamily="34" charset="-120"/>
-              </a:rPr>
-              <a:t>openclaw config set agents.defaults.model.primary "zai-org/GLM-5"</a:t>
-            </a:r>
-            <a:endParaRPr lang="en-US" sz="1000" dirty="0"/>
-          </a:p>
-        </p:txBody>
-      </p:sp>
     </p:spTree>
   </p:cSld>
   <p:clrMapOvr>
@@ -5562,7 +5328,7 @@
                 <a:ea typeface="Arial" pitchFamily="34" charset="-122"/>
                 <a:cs typeface="Arial" pitchFamily="34" charset="-120"/>
               </a:rPr>
-              <a:t>Is Docker Right for Me?</a:t>
+              <a:t>Docker Deployment</a:t>
             </a:r>
             <a:endParaRPr lang="en-US" sz="3200" dirty="0"/>
           </a:p>
@@ -5576,12 +5342,12 @@
         </p:nvSpPr>
         <p:spPr>
           <a:xfrm>
-            <a:off x="731520" y="1371600"/>
-            <a:ext cx="3657600" cy="1280160"/>
+            <a:off x="731520" y="1280160"/>
+            <a:ext cx="3657600" cy="1097280"/>
           </a:xfrm>
           <a:prstGeom prst="roundRect">
             <a:avLst>
-              <a:gd name="adj" fmla="val 5714"/>
+              <a:gd name="adj" fmla="val 6667"/>
             </a:avLst>
           </a:prstGeom>
           <a:solidFill>
@@ -5598,7 +5364,7 @@
         </p:nvSpPr>
         <p:spPr>
           <a:xfrm>
-            <a:off x="914400" y="1417320"/>
+            <a:off x="914400" y="1325880"/>
             <a:ext cx="3291840" cy="274320"/>
           </a:xfrm>
           <a:prstGeom prst="rect">
@@ -5637,8 +5403,8 @@
         </p:nvSpPr>
         <p:spPr>
           <a:xfrm>
-            <a:off x="914400" y="1737360"/>
-            <a:ext cx="3291840" cy="822960"/>
+            <a:off x="914400" y="1645920"/>
+            <a:ext cx="3291840" cy="640080"/>
           </a:xfrm>
           <a:prstGeom prst="rect">
             <a:avLst/>
@@ -5713,12 +5479,12 @@
         </p:nvSpPr>
         <p:spPr>
           <a:xfrm>
-            <a:off x="4754880" y="1371600"/>
-            <a:ext cx="3657600" cy="1280160"/>
+            <a:off x="4754880" y="1280160"/>
+            <a:ext cx="3657600" cy="1097280"/>
           </a:xfrm>
           <a:prstGeom prst="roundRect">
             <a:avLst>
-              <a:gd name="adj" fmla="val 5714"/>
+              <a:gd name="adj" fmla="val 6667"/>
             </a:avLst>
           </a:prstGeom>
           <a:solidFill>
@@ -5735,7 +5501,7 @@
         </p:nvSpPr>
         <p:spPr>
           <a:xfrm>
-            <a:off x="4937760" y="1417320"/>
+            <a:off x="4937760" y="1325880"/>
             <a:ext cx="3291840" cy="274320"/>
           </a:xfrm>
           <a:prstGeom prst="rect">
@@ -5774,8 +5540,8 @@
         </p:nvSpPr>
         <p:spPr>
           <a:xfrm>
-            <a:off x="4937760" y="1737360"/>
-            <a:ext cx="3291840" cy="822960"/>
+            <a:off x="4937760" y="1645920"/>
+            <a:ext cx="3291840" cy="640080"/>
           </a:xfrm>
           <a:prstGeom prst="rect">
             <a:avLst/>
@@ -5800,7 +5566,7 @@
                 <a:ea typeface="Arial" pitchFamily="34" charset="-122"/>
                 <a:cs typeface="Arial" pitchFamily="34" charset="-120"/>
               </a:rPr>
-              <a:t>Fastest local dev cycle</a:t>
+              <a:t>Fastest dev cycle</a:t>
             </a:r>
             <a:endParaRPr lang="en-US" sz="1100" dirty="0"/>
           </a:p>
@@ -5832,12 +5598,12 @@
         </p:nvSpPr>
         <p:spPr>
           <a:xfrm>
-            <a:off x="731520" y="2926080"/>
-            <a:ext cx="7680960" cy="1280160"/>
+            <a:off x="731520" y="2651760"/>
+            <a:ext cx="7680960" cy="640080"/>
           </a:xfrm>
           <a:prstGeom prst="roundRect">
             <a:avLst>
-              <a:gd name="adj" fmla="val 5714"/>
+              <a:gd name="adj" fmla="val 11429"/>
             </a:avLst>
           </a:prstGeom>
           <a:solidFill>
@@ -5854,8 +5620,8 @@
         </p:nvSpPr>
         <p:spPr>
           <a:xfrm>
-            <a:off x="868680" y="2999232"/>
-            <a:ext cx="7406640" cy="1133856"/>
+            <a:off x="868680" y="2724912"/>
+            <a:ext cx="7406640" cy="493776"/>
           </a:xfrm>
           <a:prstGeom prst="rect">
             <a:avLst/>
@@ -5877,7 +5643,7 @@
               <a:buNone/>
             </a:pPr>
             <a:r>
-              <a:rPr lang="en-US" sz="900" dirty="0">
+              <a:rPr lang="en-US" sz="1000" dirty="0">
                 <a:solidFill>
                   <a:srgbClr val="B8FF4A"/>
                 </a:solidFill>
@@ -5887,7 +5653,7 @@
               </a:rPr>
               <a:t>export OPENCLAW_IMAGE="ghcr.io/openclaw/openclaw:latest"</a:t>
             </a:r>
-            <a:endParaRPr lang="en-US" sz="900" dirty="0"/>
+            <a:endParaRPr lang="en-US" sz="1000" dirty="0"/>
           </a:p>
           <a:p>
             <a:pPr indent="0" marL="0">
@@ -5900,7 +5666,7 @@
               <a:buNone/>
             </a:pPr>
             <a:r>
-              <a:rPr lang="en-US" sz="900" dirty="0">
+              <a:rPr lang="en-US" sz="1000" dirty="0">
                 <a:solidFill>
                   <a:srgbClr val="B8FF4A"/>
                 </a:solidFill>
@@ -5910,8 +5676,52 @@
               </a:rPr>
               <a:t>./scripts/docker/setup.sh</a:t>
             </a:r>
-            <a:endParaRPr lang="en-US" sz="900" dirty="0"/>
-          </a:p>
+            <a:endParaRPr lang="en-US" sz="1000" dirty="0"/>
+          </a:p>
+        </p:txBody>
+      </p:sp>
+      <p:sp>
+        <p:nvSpPr>
+          <p:cNvPr id="14" name="Shape 12"/>
+          <p:cNvSpPr/>
+          <p:nvPr/>
+        </p:nvSpPr>
+        <p:spPr>
+          <a:xfrm>
+            <a:off x="731520" y="3474720"/>
+            <a:ext cx="7680960" cy="1097280"/>
+          </a:xfrm>
+          <a:prstGeom prst="roundRect">
+            <a:avLst>
+              <a:gd name="adj" fmla="val 6667"/>
+            </a:avLst>
+          </a:prstGeom>
+          <a:solidFill>
+            <a:srgbClr val="161927"/>
+          </a:solidFill>
+          <a:ln/>
+        </p:spPr>
+      </p:sp>
+      <p:sp>
+        <p:nvSpPr>
+          <p:cNvPr id="15" name="Text 13"/>
+          <p:cNvSpPr/>
+          <p:nvPr/>
+        </p:nvSpPr>
+        <p:spPr>
+          <a:xfrm>
+            <a:off x="868680" y="3547872"/>
+            <a:ext cx="7406640" cy="950976"/>
+          </a:xfrm>
+          <a:prstGeom prst="rect">
+            <a:avLst/>
+          </a:prstGeom>
+          <a:noFill/>
+          <a:ln/>
+        </p:spPr>
+        <p:txBody>
+          <a:bodyPr wrap="square" rtlCol="0" anchor="t"/>
+          <a:lstStyle/>
           <a:p>
             <a:pPr indent="0" marL="0">
               <a:spcBef>
@@ -5922,6 +5732,17 @@
               </a:spcAft>
               <a:buNone/>
             </a:pPr>
+            <a:r>
+              <a:rPr lang="en-US" sz="900" dirty="0">
+                <a:solidFill>
+                  <a:srgbClr val="B8FF4A"/>
+                </a:solidFill>
+                <a:latin typeface="Courier New" pitchFamily="34" charset="0"/>
+                <a:ea typeface="Courier New" pitchFamily="34" charset="-122"/>
+                <a:cs typeface="Courier New" pitchFamily="34" charset="-120"/>
+              </a:rPr>
+              <a:t># Docker + Token Factory:</a:t>
+            </a:r>
             <a:endParaRPr lang="en-US" sz="900" dirty="0"/>
           </a:p>
           <a:p>
@@ -5943,7 +5764,7 @@
                 <a:ea typeface="Courier New" pitchFamily="34" charset="-122"/>
                 <a:cs typeface="Courier New" pitchFamily="34" charset="-120"/>
               </a:rPr>
-              <a:t># Or manual:</a:t>
+              <a:t>docker compose run --rm --no-deps --entrypoint node \</a:t>
             </a:r>
             <a:endParaRPr lang="en-US" sz="900" dirty="0"/>
           </a:p>
@@ -5966,7 +5787,7 @@
                 <a:ea typeface="Courier New" pitchFamily="34" charset="-122"/>
                 <a:cs typeface="Courier New" pitchFamily="34" charset="-120"/>
               </a:rPr>
-              <a:t>docker build -t openclaw:local -f Dockerfile .</a:t>
+              <a:t>  openclaw-gateway dist/index.js onboard \</a:t>
             </a:r>
             <a:endParaRPr lang="en-US" sz="900" dirty="0"/>
           </a:p>
@@ -5989,48 +5810,32 @@
                 <a:ea typeface="Courier New" pitchFamily="34" charset="-122"/>
                 <a:cs typeface="Courier New" pitchFamily="34" charset="-120"/>
               </a:rPr>
-              <a:t>docker compose up -d openclaw-gateway</a:t>
+              <a:t>  --custom-base-url "https://api.tokenfactory.nebius.com/v1" \</a:t>
             </a:r>
             <a:endParaRPr lang="en-US" sz="900" dirty="0"/>
           </a:p>
-        </p:txBody>
-      </p:sp>
-      <p:sp>
-        <p:nvSpPr>
-          <p:cNvPr id="14" name="Text 12"/>
-          <p:cNvSpPr/>
-          <p:nvPr/>
-        </p:nvSpPr>
-        <p:spPr>
-          <a:xfrm>
-            <a:off x="731520" y="4389120"/>
-            <a:ext cx="7315200" cy="274320"/>
-          </a:xfrm>
-          <a:prstGeom prst="rect">
-            <a:avLst/>
-          </a:prstGeom>
-          <a:noFill/>
-          <a:ln/>
-        </p:spPr>
-        <p:txBody>
-          <a:bodyPr wrap="square" rtlCol="0" anchor="ctr"/>
-          <a:lstStyle/>
           <a:p>
             <a:pPr indent="0" marL="0">
+              <a:spcBef>
+                <a:spcPts val="200"/>
+              </a:spcBef>
+              <a:spcAft>
+                <a:spcPts val="200"/>
+              </a:spcAft>
               <a:buNone/>
             </a:pPr>
             <a:r>
-              <a:rPr lang="en-US" sz="1100" dirty="0">
+              <a:rPr lang="en-US" sz="900" dirty="0">
                 <a:solidFill>
                   <a:srgbClr val="B8FF4A"/>
                 </a:solidFill>
-                <a:latin typeface="Arial" pitchFamily="34" charset="0"/>
-                <a:ea typeface="Arial" pitchFamily="34" charset="-122"/>
-                <a:cs typeface="Arial" pitchFamily="34" charset="-120"/>
-              </a:rPr>
-              <a:t>Access at http://127.0.0.1:18789/</a:t>
-            </a:r>
-            <a:endParaRPr lang="en-US" sz="1100" dirty="0"/>
+                <a:latin typeface="Courier New" pitchFamily="34" charset="0"/>
+                <a:ea typeface="Courier New" pitchFamily="34" charset="-122"/>
+                <a:cs typeface="Courier New" pitchFamily="34" charset="-120"/>
+              </a:rPr>
+              <a:t>  --custom-api-key "$NEBIUS_API_KEY"</a:t>
+            </a:r>
+            <a:endParaRPr lang="en-US" sz="900" dirty="0"/>
           </a:p>
         </p:txBody>
       </p:sp>
@@ -6197,7 +6002,7 @@
                 <a:ea typeface="Arial" pitchFamily="34" charset="-122"/>
                 <a:cs typeface="Arial" pitchFamily="34" charset="-120"/>
               </a:rPr>
-              <a:t>Docker + Token Factory</a:t>
+              <a:t>Structured Tool Calling</a:t>
             </a:r>
             <a:endParaRPr lang="en-US" sz="3200" dirty="0"/>
           </a:p>
@@ -6211,8 +6016,8 @@
         </p:nvSpPr>
         <p:spPr>
           <a:xfrm>
-            <a:off x="731520" y="1371600"/>
-            <a:ext cx="7315200" cy="274320"/>
+            <a:off x="731520" y="1188720"/>
+            <a:ext cx="6400800" cy="365760"/>
           </a:xfrm>
           <a:prstGeom prst="rect">
             <a:avLst/>
@@ -6228,7 +6033,7 @@
               <a:buNone/>
             </a:pPr>
             <a:r>
-              <a:rPr lang="en-US" sz="1300" dirty="0">
+              <a:rPr lang="en-US" sz="1600" dirty="0">
                 <a:solidFill>
                   <a:srgbClr val="B8FF4A"/>
                 </a:solidFill>
@@ -6236,22 +6041,227 @@
                 <a:ea typeface="Arial" pitchFamily="34" charset="-122"/>
                 <a:cs typeface="Arial" pitchFamily="34" charset="-120"/>
               </a:rPr>
-              <a:t>Option A: Mount your config file — Docker picks it up automatically</a:t>
-            </a:r>
-            <a:endParaRPr lang="en-US" sz="1300" dirty="0"/>
+              <a:t>JSON mode for reliable tool calling</a:t>
+            </a:r>
+            <a:endParaRPr lang="en-US" sz="1600" dirty="0"/>
           </a:p>
         </p:txBody>
       </p:sp>
       <p:sp>
         <p:nvSpPr>
-          <p:cNvPr id="7" name="Text 5"/>
+          <p:cNvPr id="7" name="Shape 5"/>
           <p:cNvSpPr/>
           <p:nvPr/>
         </p:nvSpPr>
         <p:spPr>
           <a:xfrm>
-            <a:off x="731520" y="1828800"/>
-            <a:ext cx="7315200" cy="274320"/>
+            <a:off x="731520" y="1737360"/>
+            <a:ext cx="7680960" cy="1463040"/>
+          </a:xfrm>
+          <a:prstGeom prst="roundRect">
+            <a:avLst>
+              <a:gd name="adj" fmla="val 5000"/>
+            </a:avLst>
+          </a:prstGeom>
+          <a:solidFill>
+            <a:srgbClr val="161927"/>
+          </a:solidFill>
+          <a:ln/>
+        </p:spPr>
+      </p:sp>
+      <p:sp>
+        <p:nvSpPr>
+          <p:cNvPr id="8" name="Text 6"/>
+          <p:cNvSpPr/>
+          <p:nvPr/>
+        </p:nvSpPr>
+        <p:spPr>
+          <a:xfrm>
+            <a:off x="868680" y="1810512"/>
+            <a:ext cx="7406640" cy="1316736"/>
+          </a:xfrm>
+          <a:prstGeom prst="rect">
+            <a:avLst/>
+          </a:prstGeom>
+          <a:noFill/>
+          <a:ln/>
+        </p:spPr>
+        <p:txBody>
+          <a:bodyPr wrap="square" rtlCol="0" anchor="t"/>
+          <a:lstStyle/>
+          <a:p>
+            <a:pPr indent="0" marL="0">
+              <a:spcBef>
+                <a:spcPts val="200"/>
+              </a:spcBef>
+              <a:spcAft>
+                <a:spcPts val="200"/>
+              </a:spcAft>
+              <a:buNone/>
+            </a:pPr>
+            <a:r>
+              <a:rPr lang="en-US" sz="1200" dirty="0">
+                <a:solidFill>
+                  <a:srgbClr val="B8FF4A"/>
+                </a:solidFill>
+                <a:latin typeface="Courier New" pitchFamily="34" charset="0"/>
+                <a:ea typeface="Courier New" pitchFamily="34" charset="-122"/>
+                <a:cs typeface="Courier New" pitchFamily="34" charset="-120"/>
+              </a:rPr>
+              <a:t>{</a:t>
+            </a:r>
+            <a:endParaRPr lang="en-US" sz="1200" dirty="0"/>
+          </a:p>
+          <a:p>
+            <a:pPr indent="0" marL="0">
+              <a:spcBef>
+                <a:spcPts val="200"/>
+              </a:spcBef>
+              <a:spcAft>
+                <a:spcPts val="200"/>
+              </a:spcAft>
+              <a:buNone/>
+            </a:pPr>
+            <a:r>
+              <a:rPr lang="en-US" sz="1200" dirty="0">
+                <a:solidFill>
+                  <a:srgbClr val="B8FF4A"/>
+                </a:solidFill>
+                <a:latin typeface="Courier New" pitchFamily="34" charset="0"/>
+                <a:ea typeface="Courier New" pitchFamily="34" charset="-122"/>
+                <a:cs typeface="Courier New" pitchFamily="34" charset="-120"/>
+              </a:rPr>
+              <a:t>  "tool": "get_weather",</a:t>
+            </a:r>
+            <a:endParaRPr lang="en-US" sz="1200" dirty="0"/>
+          </a:p>
+          <a:p>
+            <a:pPr indent="0" marL="0">
+              <a:spcBef>
+                <a:spcPts val="200"/>
+              </a:spcBef>
+              <a:spcAft>
+                <a:spcPts val="200"/>
+              </a:spcAft>
+              <a:buNone/>
+            </a:pPr>
+            <a:r>
+              <a:rPr lang="en-US" sz="1200" dirty="0">
+                <a:solidFill>
+                  <a:srgbClr val="B8FF4A"/>
+                </a:solidFill>
+                <a:latin typeface="Courier New" pitchFamily="34" charset="0"/>
+                <a:ea typeface="Courier New" pitchFamily="34" charset="-122"/>
+                <a:cs typeface="Courier New" pitchFamily="34" charset="-120"/>
+              </a:rPr>
+              <a:t>  "arguments": {</a:t>
+            </a:r>
+            <a:endParaRPr lang="en-US" sz="1200" dirty="0"/>
+          </a:p>
+          <a:p>
+            <a:pPr indent="0" marL="0">
+              <a:spcBef>
+                <a:spcPts val="200"/>
+              </a:spcBef>
+              <a:spcAft>
+                <a:spcPts val="200"/>
+              </a:spcAft>
+              <a:buNone/>
+            </a:pPr>
+            <a:r>
+              <a:rPr lang="en-US" sz="1200" dirty="0">
+                <a:solidFill>
+                  <a:srgbClr val="B8FF4A"/>
+                </a:solidFill>
+                <a:latin typeface="Courier New" pitchFamily="34" charset="0"/>
+                <a:ea typeface="Courier New" pitchFamily="34" charset="-122"/>
+                <a:cs typeface="Courier New" pitchFamily="34" charset="-120"/>
+              </a:rPr>
+              <a:t>    "city": "Oakland",</a:t>
+            </a:r>
+            <a:endParaRPr lang="en-US" sz="1200" dirty="0"/>
+          </a:p>
+          <a:p>
+            <a:pPr indent="0" marL="0">
+              <a:spcBef>
+                <a:spcPts val="200"/>
+              </a:spcBef>
+              <a:spcAft>
+                <a:spcPts val="200"/>
+              </a:spcAft>
+              <a:buNone/>
+            </a:pPr>
+            <a:r>
+              <a:rPr lang="en-US" sz="1200" dirty="0">
+                <a:solidFill>
+                  <a:srgbClr val="B8FF4A"/>
+                </a:solidFill>
+                <a:latin typeface="Courier New" pitchFamily="34" charset="0"/>
+                <a:ea typeface="Courier New" pitchFamily="34" charset="-122"/>
+                <a:cs typeface="Courier New" pitchFamily="34" charset="-120"/>
+              </a:rPr>
+              <a:t>    "units": "fahrenheit"</a:t>
+            </a:r>
+            <a:endParaRPr lang="en-US" sz="1200" dirty="0"/>
+          </a:p>
+          <a:p>
+            <a:pPr indent="0" marL="0">
+              <a:spcBef>
+                <a:spcPts val="200"/>
+              </a:spcBef>
+              <a:spcAft>
+                <a:spcPts val="200"/>
+              </a:spcAft>
+              <a:buNone/>
+            </a:pPr>
+            <a:r>
+              <a:rPr lang="en-US" sz="1200" dirty="0">
+                <a:solidFill>
+                  <a:srgbClr val="B8FF4A"/>
+                </a:solidFill>
+                <a:latin typeface="Courier New" pitchFamily="34" charset="0"/>
+                <a:ea typeface="Courier New" pitchFamily="34" charset="-122"/>
+                <a:cs typeface="Courier New" pitchFamily="34" charset="-120"/>
+              </a:rPr>
+              <a:t>  }</a:t>
+            </a:r>
+            <a:endParaRPr lang="en-US" sz="1200" dirty="0"/>
+          </a:p>
+          <a:p>
+            <a:pPr indent="0" marL="0">
+              <a:spcBef>
+                <a:spcPts val="200"/>
+              </a:spcBef>
+              <a:spcAft>
+                <a:spcPts val="200"/>
+              </a:spcAft>
+              <a:buNone/>
+            </a:pPr>
+            <a:r>
+              <a:rPr lang="en-US" sz="1200" dirty="0">
+                <a:solidFill>
+                  <a:srgbClr val="B8FF4A"/>
+                </a:solidFill>
+                <a:latin typeface="Courier New" pitchFamily="34" charset="0"/>
+                <a:ea typeface="Courier New" pitchFamily="34" charset="-122"/>
+                <a:cs typeface="Courier New" pitchFamily="34" charset="-120"/>
+              </a:rPr>
+              <a:t>}</a:t>
+            </a:r>
+            <a:endParaRPr lang="en-US" sz="1200" dirty="0"/>
+          </a:p>
+        </p:txBody>
+      </p:sp>
+      <p:sp>
+        <p:nvSpPr>
+          <p:cNvPr id="9" name="Text 7"/>
+          <p:cNvSpPr/>
+          <p:nvPr/>
+        </p:nvSpPr>
+        <p:spPr>
+          <a:xfrm>
+            <a:off x="731520" y="3474720"/>
+            <a:ext cx="7315200" cy="365760"/>
           </a:xfrm>
           <a:prstGeom prst="rect">
             <a:avLst/>
@@ -6267,259 +6277,15 @@
               <a:buNone/>
             </a:pPr>
             <a:r>
-              <a:rPr lang="en-US" sz="1300" dirty="0">
-                <a:solidFill>
-                  <a:srgbClr val="B8FF4A"/>
+              <a:rPr lang="en-US" sz="1400" dirty="0">
+                <a:solidFill>
+                  <a:srgbClr val="FFFFFF"/>
                 </a:solidFill>
                 <a:latin typeface="Arial" pitchFamily="34" charset="0"/>
                 <a:ea typeface="Arial" pitchFamily="34" charset="-122"/>
                 <a:cs typeface="Arial" pitchFamily="34" charset="-120"/>
               </a:rPr>
-              <a:t>Option B: Onboard inside the container</a:t>
-            </a:r>
-            <a:endParaRPr lang="en-US" sz="1300" dirty="0"/>
-          </a:p>
-        </p:txBody>
-      </p:sp>
-      <p:sp>
-        <p:nvSpPr>
-          <p:cNvPr id="8" name="Shape 6"/>
-          <p:cNvSpPr/>
-          <p:nvPr/>
-        </p:nvSpPr>
-        <p:spPr>
-          <a:xfrm>
-            <a:off x="731520" y="2286000"/>
-            <a:ext cx="7680960" cy="1371600"/>
-          </a:xfrm>
-          <a:prstGeom prst="roundRect">
-            <a:avLst>
-              <a:gd name="adj" fmla="val 5333"/>
-            </a:avLst>
-          </a:prstGeom>
-          <a:solidFill>
-            <a:srgbClr val="161927"/>
-          </a:solidFill>
-          <a:ln/>
-        </p:spPr>
-      </p:sp>
-      <p:sp>
-        <p:nvSpPr>
-          <p:cNvPr id="9" name="Text 7"/>
-          <p:cNvSpPr/>
-          <p:nvPr/>
-        </p:nvSpPr>
-        <p:spPr>
-          <a:xfrm>
-            <a:off x="868680" y="2359152"/>
-            <a:ext cx="7406640" cy="1225296"/>
-          </a:xfrm>
-          <a:prstGeom prst="rect">
-            <a:avLst/>
-          </a:prstGeom>
-          <a:noFill/>
-          <a:ln/>
-        </p:spPr>
-        <p:txBody>
-          <a:bodyPr wrap="square" rtlCol="0" anchor="t"/>
-          <a:lstStyle/>
-          <a:p>
-            <a:pPr indent="0" marL="0">
-              <a:spcBef>
-                <a:spcPts val="200"/>
-              </a:spcBef>
-              <a:spcAft>
-                <a:spcPts val="200"/>
-              </a:spcAft>
-              <a:buNone/>
-            </a:pPr>
-            <a:r>
-              <a:rPr lang="en-US" sz="900" dirty="0">
-                <a:solidFill>
-                  <a:srgbClr val="B8FF4A"/>
-                </a:solidFill>
-                <a:latin typeface="Courier New" pitchFamily="34" charset="0"/>
-                <a:ea typeface="Courier New" pitchFamily="34" charset="-122"/>
-                <a:cs typeface="Courier New" pitchFamily="34" charset="-120"/>
-              </a:rPr>
-              <a:t>docker compose run --rm --no-deps --entrypoint node \</a:t>
-            </a:r>
-            <a:endParaRPr lang="en-US" sz="900" dirty="0"/>
-          </a:p>
-          <a:p>
-            <a:pPr indent="0" marL="0">
-              <a:spcBef>
-                <a:spcPts val="200"/>
-              </a:spcBef>
-              <a:spcAft>
-                <a:spcPts val="200"/>
-              </a:spcAft>
-              <a:buNone/>
-            </a:pPr>
-            <a:r>
-              <a:rPr lang="en-US" sz="900" dirty="0">
-                <a:solidFill>
-                  <a:srgbClr val="B8FF4A"/>
-                </a:solidFill>
-                <a:latin typeface="Courier New" pitchFamily="34" charset="0"/>
-                <a:ea typeface="Courier New" pitchFamily="34" charset="-122"/>
-                <a:cs typeface="Courier New" pitchFamily="34" charset="-120"/>
-              </a:rPr>
-              <a:t>  openclaw-gateway dist/index.js onboard \</a:t>
-            </a:r>
-            <a:endParaRPr lang="en-US" sz="900" dirty="0"/>
-          </a:p>
-          <a:p>
-            <a:pPr indent="0" marL="0">
-              <a:spcBef>
-                <a:spcPts val="200"/>
-              </a:spcBef>
-              <a:spcAft>
-                <a:spcPts val="200"/>
-              </a:spcAft>
-              <a:buNone/>
-            </a:pPr>
-            <a:r>
-              <a:rPr lang="en-US" sz="900" dirty="0">
-                <a:solidFill>
-                  <a:srgbClr val="B8FF4A"/>
-                </a:solidFill>
-                <a:latin typeface="Courier New" pitchFamily="34" charset="0"/>
-                <a:ea typeface="Courier New" pitchFamily="34" charset="-122"/>
-                <a:cs typeface="Courier New" pitchFamily="34" charset="-120"/>
-              </a:rPr>
-              <a:t>  --auth-choice custom-api-key \</a:t>
-            </a:r>
-            <a:endParaRPr lang="en-US" sz="900" dirty="0"/>
-          </a:p>
-          <a:p>
-            <a:pPr indent="0" marL="0">
-              <a:spcBef>
-                <a:spcPts val="200"/>
-              </a:spcBef>
-              <a:spcAft>
-                <a:spcPts val="200"/>
-              </a:spcAft>
-              <a:buNone/>
-            </a:pPr>
-            <a:r>
-              <a:rPr lang="en-US" sz="900" dirty="0">
-                <a:solidFill>
-                  <a:srgbClr val="B8FF4A"/>
-                </a:solidFill>
-                <a:latin typeface="Courier New" pitchFamily="34" charset="0"/>
-                <a:ea typeface="Courier New" pitchFamily="34" charset="-122"/>
-                <a:cs typeface="Courier New" pitchFamily="34" charset="-120"/>
-              </a:rPr>
-              <a:t>  --custom-base-url "https://api.tokenfactory.nebius.com/v1" \</a:t>
-            </a:r>
-            <a:endParaRPr lang="en-US" sz="900" dirty="0"/>
-          </a:p>
-          <a:p>
-            <a:pPr indent="0" marL="0">
-              <a:spcBef>
-                <a:spcPts val="200"/>
-              </a:spcBef>
-              <a:spcAft>
-                <a:spcPts val="200"/>
-              </a:spcAft>
-              <a:buNone/>
-            </a:pPr>
-            <a:r>
-              <a:rPr lang="en-US" sz="900" dirty="0">
-                <a:solidFill>
-                  <a:srgbClr val="B8FF4A"/>
-                </a:solidFill>
-                <a:latin typeface="Courier New" pitchFamily="34" charset="0"/>
-                <a:ea typeface="Courier New" pitchFamily="34" charset="-122"/>
-                <a:cs typeface="Courier New" pitchFamily="34" charset="-120"/>
-              </a:rPr>
-              <a:t>  --custom-model-id "meta-llama/Meta-Llama-3.1-70B-Instruct" \</a:t>
-            </a:r>
-            <a:endParaRPr lang="en-US" sz="900" dirty="0"/>
-          </a:p>
-          <a:p>
-            <a:pPr indent="0" marL="0">
-              <a:spcBef>
-                <a:spcPts val="200"/>
-              </a:spcBef>
-              <a:spcAft>
-                <a:spcPts val="200"/>
-              </a:spcAft>
-              <a:buNone/>
-            </a:pPr>
-            <a:r>
-              <a:rPr lang="en-US" sz="900" dirty="0">
-                <a:solidFill>
-                  <a:srgbClr val="B8FF4A"/>
-                </a:solidFill>
-                <a:latin typeface="Courier New" pitchFamily="34" charset="0"/>
-                <a:ea typeface="Courier New" pitchFamily="34" charset="-122"/>
-                <a:cs typeface="Courier New" pitchFamily="34" charset="-120"/>
-              </a:rPr>
-              <a:t>  --custom-api-key "$NEBIUS_API_KEY" \</a:t>
-            </a:r>
-            <a:endParaRPr lang="en-US" sz="900" dirty="0"/>
-          </a:p>
-          <a:p>
-            <a:pPr indent="0" marL="0">
-              <a:spcBef>
-                <a:spcPts val="200"/>
-              </a:spcBef>
-              <a:spcAft>
-                <a:spcPts val="200"/>
-              </a:spcAft>
-              <a:buNone/>
-            </a:pPr>
-            <a:r>
-              <a:rPr lang="en-US" sz="900" dirty="0">
-                <a:solidFill>
-                  <a:srgbClr val="B8FF4A"/>
-                </a:solidFill>
-                <a:latin typeface="Courier New" pitchFamily="34" charset="0"/>
-                <a:ea typeface="Courier New" pitchFamily="34" charset="-122"/>
-                <a:cs typeface="Courier New" pitchFamily="34" charset="-120"/>
-              </a:rPr>
-              <a:t>  --custom-compatibility openai</a:t>
-            </a:r>
-            <a:endParaRPr lang="en-US" sz="900" dirty="0"/>
-          </a:p>
-        </p:txBody>
-      </p:sp>
-      <p:sp>
-        <p:nvSpPr>
-          <p:cNvPr id="10" name="Text 8"/>
-          <p:cNvSpPr/>
-          <p:nvPr/>
-        </p:nvSpPr>
-        <p:spPr>
-          <a:xfrm>
-            <a:off x="731520" y="3931920"/>
-            <a:ext cx="7315200" cy="457200"/>
-          </a:xfrm>
-          <a:prstGeom prst="rect">
-            <a:avLst/>
-          </a:prstGeom>
-          <a:noFill/>
-          <a:ln/>
-        </p:spPr>
-        <p:txBody>
-          <a:bodyPr wrap="square" rtlCol="0" anchor="ctr"/>
-          <a:lstStyle/>
-          <a:p>
-            <a:pPr indent="0" marL="0">
-              <a:buNone/>
-            </a:pPr>
-            <a:r>
-              <a:rPr lang="en-US" sz="1400" b="1" dirty="0">
-                <a:solidFill>
-                  <a:srgbClr val="FFFFFF"/>
-                </a:solidFill>
-                <a:latin typeface="Arial" pitchFamily="34" charset="0"/>
-                <a:ea typeface="Arial" pitchFamily="34" charset="-122"/>
-                <a:cs typeface="Arial" pitchFamily="34" charset="-120"/>
-              </a:rPr>
-              <a:t>Your agent runs in Docker. Inference runs on Nebius GPUs. Best of both worlds.</a:t>
+              <a:t>Token Factory supports JSON mode natively.</a:t>
             </a:r>
             <a:endParaRPr lang="en-US" sz="1400" dirty="0"/>
           </a:p>
@@ -6688,7 +6454,7 @@
                 <a:ea typeface="Arial" pitchFamily="34" charset="-122"/>
                 <a:cs typeface="Arial" pitchFamily="34" charset="-120"/>
               </a:rPr>
-              <a:t>Structured Tool Calling</a:t>
+              <a:t>Going to Production</a:t>
             </a:r>
             <a:endParaRPr lang="en-US" sz="3200" dirty="0"/>
           </a:p>
@@ -6727,7 +6493,7 @@
                 <a:ea typeface="Arial" pitchFamily="34" charset="-122"/>
                 <a:cs typeface="Arial" pitchFamily="34" charset="-120"/>
               </a:rPr>
-              <a:t>JSON mode for reliable tool calling</a:t>
+              <a:t>Nebius Serverless</a:t>
             </a:r>
             <a:endParaRPr lang="en-US" sz="1600" dirty="0"/>
           </a:p>
@@ -6742,11 +6508,11 @@
         <p:spPr>
           <a:xfrm>
             <a:off x="731520" y="1737360"/>
-            <a:ext cx="7680960" cy="1463040"/>
+            <a:ext cx="7680960" cy="1371600"/>
           </a:xfrm>
           <a:prstGeom prst="roundRect">
             <a:avLst>
-              <a:gd name="adj" fmla="val 5000"/>
+              <a:gd name="adj" fmla="val 5333"/>
             </a:avLst>
           </a:prstGeom>
           <a:solidFill>
@@ -6764,7 +6530,7 @@
         <p:spPr>
           <a:xfrm>
             <a:off x="868680" y="1810512"/>
-            <a:ext cx="7406640" cy="1316736"/>
+            <a:ext cx="7406640" cy="1225296"/>
           </a:xfrm>
           <a:prstGeom prst="rect">
             <a:avLst/>
@@ -6786,7 +6552,7 @@
               <a:buNone/>
             </a:pPr>
             <a:r>
-              <a:rPr lang="en-US" sz="1200" dirty="0">
+              <a:rPr lang="en-US" sz="1000" dirty="0">
                 <a:solidFill>
                   <a:srgbClr val="B8FF4A"/>
                 </a:solidFill>
@@ -6794,9 +6560,9 @@
                 <a:ea typeface="Courier New" pitchFamily="34" charset="-122"/>
                 <a:cs typeface="Courier New" pitchFamily="34" charset="-120"/>
               </a:rPr>
-              <a:t>{</a:t>
-            </a:r>
-            <a:endParaRPr lang="en-US" sz="1200" dirty="0"/>
+              <a:t>curl -sSL https://storage.ai.nebius.cloud/ncp/install.sh | bash</a:t>
+            </a:r>
+            <a:endParaRPr lang="en-US" sz="1000" dirty="0"/>
           </a:p>
           <a:p>
             <a:pPr indent="0" marL="0">
@@ -6808,18 +6574,7 @@
               </a:spcAft>
               <a:buNone/>
             </a:pPr>
-            <a:r>
-              <a:rPr lang="en-US" sz="1200" dirty="0">
-                <a:solidFill>
-                  <a:srgbClr val="B8FF4A"/>
-                </a:solidFill>
-                <a:latin typeface="Courier New" pitchFamily="34" charset="0"/>
-                <a:ea typeface="Courier New" pitchFamily="34" charset="-122"/>
-                <a:cs typeface="Courier New" pitchFamily="34" charset="-120"/>
-              </a:rPr>
-              <a:t>  "tool": "get_weather",</a:t>
-            </a:r>
-            <a:endParaRPr lang="en-US" sz="1200" dirty="0"/>
+            <a:endParaRPr lang="en-US" sz="1000" dirty="0"/>
           </a:p>
           <a:p>
             <a:pPr indent="0" marL="0">
@@ -6832,7 +6587,7 @@
               <a:buNone/>
             </a:pPr>
             <a:r>
-              <a:rPr lang="en-US" sz="1200" dirty="0">
+              <a:rPr lang="en-US" sz="1000" dirty="0">
                 <a:solidFill>
                   <a:srgbClr val="B8FF4A"/>
                 </a:solidFill>
@@ -6840,9 +6595,9 @@
                 <a:ea typeface="Courier New" pitchFamily="34" charset="-122"/>
                 <a:cs typeface="Courier New" pitchFamily="34" charset="-120"/>
               </a:rPr>
-              <a:t>  "arguments": {</a:t>
-            </a:r>
-            <a:endParaRPr lang="en-US" sz="1200" dirty="0"/>
+              <a:t>nebius msp serverless v1alpha1 endpoint create \</a:t>
+            </a:r>
+            <a:endParaRPr lang="en-US" sz="1000" dirty="0"/>
           </a:p>
           <a:p>
             <a:pPr indent="0" marL="0">
@@ -6855,7 +6610,7 @@
               <a:buNone/>
             </a:pPr>
             <a:r>
-              <a:rPr lang="en-US" sz="1200" dirty="0">
+              <a:rPr lang="en-US" sz="1000" dirty="0">
                 <a:solidFill>
                   <a:srgbClr val="B8FF4A"/>
                 </a:solidFill>
@@ -6863,9 +6618,9 @@
                 <a:ea typeface="Courier New" pitchFamily="34" charset="-122"/>
                 <a:cs typeface="Courier New" pitchFamily="34" charset="-120"/>
               </a:rPr>
-              <a:t>    "city": "Oakland",</a:t>
-            </a:r>
-            <a:endParaRPr lang="en-US" sz="1200" dirty="0"/>
+              <a:t>  --name openclaw-agent \</a:t>
+            </a:r>
+            <a:endParaRPr lang="en-US" sz="1000" dirty="0"/>
           </a:p>
           <a:p>
             <a:pPr indent="0" marL="0">
@@ -6878,7 +6633,7 @@
               <a:buNone/>
             </a:pPr>
             <a:r>
-              <a:rPr lang="en-US" sz="1200" dirty="0">
+              <a:rPr lang="en-US" sz="1000" dirty="0">
                 <a:solidFill>
                   <a:srgbClr val="B8FF4A"/>
                 </a:solidFill>
@@ -6886,9 +6641,9 @@
                 <a:ea typeface="Courier New" pitchFamily="34" charset="-122"/>
                 <a:cs typeface="Courier New" pitchFamily="34" charset="-120"/>
               </a:rPr>
-              <a:t>    "units": "fahrenheit"</a:t>
-            </a:r>
-            <a:endParaRPr lang="en-US" sz="1200" dirty="0"/>
+              <a:t>  --image openclaw/gateway:latest \</a:t>
+            </a:r>
+            <a:endParaRPr lang="en-US" sz="1000" dirty="0"/>
           </a:p>
           <a:p>
             <a:pPr indent="0" marL="0">
@@ -6901,7 +6656,7 @@
               <a:buNone/>
             </a:pPr>
             <a:r>
-              <a:rPr lang="en-US" sz="1200" dirty="0">
+              <a:rPr lang="en-US" sz="1000" dirty="0">
                 <a:solidFill>
                   <a:srgbClr val="B8FF4A"/>
                 </a:solidFill>
@@ -6909,32 +6664,9 @@
                 <a:ea typeface="Courier New" pitchFamily="34" charset="-122"/>
                 <a:cs typeface="Courier New" pitchFamily="34" charset="-120"/>
               </a:rPr>
-              <a:t>  }</a:t>
-            </a:r>
-            <a:endParaRPr lang="en-US" sz="1200" dirty="0"/>
-          </a:p>
-          <a:p>
-            <a:pPr indent="0" marL="0">
-              <a:spcBef>
-                <a:spcPts val="200"/>
-              </a:spcBef>
-              <a:spcAft>
-                <a:spcPts val="200"/>
-              </a:spcAft>
-              <a:buNone/>
-            </a:pPr>
-            <a:r>
-              <a:rPr lang="en-US" sz="1200" dirty="0">
-                <a:solidFill>
-                  <a:srgbClr val="B8FF4A"/>
-                </a:solidFill>
-                <a:latin typeface="Courier New" pitchFamily="34" charset="0"/>
-                <a:ea typeface="Courier New" pitchFamily="34" charset="-122"/>
-                <a:cs typeface="Courier New" pitchFamily="34" charset="-120"/>
-              </a:rPr>
-              <a:t>}</a:t>
-            </a:r>
-            <a:endParaRPr lang="en-US" sz="1200" dirty="0"/>
+              <a:t>  --memory 512MB</a:t>
+            </a:r>
+            <a:endParaRPr lang="en-US" sz="1000" dirty="0"/>
           </a:p>
         </p:txBody>
       </p:sp>
@@ -6947,7 +6679,7 @@
         <p:spPr>
           <a:xfrm>
             <a:off x="731520" y="3474720"/>
-            <a:ext cx="7315200" cy="365760"/>
+            <a:ext cx="7315200" cy="457200"/>
           </a:xfrm>
           <a:prstGeom prst="rect">
             <a:avLst/>
@@ -6963,7 +6695,7 @@
               <a:buNone/>
             </a:pPr>
             <a:r>
-              <a:rPr lang="en-US" sz="1400" dirty="0">
+              <a:rPr lang="en-US" sz="1400" b="1" dirty="0">
                 <a:solidFill>
                   <a:srgbClr val="FFFFFF"/>
                 </a:solidFill>
@@ -6971,48 +6703,9 @@
                 <a:ea typeface="Arial" pitchFamily="34" charset="-122"/>
                 <a:cs typeface="Arial" pitchFamily="34" charset="-120"/>
               </a:rPr>
-              <a:t>Token Factory supports JSON mode natively — no prompt engineering hacks.</a:t>
+              <a:t>Auto-scales to zero. Spins up on demand. No VM management.</a:t>
             </a:r>
             <a:endParaRPr lang="en-US" sz="1400" dirty="0"/>
-          </a:p>
-        </p:txBody>
-      </p:sp>
-      <p:sp>
-        <p:nvSpPr>
-          <p:cNvPr id="10" name="Text 8"/>
-          <p:cNvSpPr/>
-          <p:nvPr/>
-        </p:nvSpPr>
-        <p:spPr>
-          <a:xfrm>
-            <a:off x="731520" y="3931920"/>
-            <a:ext cx="7315200" cy="365760"/>
-          </a:xfrm>
-          <a:prstGeom prst="rect">
-            <a:avLst/>
-          </a:prstGeom>
-          <a:noFill/>
-          <a:ln/>
-        </p:spPr>
-        <p:txBody>
-          <a:bodyPr wrap="square" rtlCol="0" anchor="ctr"/>
-          <a:lstStyle/>
-          <a:p>
-            <a:pPr indent="0" marL="0">
-              <a:buNone/>
-            </a:pPr>
-            <a:r>
-              <a:rPr lang="en-US" sz="1300" dirty="0">
-                <a:solidFill>
-                  <a:srgbClr val="9CA3AF"/>
-                </a:solidFill>
-                <a:latin typeface="Arial" pitchFamily="34" charset="0"/>
-                <a:ea typeface="Arial" pitchFamily="34" charset="-122"/>
-                <a:cs typeface="Arial" pitchFamily="34" charset="-120"/>
-              </a:rPr>
-              <a:t>Works with Llama 3.1, GLM-5, and DeepSeek-R1.</a:t>
-            </a:r>
-            <a:endParaRPr lang="en-US" sz="1300" dirty="0"/>
           </a:p>
         </p:txBody>
       </p:sp>
@@ -7179,470 +6872,6 @@
                 <a:ea typeface="Arial" pitchFamily="34" charset="-122"/>
                 <a:cs typeface="Arial" pitchFamily="34" charset="-120"/>
               </a:rPr>
-              <a:t>Going to Production</a:t>
-            </a:r>
-            <a:endParaRPr lang="en-US" sz="3200" dirty="0"/>
-          </a:p>
-        </p:txBody>
-      </p:sp>
-      <p:sp>
-        <p:nvSpPr>
-          <p:cNvPr id="6" name="Text 4"/>
-          <p:cNvSpPr/>
-          <p:nvPr/>
-        </p:nvSpPr>
-        <p:spPr>
-          <a:xfrm>
-            <a:off x="731520" y="1188720"/>
-            <a:ext cx="6400800" cy="365760"/>
-          </a:xfrm>
-          <a:prstGeom prst="rect">
-            <a:avLst/>
-          </a:prstGeom>
-          <a:noFill/>
-          <a:ln/>
-        </p:spPr>
-        <p:txBody>
-          <a:bodyPr wrap="square" rtlCol="0" anchor="ctr"/>
-          <a:lstStyle/>
-          <a:p>
-            <a:pPr indent="0" marL="0">
-              <a:buNone/>
-            </a:pPr>
-            <a:r>
-              <a:rPr lang="en-US" sz="1600" dirty="0">
-                <a:solidFill>
-                  <a:srgbClr val="B8FF4A"/>
-                </a:solidFill>
-                <a:latin typeface="Arial" pitchFamily="34" charset="0"/>
-                <a:ea typeface="Arial" pitchFamily="34" charset="-122"/>
-                <a:cs typeface="Arial" pitchFamily="34" charset="-120"/>
-              </a:rPr>
-              <a:t>Nebius Serverless</a:t>
-            </a:r>
-            <a:endParaRPr lang="en-US" sz="1600" dirty="0"/>
-          </a:p>
-        </p:txBody>
-      </p:sp>
-      <p:sp>
-        <p:nvSpPr>
-          <p:cNvPr id="7" name="Shape 5"/>
-          <p:cNvSpPr/>
-          <p:nvPr/>
-        </p:nvSpPr>
-        <p:spPr>
-          <a:xfrm>
-            <a:off x="731520" y="1737360"/>
-            <a:ext cx="7680960" cy="1645920"/>
-          </a:xfrm>
-          <a:prstGeom prst="roundRect">
-            <a:avLst>
-              <a:gd name="adj" fmla="val 4444"/>
-            </a:avLst>
-          </a:prstGeom>
-          <a:solidFill>
-            <a:srgbClr val="161927"/>
-          </a:solidFill>
-          <a:ln/>
-        </p:spPr>
-      </p:sp>
-      <p:sp>
-        <p:nvSpPr>
-          <p:cNvPr id="8" name="Text 6"/>
-          <p:cNvSpPr/>
-          <p:nvPr/>
-        </p:nvSpPr>
-        <p:spPr>
-          <a:xfrm>
-            <a:off x="868680" y="1810512"/>
-            <a:ext cx="7406640" cy="1499616"/>
-          </a:xfrm>
-          <a:prstGeom prst="rect">
-            <a:avLst/>
-          </a:prstGeom>
-          <a:noFill/>
-          <a:ln/>
-        </p:spPr>
-        <p:txBody>
-          <a:bodyPr wrap="square" rtlCol="0" anchor="t"/>
-          <a:lstStyle/>
-          <a:p>
-            <a:pPr indent="0" marL="0">
-              <a:spcBef>
-                <a:spcPts val="200"/>
-              </a:spcBef>
-              <a:spcAft>
-                <a:spcPts val="200"/>
-              </a:spcAft>
-              <a:buNone/>
-            </a:pPr>
-            <a:r>
-              <a:rPr lang="en-US" sz="1000" dirty="0">
-                <a:solidFill>
-                  <a:srgbClr val="B8FF4A"/>
-                </a:solidFill>
-                <a:latin typeface="Courier New" pitchFamily="34" charset="0"/>
-                <a:ea typeface="Courier New" pitchFamily="34" charset="-122"/>
-                <a:cs typeface="Courier New" pitchFamily="34" charset="-120"/>
-              </a:rPr>
-              <a:t># Install Nebius CLI</a:t>
-            </a:r>
-            <a:endParaRPr lang="en-US" sz="1000" dirty="0"/>
-          </a:p>
-          <a:p>
-            <a:pPr indent="0" marL="0">
-              <a:spcBef>
-                <a:spcPts val="200"/>
-              </a:spcBef>
-              <a:spcAft>
-                <a:spcPts val="200"/>
-              </a:spcAft>
-              <a:buNone/>
-            </a:pPr>
-            <a:r>
-              <a:rPr lang="en-US" sz="1000" dirty="0">
-                <a:solidFill>
-                  <a:srgbClr val="B8FF4A"/>
-                </a:solidFill>
-                <a:latin typeface="Courier New" pitchFamily="34" charset="0"/>
-                <a:ea typeface="Courier New" pitchFamily="34" charset="-122"/>
-                <a:cs typeface="Courier New" pitchFamily="34" charset="-120"/>
-              </a:rPr>
-              <a:t>curl -sSL https://storage.ai.nebius.cloud/ncp/install.sh | bash</a:t>
-            </a:r>
-            <a:endParaRPr lang="en-US" sz="1000" dirty="0"/>
-          </a:p>
-          <a:p>
-            <a:pPr indent="0" marL="0">
-              <a:spcBef>
-                <a:spcPts val="200"/>
-              </a:spcBef>
-              <a:spcAft>
-                <a:spcPts val="200"/>
-              </a:spcAft>
-              <a:buNone/>
-            </a:pPr>
-            <a:endParaRPr lang="en-US" sz="1000" dirty="0"/>
-          </a:p>
-          <a:p>
-            <a:pPr indent="0" marL="0">
-              <a:spcBef>
-                <a:spcPts val="200"/>
-              </a:spcBef>
-              <a:spcAft>
-                <a:spcPts val="200"/>
-              </a:spcAft>
-              <a:buNone/>
-            </a:pPr>
-            <a:r>
-              <a:rPr lang="en-US" sz="1000" dirty="0">
-                <a:solidFill>
-                  <a:srgbClr val="B8FF4A"/>
-                </a:solidFill>
-                <a:latin typeface="Courier New" pitchFamily="34" charset="0"/>
-                <a:ea typeface="Courier New" pitchFamily="34" charset="-122"/>
-                <a:cs typeface="Courier New" pitchFamily="34" charset="-120"/>
-              </a:rPr>
-              <a:t># Deploy OpenClaw on Serverless</a:t>
-            </a:r>
-            <a:endParaRPr lang="en-US" sz="1000" dirty="0"/>
-          </a:p>
-          <a:p>
-            <a:pPr indent="0" marL="0">
-              <a:spcBef>
-                <a:spcPts val="200"/>
-              </a:spcBef>
-              <a:spcAft>
-                <a:spcPts val="200"/>
-              </a:spcAft>
-              <a:buNone/>
-            </a:pPr>
-            <a:r>
-              <a:rPr lang="en-US" sz="1000" dirty="0">
-                <a:solidFill>
-                  <a:srgbClr val="B8FF4A"/>
-                </a:solidFill>
-                <a:latin typeface="Courier New" pitchFamily="34" charset="0"/>
-                <a:ea typeface="Courier New" pitchFamily="34" charset="-122"/>
-                <a:cs typeface="Courier New" pitchFamily="34" charset="-120"/>
-              </a:rPr>
-              <a:t>nebius msp serverless v1alpha1 endpoint create \</a:t>
-            </a:r>
-            <a:endParaRPr lang="en-US" sz="1000" dirty="0"/>
-          </a:p>
-          <a:p>
-            <a:pPr indent="0" marL="0">
-              <a:spcBef>
-                <a:spcPts val="200"/>
-              </a:spcBef>
-              <a:spcAft>
-                <a:spcPts val="200"/>
-              </a:spcAft>
-              <a:buNone/>
-            </a:pPr>
-            <a:r>
-              <a:rPr lang="en-US" sz="1000" dirty="0">
-                <a:solidFill>
-                  <a:srgbClr val="B8FF4A"/>
-                </a:solidFill>
-                <a:latin typeface="Courier New" pitchFamily="34" charset="0"/>
-                <a:ea typeface="Courier New" pitchFamily="34" charset="-122"/>
-                <a:cs typeface="Courier New" pitchFamily="34" charset="-120"/>
-              </a:rPr>
-              <a:t>  --name openclaw-agent \</a:t>
-            </a:r>
-            <a:endParaRPr lang="en-US" sz="1000" dirty="0"/>
-          </a:p>
-          <a:p>
-            <a:pPr indent="0" marL="0">
-              <a:spcBef>
-                <a:spcPts val="200"/>
-              </a:spcBef>
-              <a:spcAft>
-                <a:spcPts val="200"/>
-              </a:spcAft>
-              <a:buNone/>
-            </a:pPr>
-            <a:r>
-              <a:rPr lang="en-US" sz="1000" dirty="0">
-                <a:solidFill>
-                  <a:srgbClr val="B8FF4A"/>
-                </a:solidFill>
-                <a:latin typeface="Courier New" pitchFamily="34" charset="0"/>
-                <a:ea typeface="Courier New" pitchFamily="34" charset="-122"/>
-                <a:cs typeface="Courier New" pitchFamily="34" charset="-120"/>
-              </a:rPr>
-              <a:t>  --image openclaw/gateway:latest \</a:t>
-            </a:r>
-            <a:endParaRPr lang="en-US" sz="1000" dirty="0"/>
-          </a:p>
-          <a:p>
-            <a:pPr indent="0" marL="0">
-              <a:spcBef>
-                <a:spcPts val="200"/>
-              </a:spcBef>
-              <a:spcAft>
-                <a:spcPts val="200"/>
-              </a:spcAft>
-              <a:buNone/>
-            </a:pPr>
-            <a:r>
-              <a:rPr lang="en-US" sz="1000" dirty="0">
-                <a:solidFill>
-                  <a:srgbClr val="B8FF4A"/>
-                </a:solidFill>
-                <a:latin typeface="Courier New" pitchFamily="34" charset="0"/>
-                <a:ea typeface="Courier New" pitchFamily="34" charset="-122"/>
-                <a:cs typeface="Courier New" pitchFamily="34" charset="-120"/>
-              </a:rPr>
-              <a:t>  --memory 512MB</a:t>
-            </a:r>
-            <a:endParaRPr lang="en-US" sz="1000" dirty="0"/>
-          </a:p>
-        </p:txBody>
-      </p:sp>
-      <p:sp>
-        <p:nvSpPr>
-          <p:cNvPr id="9" name="Text 7"/>
-          <p:cNvSpPr/>
-          <p:nvPr/>
-        </p:nvSpPr>
-        <p:spPr>
-          <a:xfrm>
-            <a:off x="731520" y="3749040"/>
-            <a:ext cx="7315200" cy="457200"/>
-          </a:xfrm>
-          <a:prstGeom prst="rect">
-            <a:avLst/>
-          </a:prstGeom>
-          <a:noFill/>
-          <a:ln/>
-        </p:spPr>
-        <p:txBody>
-          <a:bodyPr wrap="square" rtlCol="0" anchor="ctr"/>
-          <a:lstStyle/>
-          <a:p>
-            <a:pPr indent="0" marL="0">
-              <a:buNone/>
-            </a:pPr>
-            <a:r>
-              <a:rPr lang="en-US" sz="1400" b="1" dirty="0">
-                <a:solidFill>
-                  <a:srgbClr val="FFFFFF"/>
-                </a:solidFill>
-                <a:latin typeface="Arial" pitchFamily="34" charset="0"/>
-                <a:ea typeface="Arial" pitchFamily="34" charset="-122"/>
-                <a:cs typeface="Arial" pitchFamily="34" charset="-120"/>
-              </a:rPr>
-              <a:t>Auto-scales to zero when idle. Spins up on demand. No VM management.</a:t>
-            </a:r>
-            <a:endParaRPr lang="en-US" sz="1400" dirty="0"/>
-          </a:p>
-        </p:txBody>
-      </p:sp>
-    </p:spTree>
-  </p:cSld>
-  <p:clrMapOvr>
-    <a:masterClrMapping/>
-  </p:clrMapOvr>
-</p:sld>
-</file>
-
-<file path=ppt/slides/slide16.xml><?xml version="1.0" encoding="utf-8"?>
-<p:sld xmlns:a="http://schemas.openxmlformats.org/drawingml/2006/main" xmlns:r="http://schemas.openxmlformats.org/officeDocument/2006/relationships" xmlns:p="http://schemas.openxmlformats.org/presentationml/2006/main">
-  <p:cSld name="Slide 16">
-    <p:bg>
-      <p:bgPr>
-        <a:solidFill>
-          <a:srgbClr val="0F1117"/>
-        </a:solidFill>
-      </p:bgPr>
-    </p:bg>
-    <p:spTree>
-      <p:nvGrpSpPr>
-        <p:cNvPr id="1" name=""/>
-        <p:cNvGrpSpPr/>
-        <p:nvPr/>
-      </p:nvGrpSpPr>
-      <p:grpSpPr>
-        <a:xfrm>
-          <a:off x="0" y="0"/>
-          <a:ext cx="0" cy="0"/>
-          <a:chOff x="0" y="0"/>
-          <a:chExt cx="0" cy="0"/>
-        </a:xfrm>
-      </p:grpSpPr>
-      <p:sp>
-        <p:nvSpPr>
-          <p:cNvPr id="2" name="Text 0"/>
-          <p:cNvSpPr/>
-          <p:nvPr/>
-        </p:nvSpPr>
-        <p:spPr>
-          <a:xfrm>
-            <a:off x="365760" y="228600"/>
-            <a:ext cx="1097280" cy="274320"/>
-          </a:xfrm>
-          <a:prstGeom prst="rect">
-            <a:avLst/>
-          </a:prstGeom>
-          <a:noFill/>
-          <a:ln/>
-        </p:spPr>
-        <p:txBody>
-          <a:bodyPr wrap="square" rtlCol="0" anchor="ctr"/>
-          <a:lstStyle/>
-          <a:p>
-            <a:pPr indent="0" marL="0">
-              <a:buNone/>
-            </a:pPr>
-            <a:r>
-              <a:rPr lang="en-US" sz="1000" b="1" spc="400" kern="0" dirty="0">
-                <a:solidFill>
-                  <a:srgbClr val="B8FF4A"/>
-                </a:solidFill>
-                <a:latin typeface="Arial" pitchFamily="34" charset="0"/>
-                <a:ea typeface="Arial" pitchFamily="34" charset="-122"/>
-                <a:cs typeface="Arial" pitchFamily="34" charset="-120"/>
-              </a:rPr>
-              <a:t>NEBIUS</a:t>
-            </a:r>
-            <a:endParaRPr lang="en-US" sz="1000" dirty="0"/>
-          </a:p>
-        </p:txBody>
-      </p:sp>
-      <p:sp>
-        <p:nvSpPr>
-          <p:cNvPr id="3" name="Text 1"/>
-          <p:cNvSpPr/>
-          <p:nvPr/>
-        </p:nvSpPr>
-        <p:spPr>
-          <a:xfrm>
-            <a:off x="365760" y="4709160"/>
-            <a:ext cx="1097280" cy="274320"/>
-          </a:xfrm>
-          <a:prstGeom prst="rect">
-            <a:avLst/>
-          </a:prstGeom>
-          <a:noFill/>
-          <a:ln/>
-        </p:spPr>
-        <p:txBody>
-          <a:bodyPr wrap="square" rtlCol="0" anchor="ctr"/>
-          <a:lstStyle/>
-          <a:p>
-            <a:pPr indent="0" marL="0">
-              <a:buNone/>
-            </a:pPr>
-            <a:r>
-              <a:rPr lang="en-US" sz="900" dirty="0">
-                <a:solidFill>
-                  <a:srgbClr val="555555"/>
-                </a:solidFill>
-                <a:latin typeface="Arial" pitchFamily="34" charset="0"/>
-                <a:ea typeface="Arial" pitchFamily="34" charset="-122"/>
-                <a:cs typeface="Arial" pitchFamily="34" charset="-120"/>
-              </a:rPr>
-              <a:t>ClawCamp</a:t>
-            </a:r>
-            <a:endParaRPr lang="en-US" sz="900" dirty="0"/>
-          </a:p>
-        </p:txBody>
-      </p:sp>
-      <p:sp>
-        <p:nvSpPr>
-          <p:cNvPr id="4" name="Shape 2"/>
-          <p:cNvSpPr/>
-          <p:nvPr/>
-        </p:nvSpPr>
-        <p:spPr>
-          <a:xfrm>
-            <a:off x="0" y="4983480"/>
-            <a:ext cx="9144000" cy="164592"/>
-          </a:xfrm>
-          <a:prstGeom prst="rect">
-            <a:avLst/>
-          </a:prstGeom>
-          <a:solidFill>
-            <a:srgbClr val="B8FF4A"/>
-          </a:solidFill>
-          <a:ln/>
-        </p:spPr>
-      </p:sp>
-      <p:sp>
-        <p:nvSpPr>
-          <p:cNvPr id="5" name="Text 3"/>
-          <p:cNvSpPr/>
-          <p:nvPr/>
-        </p:nvSpPr>
-        <p:spPr>
-          <a:xfrm>
-            <a:off x="731520" y="640080"/>
-            <a:ext cx="7315200" cy="548640"/>
-          </a:xfrm>
-          <a:prstGeom prst="rect">
-            <a:avLst/>
-          </a:prstGeom>
-          <a:noFill/>
-          <a:ln/>
-        </p:spPr>
-        <p:txBody>
-          <a:bodyPr wrap="square" rtlCol="0" anchor="ctr"/>
-          <a:lstStyle/>
-          <a:p>
-            <a:pPr indent="0" marL="0">
-              <a:buNone/>
-            </a:pPr>
-            <a:r>
-              <a:rPr lang="en-US" sz="3200" b="1" dirty="0">
-                <a:solidFill>
-                  <a:srgbClr val="FFFFFF"/>
-                </a:solidFill>
-                <a:latin typeface="Arial" pitchFamily="34" charset="0"/>
-                <a:ea typeface="Arial" pitchFamily="34" charset="-122"/>
-                <a:cs typeface="Arial" pitchFamily="34" charset="-120"/>
-              </a:rPr>
               <a:t>Cost Breakdown</a:t>
             </a:r>
             <a:endParaRPr lang="en-US" sz="3200" dirty="0"/>
@@ -7651,7 +6880,7 @@
       </p:sp>
       <p:graphicFrame>
         <p:nvGraphicFramePr>
-          <p:cNvPr id="17" name="Table 0"/>
+          <p:cNvPr id="16" name="Table 0"/>
           <p:cNvGraphicFramePr>
             <a:graphicFrameLocks noGrp="1"/>
           </p:cNvGraphicFramePr>
@@ -8810,7 +8039,7 @@
                 <a:ea typeface="Arial" pitchFamily="34" charset="-122"/>
                 <a:cs typeface="Arial" pitchFamily="34" charset="-120"/>
               </a:rPr>
-              <a:t>Compare: A single H100 GPU = $2-3/hour = $1,500-2,200/month</a:t>
+              <a:t>H100 GPU = $2-3/hr = $1,500-2,200/month</a:t>
             </a:r>
             <a:endParaRPr lang="en-US" sz="1400" dirty="0"/>
           </a:p>
@@ -8852,6 +8081,323 @@
               <a:t>Token Factory: pay per token, not per hour.</a:t>
             </a:r>
             <a:endParaRPr lang="en-US" sz="2000" dirty="0"/>
+          </a:p>
+        </p:txBody>
+      </p:sp>
+    </p:spTree>
+  </p:cSld>
+  <p:clrMapOvr>
+    <a:masterClrMapping/>
+  </p:clrMapOvr>
+</p:sld>
+</file>
+
+<file path=ppt/slides/slide16.xml><?xml version="1.0" encoding="utf-8"?>
+<p:sld xmlns:a="http://schemas.openxmlformats.org/drawingml/2006/main" xmlns:r="http://schemas.openxmlformats.org/officeDocument/2006/relationships" xmlns:p="http://schemas.openxmlformats.org/presentationml/2006/main">
+  <p:cSld name="Slide 16">
+    <p:bg>
+      <p:bgPr>
+        <a:solidFill>
+          <a:srgbClr val="0F1117"/>
+        </a:solidFill>
+      </p:bgPr>
+    </p:bg>
+    <p:spTree>
+      <p:nvGrpSpPr>
+        <p:cNvPr id="1" name=""/>
+        <p:cNvGrpSpPr/>
+        <p:nvPr/>
+      </p:nvGrpSpPr>
+      <p:grpSpPr>
+        <a:xfrm>
+          <a:off x="0" y="0"/>
+          <a:ext cx="0" cy="0"/>
+          <a:chOff x="0" y="0"/>
+          <a:chExt cx="0" cy="0"/>
+        </a:xfrm>
+      </p:grpSpPr>
+      <p:sp>
+        <p:nvSpPr>
+          <p:cNvPr id="2" name="Text 0"/>
+          <p:cNvSpPr/>
+          <p:nvPr/>
+        </p:nvSpPr>
+        <p:spPr>
+          <a:xfrm>
+            <a:off x="365760" y="228600"/>
+            <a:ext cx="1097280" cy="274320"/>
+          </a:xfrm>
+          <a:prstGeom prst="rect">
+            <a:avLst/>
+          </a:prstGeom>
+          <a:noFill/>
+          <a:ln/>
+        </p:spPr>
+        <p:txBody>
+          <a:bodyPr wrap="square" rtlCol="0" anchor="ctr"/>
+          <a:lstStyle/>
+          <a:p>
+            <a:pPr indent="0" marL="0">
+              <a:buNone/>
+            </a:pPr>
+            <a:r>
+              <a:rPr lang="en-US" sz="1000" b="1" spc="400" kern="0" dirty="0">
+                <a:solidFill>
+                  <a:srgbClr val="B8FF4A"/>
+                </a:solidFill>
+                <a:latin typeface="Arial" pitchFamily="34" charset="0"/>
+                <a:ea typeface="Arial" pitchFamily="34" charset="-122"/>
+                <a:cs typeface="Arial" pitchFamily="34" charset="-120"/>
+              </a:rPr>
+              <a:t>NEBIUS</a:t>
+            </a:r>
+            <a:endParaRPr lang="en-US" sz="1000" dirty="0"/>
+          </a:p>
+        </p:txBody>
+      </p:sp>
+      <p:sp>
+        <p:nvSpPr>
+          <p:cNvPr id="3" name="Text 1"/>
+          <p:cNvSpPr/>
+          <p:nvPr/>
+        </p:nvSpPr>
+        <p:spPr>
+          <a:xfrm>
+            <a:off x="365760" y="4709160"/>
+            <a:ext cx="1097280" cy="274320"/>
+          </a:xfrm>
+          <a:prstGeom prst="rect">
+            <a:avLst/>
+          </a:prstGeom>
+          <a:noFill/>
+          <a:ln/>
+        </p:spPr>
+        <p:txBody>
+          <a:bodyPr wrap="square" rtlCol="0" anchor="ctr"/>
+          <a:lstStyle/>
+          <a:p>
+            <a:pPr indent="0" marL="0">
+              <a:buNone/>
+            </a:pPr>
+            <a:r>
+              <a:rPr lang="en-US" sz="900" dirty="0">
+                <a:solidFill>
+                  <a:srgbClr val="555555"/>
+                </a:solidFill>
+                <a:latin typeface="Arial" pitchFamily="34" charset="0"/>
+                <a:ea typeface="Arial" pitchFamily="34" charset="-122"/>
+                <a:cs typeface="Arial" pitchFamily="34" charset="-120"/>
+              </a:rPr>
+              <a:t>ClawCamp</a:t>
+            </a:r>
+            <a:endParaRPr lang="en-US" sz="900" dirty="0"/>
+          </a:p>
+        </p:txBody>
+      </p:sp>
+      <p:sp>
+        <p:nvSpPr>
+          <p:cNvPr id="4" name="Shape 2"/>
+          <p:cNvSpPr/>
+          <p:nvPr/>
+        </p:nvSpPr>
+        <p:spPr>
+          <a:xfrm>
+            <a:off x="0" y="4983480"/>
+            <a:ext cx="9144000" cy="164592"/>
+          </a:xfrm>
+          <a:prstGeom prst="rect">
+            <a:avLst/>
+          </a:prstGeom>
+          <a:solidFill>
+            <a:srgbClr val="B8FF4A"/>
+          </a:solidFill>
+          <a:ln/>
+        </p:spPr>
+      </p:sp>
+      <p:sp>
+        <p:nvSpPr>
+          <p:cNvPr id="5" name="Text 3"/>
+          <p:cNvSpPr/>
+          <p:nvPr/>
+        </p:nvSpPr>
+        <p:spPr>
+          <a:xfrm>
+            <a:off x="731520" y="640080"/>
+            <a:ext cx="7315200" cy="548640"/>
+          </a:xfrm>
+          <a:prstGeom prst="rect">
+            <a:avLst/>
+          </a:prstGeom>
+          <a:noFill/>
+          <a:ln/>
+        </p:spPr>
+        <p:txBody>
+          <a:bodyPr wrap="square" rtlCol="0" anchor="ctr"/>
+          <a:lstStyle/>
+          <a:p>
+            <a:pPr indent="0" marL="0">
+              <a:buNone/>
+            </a:pPr>
+            <a:r>
+              <a:rPr lang="en-US" sz="3200" b="1" dirty="0">
+                <a:solidFill>
+                  <a:srgbClr val="FFFFFF"/>
+                </a:solidFill>
+                <a:latin typeface="Arial" pitchFamily="34" charset="0"/>
+                <a:ea typeface="Arial" pitchFamily="34" charset="-122"/>
+                <a:cs typeface="Arial" pitchFamily="34" charset="-120"/>
+              </a:rPr>
+              <a:t>Security Checklist</a:t>
+            </a:r>
+            <a:endParaRPr lang="en-US" sz="3200" dirty="0"/>
+          </a:p>
+        </p:txBody>
+      </p:sp>
+      <p:sp>
+        <p:nvSpPr>
+          <p:cNvPr id="6" name="Text 4"/>
+          <p:cNvSpPr/>
+          <p:nvPr/>
+        </p:nvSpPr>
+        <p:spPr>
+          <a:xfrm>
+            <a:off x="731520" y="1371600"/>
+            <a:ext cx="7315200" cy="2743200"/>
+          </a:xfrm>
+          <a:prstGeom prst="rect">
+            <a:avLst/>
+          </a:prstGeom>
+          <a:noFill/>
+          <a:ln/>
+        </p:spPr>
+        <p:txBody>
+          <a:bodyPr wrap="square" rtlCol="0" anchor="ctr"/>
+          <a:lstStyle/>
+          <a:p>
+            <a:pPr marL="342900" indent="-342900">
+              <a:spcAft>
+                <a:spcPts val="1000"/>
+              </a:spcAft>
+              <a:buSzPct val="100000"/>
+              <a:buChar char="•"/>
+            </a:pPr>
+            <a:r>
+              <a:rPr lang="en-US" sz="1400" dirty="0">
+                <a:solidFill>
+                  <a:srgbClr val="9CA3AF"/>
+                </a:solidFill>
+                <a:latin typeface="Arial" pitchFamily="34" charset="0"/>
+                <a:ea typeface="Arial" pitchFamily="34" charset="-122"/>
+                <a:cs typeface="Arial" pitchFamily="34" charset="-120"/>
+              </a:rPr>
+              <a:t>Set a gateway token</a:t>
+            </a:r>
+            <a:endParaRPr lang="en-US" sz="1400" dirty="0"/>
+          </a:p>
+          <a:p>
+            <a:pPr marL="342900" indent="-342900">
+              <a:spcAft>
+                <a:spcPts val="1000"/>
+              </a:spcAft>
+              <a:buSzPct val="100000"/>
+              <a:buChar char="•"/>
+            </a:pPr>
+            <a:r>
+              <a:rPr lang="en-US" sz="1400" dirty="0">
+                <a:solidFill>
+                  <a:srgbClr val="9CA3AF"/>
+                </a:solidFill>
+                <a:latin typeface="Arial" pitchFamily="34" charset="0"/>
+                <a:ea typeface="Arial" pitchFamily="34" charset="-122"/>
+                <a:cs typeface="Arial" pitchFamily="34" charset="-120"/>
+              </a:rPr>
+              <a:t>Bind to loopback in dev, 0.0.0.0 behind proxy in prod</a:t>
+            </a:r>
+            <a:endParaRPr lang="en-US" sz="1400" dirty="0"/>
+          </a:p>
+          <a:p>
+            <a:pPr marL="342900" indent="-342900">
+              <a:spcAft>
+                <a:spcPts val="1000"/>
+              </a:spcAft>
+              <a:buSzPct val="100000"/>
+              <a:buChar char="•"/>
+            </a:pPr>
+            <a:r>
+              <a:rPr lang="en-US" sz="1400" dirty="0">
+                <a:solidFill>
+                  <a:srgbClr val="9CA3AF"/>
+                </a:solidFill>
+                <a:latin typeface="Arial" pitchFamily="34" charset="0"/>
+                <a:ea typeface="Arial" pitchFamily="34" charset="-122"/>
+                <a:cs typeface="Arial" pitchFamily="34" charset="-120"/>
+              </a:rPr>
+              <a:t>Enable HTTPS via reverse proxy</a:t>
+            </a:r>
+            <a:endParaRPr lang="en-US" sz="1400" dirty="0"/>
+          </a:p>
+          <a:p>
+            <a:pPr marL="342900" indent="-342900">
+              <a:spcAft>
+                <a:spcPts val="1000"/>
+              </a:spcAft>
+              <a:buSzPct val="100000"/>
+              <a:buChar char="•"/>
+            </a:pPr>
+            <a:r>
+              <a:rPr lang="en-US" sz="1400" dirty="0">
+                <a:solidFill>
+                  <a:srgbClr val="9CA3AF"/>
+                </a:solidFill>
+                <a:latin typeface="Arial" pitchFamily="34" charset="0"/>
+                <a:ea typeface="Arial" pitchFamily="34" charset="-122"/>
+                <a:cs typeface="Arial" pitchFamily="34" charset="-120"/>
+              </a:rPr>
+              <a:t>Set API budget caps in Token Factory</a:t>
+            </a:r>
+            <a:endParaRPr lang="en-US" sz="1400" dirty="0"/>
+          </a:p>
+          <a:p>
+            <a:pPr marL="342900" indent="-342900">
+              <a:spcAft>
+                <a:spcPts val="1000"/>
+              </a:spcAft>
+              <a:buSzPct val="100000"/>
+              <a:buChar char="•"/>
+            </a:pPr>
+            <a:r>
+              <a:rPr lang="en-US" sz="1400" dirty="0">
+                <a:solidFill>
+                  <a:srgbClr val="9CA3AF"/>
+                </a:solidFill>
+                <a:latin typeface="Arial" pitchFamily="34" charset="0"/>
+                <a:ea typeface="Arial" pitchFamily="34" charset="-122"/>
+                <a:cs typeface="Arial" pitchFamily="34" charset="-120"/>
+              </a:rPr>
+              <a:t>Use network security groups</a:t>
+            </a:r>
+            <a:endParaRPr lang="en-US" sz="1400" dirty="0"/>
+          </a:p>
+          <a:p>
+            <a:pPr marL="342900" indent="-342900">
+              <a:spcAft>
+                <a:spcPts val="1000"/>
+              </a:spcAft>
+              <a:buSzPct val="100000"/>
+              <a:buChar char="•"/>
+            </a:pPr>
+            <a:r>
+              <a:rPr lang="en-US" sz="1400" dirty="0">
+                <a:solidFill>
+                  <a:srgbClr val="9CA3AF"/>
+                </a:solidFill>
+                <a:latin typeface="Arial" pitchFamily="34" charset="0"/>
+                <a:ea typeface="Arial" pitchFamily="34" charset="-122"/>
+                <a:cs typeface="Arial" pitchFamily="34" charset="-120"/>
+              </a:rPr>
+              <a:t>Docker: runs as non-root node (uid 1000)</a:t>
+            </a:r>
+            <a:endParaRPr lang="en-US" sz="1400" dirty="0"/>
           </a:p>
         </p:txBody>
       </p:sp>
@@ -9018,323 +8564,6 @@
                 <a:ea typeface="Arial" pitchFamily="34" charset="-122"/>
                 <a:cs typeface="Arial" pitchFamily="34" charset="-120"/>
               </a:rPr>
-              <a:t>Security Checklist</a:t>
-            </a:r>
-            <a:endParaRPr lang="en-US" sz="3200" dirty="0"/>
-          </a:p>
-        </p:txBody>
-      </p:sp>
-      <p:sp>
-        <p:nvSpPr>
-          <p:cNvPr id="6" name="Text 4"/>
-          <p:cNvSpPr/>
-          <p:nvPr/>
-        </p:nvSpPr>
-        <p:spPr>
-          <a:xfrm>
-            <a:off x="731520" y="1371600"/>
-            <a:ext cx="7315200" cy="2743200"/>
-          </a:xfrm>
-          <a:prstGeom prst="rect">
-            <a:avLst/>
-          </a:prstGeom>
-          <a:noFill/>
-          <a:ln/>
-        </p:spPr>
-        <p:txBody>
-          <a:bodyPr wrap="square" rtlCol="0" anchor="ctr"/>
-          <a:lstStyle/>
-          <a:p>
-            <a:pPr marL="342900" indent="-342900">
-              <a:spcAft>
-                <a:spcPts val="1000"/>
-              </a:spcAft>
-              <a:buSzPct val="100000"/>
-              <a:buChar char="•"/>
-            </a:pPr>
-            <a:r>
-              <a:rPr lang="en-US" sz="1400" dirty="0">
-                <a:solidFill>
-                  <a:srgbClr val="9CA3AF"/>
-                </a:solidFill>
-                <a:latin typeface="Arial" pitchFamily="34" charset="0"/>
-                <a:ea typeface="Arial" pitchFamily="34" charset="-122"/>
-                <a:cs typeface="Arial" pitchFamily="34" charset="-120"/>
-              </a:rPr>
-              <a:t>Set a gateway token (auth for all connections)</a:t>
-            </a:r>
-            <a:endParaRPr lang="en-US" sz="1400" dirty="0"/>
-          </a:p>
-          <a:p>
-            <a:pPr marL="342900" indent="-342900">
-              <a:spcAft>
-                <a:spcPts val="1000"/>
-              </a:spcAft>
-              <a:buSzPct val="100000"/>
-              <a:buChar char="•"/>
-            </a:pPr>
-            <a:r>
-              <a:rPr lang="en-US" sz="1400" dirty="0">
-                <a:solidFill>
-                  <a:srgbClr val="9CA3AF"/>
-                </a:solidFill>
-                <a:latin typeface="Arial" pitchFamily="34" charset="0"/>
-                <a:ea typeface="Arial" pitchFamily="34" charset="-122"/>
-                <a:cs typeface="Arial" pitchFamily="34" charset="-120"/>
-              </a:rPr>
-              <a:t>Bind to loopback in dev, 0.0.0.0 in production behind a proxy</a:t>
-            </a:r>
-            <a:endParaRPr lang="en-US" sz="1400" dirty="0"/>
-          </a:p>
-          <a:p>
-            <a:pPr marL="342900" indent="-342900">
-              <a:spcAft>
-                <a:spcPts val="1000"/>
-              </a:spcAft>
-              <a:buSzPct val="100000"/>
-              <a:buChar char="•"/>
-            </a:pPr>
-            <a:r>
-              <a:rPr lang="en-US" sz="1400" dirty="0">
-                <a:solidFill>
-                  <a:srgbClr val="9CA3AF"/>
-                </a:solidFill>
-                <a:latin typeface="Arial" pitchFamily="34" charset="0"/>
-                <a:ea typeface="Arial" pitchFamily="34" charset="-122"/>
-                <a:cs typeface="Arial" pitchFamily="34" charset="-120"/>
-              </a:rPr>
-              <a:t>Enable HTTPS via reverse proxy (nginx/Caddy)</a:t>
-            </a:r>
-            <a:endParaRPr lang="en-US" sz="1400" dirty="0"/>
-          </a:p>
-          <a:p>
-            <a:pPr marL="342900" indent="-342900">
-              <a:spcAft>
-                <a:spcPts val="1000"/>
-              </a:spcAft>
-              <a:buSzPct val="100000"/>
-              <a:buChar char="•"/>
-            </a:pPr>
-            <a:r>
-              <a:rPr lang="en-US" sz="1400" dirty="0">
-                <a:solidFill>
-                  <a:srgbClr val="9CA3AF"/>
-                </a:solidFill>
-                <a:latin typeface="Arial" pitchFamily="34" charset="0"/>
-                <a:ea typeface="Arial" pitchFamily="34" charset="-122"/>
-                <a:cs typeface="Arial" pitchFamily="34" charset="-120"/>
-              </a:rPr>
-              <a:t>Set API budget caps in Token Factory</a:t>
-            </a:r>
-            <a:endParaRPr lang="en-US" sz="1400" dirty="0"/>
-          </a:p>
-          <a:p>
-            <a:pPr marL="342900" indent="-342900">
-              <a:spcAft>
-                <a:spcPts val="1000"/>
-              </a:spcAft>
-              <a:buSzPct val="100000"/>
-              <a:buChar char="•"/>
-            </a:pPr>
-            <a:r>
-              <a:rPr lang="en-US" sz="1400" dirty="0">
-                <a:solidFill>
-                  <a:srgbClr val="9CA3AF"/>
-                </a:solidFill>
-                <a:latin typeface="Arial" pitchFamily="34" charset="0"/>
-                <a:ea typeface="Arial" pitchFamily="34" charset="-122"/>
-                <a:cs typeface="Arial" pitchFamily="34" charset="-120"/>
-              </a:rPr>
-              <a:t>Use network security groups to restrict port access</a:t>
-            </a:r>
-            <a:endParaRPr lang="en-US" sz="1400" dirty="0"/>
-          </a:p>
-          <a:p>
-            <a:pPr marL="342900" indent="-342900">
-              <a:spcAft>
-                <a:spcPts val="1000"/>
-              </a:spcAft>
-              <a:buSzPct val="100000"/>
-              <a:buChar char="•"/>
-            </a:pPr>
-            <a:r>
-              <a:rPr lang="en-US" sz="1400" dirty="0">
-                <a:solidFill>
-                  <a:srgbClr val="9CA3AF"/>
-                </a:solidFill>
-                <a:latin typeface="Arial" pitchFamily="34" charset="0"/>
-                <a:ea typeface="Arial" pitchFamily="34" charset="-122"/>
-                <a:cs typeface="Arial" pitchFamily="34" charset="-120"/>
-              </a:rPr>
-              <a:t>For Docker: container runs as non-root user node (uid 1000)</a:t>
-            </a:r>
-            <a:endParaRPr lang="en-US" sz="1400" dirty="0"/>
-          </a:p>
-        </p:txBody>
-      </p:sp>
-    </p:spTree>
-  </p:cSld>
-  <p:clrMapOvr>
-    <a:masterClrMapping/>
-  </p:clrMapOvr>
-</p:sld>
-</file>
-
-<file path=ppt/slides/slide18.xml><?xml version="1.0" encoding="utf-8"?>
-<p:sld xmlns:a="http://schemas.openxmlformats.org/drawingml/2006/main" xmlns:r="http://schemas.openxmlformats.org/officeDocument/2006/relationships" xmlns:p="http://schemas.openxmlformats.org/presentationml/2006/main">
-  <p:cSld name="Slide 18">
-    <p:bg>
-      <p:bgPr>
-        <a:solidFill>
-          <a:srgbClr val="0F1117"/>
-        </a:solidFill>
-      </p:bgPr>
-    </p:bg>
-    <p:spTree>
-      <p:nvGrpSpPr>
-        <p:cNvPr id="1" name=""/>
-        <p:cNvGrpSpPr/>
-        <p:nvPr/>
-      </p:nvGrpSpPr>
-      <p:grpSpPr>
-        <a:xfrm>
-          <a:off x="0" y="0"/>
-          <a:ext cx="0" cy="0"/>
-          <a:chOff x="0" y="0"/>
-          <a:chExt cx="0" cy="0"/>
-        </a:xfrm>
-      </p:grpSpPr>
-      <p:sp>
-        <p:nvSpPr>
-          <p:cNvPr id="2" name="Text 0"/>
-          <p:cNvSpPr/>
-          <p:nvPr/>
-        </p:nvSpPr>
-        <p:spPr>
-          <a:xfrm>
-            <a:off x="365760" y="228600"/>
-            <a:ext cx="1097280" cy="274320"/>
-          </a:xfrm>
-          <a:prstGeom prst="rect">
-            <a:avLst/>
-          </a:prstGeom>
-          <a:noFill/>
-          <a:ln/>
-        </p:spPr>
-        <p:txBody>
-          <a:bodyPr wrap="square" rtlCol="0" anchor="ctr"/>
-          <a:lstStyle/>
-          <a:p>
-            <a:pPr indent="0" marL="0">
-              <a:buNone/>
-            </a:pPr>
-            <a:r>
-              <a:rPr lang="en-US" sz="1000" b="1" spc="400" kern="0" dirty="0">
-                <a:solidFill>
-                  <a:srgbClr val="B8FF4A"/>
-                </a:solidFill>
-                <a:latin typeface="Arial" pitchFamily="34" charset="0"/>
-                <a:ea typeface="Arial" pitchFamily="34" charset="-122"/>
-                <a:cs typeface="Arial" pitchFamily="34" charset="-120"/>
-              </a:rPr>
-              <a:t>NEBIUS</a:t>
-            </a:r>
-            <a:endParaRPr lang="en-US" sz="1000" dirty="0"/>
-          </a:p>
-        </p:txBody>
-      </p:sp>
-      <p:sp>
-        <p:nvSpPr>
-          <p:cNvPr id="3" name="Text 1"/>
-          <p:cNvSpPr/>
-          <p:nvPr/>
-        </p:nvSpPr>
-        <p:spPr>
-          <a:xfrm>
-            <a:off x="365760" y="4709160"/>
-            <a:ext cx="1097280" cy="274320"/>
-          </a:xfrm>
-          <a:prstGeom prst="rect">
-            <a:avLst/>
-          </a:prstGeom>
-          <a:noFill/>
-          <a:ln/>
-        </p:spPr>
-        <p:txBody>
-          <a:bodyPr wrap="square" rtlCol="0" anchor="ctr"/>
-          <a:lstStyle/>
-          <a:p>
-            <a:pPr indent="0" marL="0">
-              <a:buNone/>
-            </a:pPr>
-            <a:r>
-              <a:rPr lang="en-US" sz="900" dirty="0">
-                <a:solidFill>
-                  <a:srgbClr val="555555"/>
-                </a:solidFill>
-                <a:latin typeface="Arial" pitchFamily="34" charset="0"/>
-                <a:ea typeface="Arial" pitchFamily="34" charset="-122"/>
-                <a:cs typeface="Arial" pitchFamily="34" charset="-120"/>
-              </a:rPr>
-              <a:t>ClawCamp</a:t>
-            </a:r>
-            <a:endParaRPr lang="en-US" sz="900" dirty="0"/>
-          </a:p>
-        </p:txBody>
-      </p:sp>
-      <p:sp>
-        <p:nvSpPr>
-          <p:cNvPr id="4" name="Shape 2"/>
-          <p:cNvSpPr/>
-          <p:nvPr/>
-        </p:nvSpPr>
-        <p:spPr>
-          <a:xfrm>
-            <a:off x="0" y="4983480"/>
-            <a:ext cx="9144000" cy="164592"/>
-          </a:xfrm>
-          <a:prstGeom prst="rect">
-            <a:avLst/>
-          </a:prstGeom>
-          <a:solidFill>
-            <a:srgbClr val="B8FF4A"/>
-          </a:solidFill>
-          <a:ln/>
-        </p:spPr>
-      </p:sp>
-      <p:sp>
-        <p:nvSpPr>
-          <p:cNvPr id="5" name="Text 3"/>
-          <p:cNvSpPr/>
-          <p:nvPr/>
-        </p:nvSpPr>
-        <p:spPr>
-          <a:xfrm>
-            <a:off x="731520" y="640080"/>
-            <a:ext cx="7315200" cy="548640"/>
-          </a:xfrm>
-          <a:prstGeom prst="rect">
-            <a:avLst/>
-          </a:prstGeom>
-          <a:noFill/>
-          <a:ln/>
-        </p:spPr>
-        <p:txBody>
-          <a:bodyPr wrap="square" rtlCol="0" anchor="ctr"/>
-          <a:lstStyle/>
-          <a:p>
-            <a:pPr indent="0" marL="0">
-              <a:buNone/>
-            </a:pPr>
-            <a:r>
-              <a:rPr lang="en-US" sz="3200" b="1" dirty="0">
-                <a:solidFill>
-                  <a:srgbClr val="FFFFFF"/>
-                </a:solidFill>
-                <a:latin typeface="Arial" pitchFamily="34" charset="0"/>
-                <a:ea typeface="Arial" pitchFamily="34" charset="-122"/>
-                <a:cs typeface="Arial" pitchFamily="34" charset="-120"/>
-              </a:rPr>
               <a:t>Troubleshooting</a:t>
             </a:r>
             <a:endParaRPr lang="en-US" sz="3200" dirty="0"/>
@@ -9343,7 +8572,7 @@
       </p:sp>
       <p:graphicFrame>
         <p:nvGraphicFramePr>
-          <p:cNvPr id="19" name="Table 0"/>
+          <p:cNvPr id="18" name="Table 0"/>
           <p:cNvGraphicFramePr>
             <a:graphicFrameLocks noGrp="1"/>
           </p:cNvGraphicFramePr>
@@ -9591,7 +8820,7 @@
                           <a:ea typeface="Arial" pitchFamily="34" charset="-122"/>
                           <a:cs typeface="Arial" pitchFamily="34" charset="-120"/>
                         </a:rPr>
-                        <a:t>Check port 18789: lsof -i :18789</a:t>
+                        <a:t>lsof -i :18789</a:t>
                       </a:r>
                       <a:endParaRPr lang="en-US" sz="900" dirty="0">
                         <a:latin typeface="Arial" charset="0"/>
@@ -9867,7 +9096,7 @@
                           <a:ea typeface="Arial" pitchFamily="34" charset="-122"/>
                           <a:cs typeface="Arial" pitchFamily="34" charset="-120"/>
                         </a:rPr>
-                        <a:t>Add to agents.defaults.models allowlist</a:t>
+                        <a:t>Add to allowlist</a:t>
                       </a:r>
                       <a:endParaRPr lang="en-US" sz="900" dirty="0">
                         <a:latin typeface="Arial" charset="0"/>
@@ -10005,7 +9234,7 @@
                           <a:ea typeface="Arial" pitchFamily="34" charset="-122"/>
                           <a:cs typeface="Arial" pitchFamily="34" charset="-120"/>
                         </a:rPr>
-                        <a:t>Check both providers[] AND allowlist</a:t>
+                        <a:t>Check providers[] AND allowlist</a:t>
                       </a:r>
                       <a:endParaRPr lang="en-US" sz="900" dirty="0">
                         <a:latin typeface="Arial" charset="0"/>
@@ -10075,7 +9304,7 @@
                           <a:ea typeface="Arial" pitchFamily="34" charset="-122"/>
                           <a:cs typeface="Arial" pitchFamily="34" charset="-120"/>
                         </a:rPr>
-                        <a:t>Wrong model called</a:t>
+                        <a:t>Docker OOM (137)</a:t>
                       </a:r>
                       <a:endParaRPr lang="en-US" sz="900" dirty="0">
                         <a:latin typeface="Arial" charset="0"/>
@@ -10143,145 +9372,7 @@
                           <a:ea typeface="Arial" pitchFamily="34" charset="-122"/>
                           <a:cs typeface="Arial" pitchFamily="34" charset="-120"/>
                         </a:rPr>
-                        <a:t>Verify id matches Token Factory exactly</a:t>
-                      </a:r>
-                      <a:endParaRPr lang="en-US" sz="900" dirty="0">
-                        <a:latin typeface="Arial" charset="0"/>
-                        <a:ea typeface="Arial" charset="0"/>
-                        <a:cs typeface="Arial" charset="0"/>
-                      </a:endParaRPr>
-                    </a:p>
-                  </a:txBody>
-                  <a:tcPr marL="91440" marR="91440" marT="45720" marB="45720">
-                    <a:lnL w="6350" cap="flat" cmpd="sng" algn="ctr">
-                      <a:solidFill>
-                        <a:srgbClr val="2A2D3E"/>
-                      </a:solidFill>
-                      <a:prstDash val="solid"/>
-                      <a:round/>
-                      <a:headEnd type="none" w="med" len="med"/>
-                      <a:tailEnd type="none" w="med" len="med"/>
-                    </a:lnL>
-                    <a:lnR w="6350" cap="flat" cmpd="sng" algn="ctr">
-                      <a:solidFill>
-                        <a:srgbClr val="2A2D3E"/>
-                      </a:solidFill>
-                      <a:prstDash val="solid"/>
-                      <a:round/>
-                      <a:headEnd type="none" w="med" len="med"/>
-                      <a:tailEnd type="none" w="med" len="med"/>
-                    </a:lnR>
-                    <a:lnT w="6350" cap="flat" cmpd="sng" algn="ctr">
-                      <a:solidFill>
-                        <a:srgbClr val="2A2D3E"/>
-                      </a:solidFill>
-                      <a:prstDash val="solid"/>
-                      <a:round/>
-                      <a:headEnd type="none" w="med" len="med"/>
-                      <a:tailEnd type="none" w="med" len="med"/>
-                    </a:lnT>
-                    <a:lnB w="6350" cap="flat" cmpd="sng" algn="ctr">
-                      <a:solidFill>
-                        <a:srgbClr val="2A2D3E"/>
-                      </a:solidFill>
-                      <a:prstDash val="solid"/>
-                      <a:round/>
-                      <a:headEnd type="none" w="med" len="med"/>
-                      <a:tailEnd type="none" w="med" len="med"/>
-                    </a:lnB>
-                    <a:solidFill>
-                      <a:srgbClr val="1A1D2E"/>
-                    </a:solidFill>
-                  </a:tcPr>
-                </a:tc>
-              </a:tr>
-              <a:tr h="320040">
-                <a:tc>
-                  <a:txBody>
-                    <a:bodyPr/>
-                    <a:lstStyle/>
-                    <a:p>
-                      <a:pPr indent="0" marL="0">
-                        <a:buNone/>
-                      </a:pPr>
-                      <a:r>
-                        <a:rPr lang="en-US" sz="900" dirty="0">
-                          <a:solidFill>
-                            <a:srgbClr val="FFFFFF"/>
-                          </a:solidFill>
-                          <a:latin typeface="Arial" pitchFamily="34" charset="0"/>
-                          <a:ea typeface="Arial" pitchFamily="34" charset="-122"/>
-                          <a:cs typeface="Arial" pitchFamily="34" charset="-120"/>
-                        </a:rPr>
-                        <a:t>Docker OOM (exit 137)</a:t>
-                      </a:r>
-                      <a:endParaRPr lang="en-US" sz="900" dirty="0">
-                        <a:latin typeface="Arial" charset="0"/>
-                        <a:ea typeface="Arial" charset="0"/>
-                        <a:cs typeface="Arial" charset="0"/>
-                      </a:endParaRPr>
-                    </a:p>
-                  </a:txBody>
-                  <a:tcPr marL="91440" marR="91440" marT="45720" marB="45720">
-                    <a:lnL w="6350" cap="flat" cmpd="sng" algn="ctr">
-                      <a:solidFill>
-                        <a:srgbClr val="2A2D3E"/>
-                      </a:solidFill>
-                      <a:prstDash val="solid"/>
-                      <a:round/>
-                      <a:headEnd type="none" w="med" len="med"/>
-                      <a:tailEnd type="none" w="med" len="med"/>
-                    </a:lnL>
-                    <a:lnR w="6350" cap="flat" cmpd="sng" algn="ctr">
-                      <a:solidFill>
-                        <a:srgbClr val="2A2D3E"/>
-                      </a:solidFill>
-                      <a:prstDash val="solid"/>
-                      <a:round/>
-                      <a:headEnd type="none" w="med" len="med"/>
-                      <a:tailEnd type="none" w="med" len="med"/>
-                    </a:lnR>
-                    <a:lnT w="6350" cap="flat" cmpd="sng" algn="ctr">
-                      <a:solidFill>
-                        <a:srgbClr val="2A2D3E"/>
-                      </a:solidFill>
-                      <a:prstDash val="solid"/>
-                      <a:round/>
-                      <a:headEnd type="none" w="med" len="med"/>
-                      <a:tailEnd type="none" w="med" len="med"/>
-                    </a:lnT>
-                    <a:lnB w="6350" cap="flat" cmpd="sng" algn="ctr">
-                      <a:solidFill>
-                        <a:srgbClr val="2A2D3E"/>
-                      </a:solidFill>
-                      <a:prstDash val="solid"/>
-                      <a:round/>
-                      <a:headEnd type="none" w="med" len="med"/>
-                      <a:tailEnd type="none" w="med" len="med"/>
-                    </a:lnB>
-                    <a:solidFill>
-                      <a:srgbClr val="1A1D2E"/>
-                    </a:solidFill>
-                  </a:tcPr>
-                </a:tc>
-                <a:tc>
-                  <a:txBody>
-                    <a:bodyPr/>
-                    <a:lstStyle/>
-                    <a:p>
-                      <a:pPr indent="0" marL="0">
-                        <a:buNone/>
-                      </a:pPr>
-                      <a:r>
-                        <a:rPr lang="en-US" sz="900" dirty="0">
-                          <a:solidFill>
-                            <a:srgbClr val="FFFFFF"/>
-                          </a:solidFill>
-                          <a:latin typeface="Arial" pitchFamily="34" charset="0"/>
-                          <a:ea typeface="Arial" pitchFamily="34" charset="-122"/>
-                          <a:cs typeface="Arial" pitchFamily="34" charset="-120"/>
-                        </a:rPr>
-                        <a:t>Increase memory to 2GB minimum</a:t>
+                        <a:t>Increase to 2GB</a:t>
                       </a:r>
                       <a:endParaRPr lang="en-US" sz="900" dirty="0">
                         <a:latin typeface="Arial" charset="0"/>
@@ -10419,7 +9510,7 @@
                           <a:ea typeface="Arial" pitchFamily="34" charset="-122"/>
                           <a:cs typeface="Arial" pitchFamily="34" charset="-120"/>
                         </a:rPr>
-                        <a:t>Switch to GLM-5: /model glm5</a:t>
+                        <a:t>/model glm5</a:t>
                       </a:r>
                       <a:endParaRPr lang="en-US" sz="900" dirty="0">
                         <a:latin typeface="Arial" charset="0"/>
@@ -10475,6 +9566,336 @@
           </a:graphicData>
         </a:graphic>
       </p:graphicFrame>
+    </p:spTree>
+  </p:cSld>
+  <p:clrMapOvr>
+    <a:masterClrMapping/>
+  </p:clrMapOvr>
+</p:sld>
+</file>
+
+<file path=ppt/slides/slide18.xml><?xml version="1.0" encoding="utf-8"?>
+<p:sld xmlns:a="http://schemas.openxmlformats.org/drawingml/2006/main" xmlns:r="http://schemas.openxmlformats.org/officeDocument/2006/relationships" xmlns:p="http://schemas.openxmlformats.org/presentationml/2006/main">
+  <p:cSld name="Slide 18">
+    <p:bg>
+      <p:bgPr>
+        <a:solidFill>
+          <a:srgbClr val="0F1117"/>
+        </a:solidFill>
+      </p:bgPr>
+    </p:bg>
+    <p:spTree>
+      <p:nvGrpSpPr>
+        <p:cNvPr id="1" name=""/>
+        <p:cNvGrpSpPr/>
+        <p:nvPr/>
+      </p:nvGrpSpPr>
+      <p:grpSpPr>
+        <a:xfrm>
+          <a:off x="0" y="0"/>
+          <a:ext cx="0" cy="0"/>
+          <a:chOff x="0" y="0"/>
+          <a:chExt cx="0" cy="0"/>
+        </a:xfrm>
+      </p:grpSpPr>
+      <p:sp>
+        <p:nvSpPr>
+          <p:cNvPr id="2" name="Text 0"/>
+          <p:cNvSpPr/>
+          <p:nvPr/>
+        </p:nvSpPr>
+        <p:spPr>
+          <a:xfrm>
+            <a:off x="365760" y="228600"/>
+            <a:ext cx="1097280" cy="274320"/>
+          </a:xfrm>
+          <a:prstGeom prst="rect">
+            <a:avLst/>
+          </a:prstGeom>
+          <a:noFill/>
+          <a:ln/>
+        </p:spPr>
+        <p:txBody>
+          <a:bodyPr wrap="square" rtlCol="0" anchor="ctr"/>
+          <a:lstStyle/>
+          <a:p>
+            <a:pPr indent="0" marL="0">
+              <a:buNone/>
+            </a:pPr>
+            <a:r>
+              <a:rPr lang="en-US" sz="1000" b="1" spc="400" kern="0" dirty="0">
+                <a:solidFill>
+                  <a:srgbClr val="B8FF4A"/>
+                </a:solidFill>
+                <a:latin typeface="Arial" pitchFamily="34" charset="0"/>
+                <a:ea typeface="Arial" pitchFamily="34" charset="-122"/>
+                <a:cs typeface="Arial" pitchFamily="34" charset="-120"/>
+              </a:rPr>
+              <a:t>NEBIUS</a:t>
+            </a:r>
+            <a:endParaRPr lang="en-US" sz="1000" dirty="0"/>
+          </a:p>
+        </p:txBody>
+      </p:sp>
+      <p:sp>
+        <p:nvSpPr>
+          <p:cNvPr id="3" name="Text 1"/>
+          <p:cNvSpPr/>
+          <p:nvPr/>
+        </p:nvSpPr>
+        <p:spPr>
+          <a:xfrm>
+            <a:off x="365760" y="4709160"/>
+            <a:ext cx="1097280" cy="274320"/>
+          </a:xfrm>
+          <a:prstGeom prst="rect">
+            <a:avLst/>
+          </a:prstGeom>
+          <a:noFill/>
+          <a:ln/>
+        </p:spPr>
+        <p:txBody>
+          <a:bodyPr wrap="square" rtlCol="0" anchor="ctr"/>
+          <a:lstStyle/>
+          <a:p>
+            <a:pPr indent="0" marL="0">
+              <a:buNone/>
+            </a:pPr>
+            <a:r>
+              <a:rPr lang="en-US" sz="900" dirty="0">
+                <a:solidFill>
+                  <a:srgbClr val="555555"/>
+                </a:solidFill>
+                <a:latin typeface="Arial" pitchFamily="34" charset="0"/>
+                <a:ea typeface="Arial" pitchFamily="34" charset="-122"/>
+                <a:cs typeface="Arial" pitchFamily="34" charset="-120"/>
+              </a:rPr>
+              <a:t>ClawCamp</a:t>
+            </a:r>
+            <a:endParaRPr lang="en-US" sz="900" dirty="0"/>
+          </a:p>
+        </p:txBody>
+      </p:sp>
+      <p:sp>
+        <p:nvSpPr>
+          <p:cNvPr id="4" name="Shape 2"/>
+          <p:cNvSpPr/>
+          <p:nvPr/>
+        </p:nvSpPr>
+        <p:spPr>
+          <a:xfrm>
+            <a:off x="0" y="4983480"/>
+            <a:ext cx="9144000" cy="164592"/>
+          </a:xfrm>
+          <a:prstGeom prst="rect">
+            <a:avLst/>
+          </a:prstGeom>
+          <a:solidFill>
+            <a:srgbClr val="B8FF4A"/>
+          </a:solidFill>
+          <a:ln/>
+        </p:spPr>
+      </p:sp>
+      <p:sp>
+        <p:nvSpPr>
+          <p:cNvPr id="5" name="Text 3"/>
+          <p:cNvSpPr/>
+          <p:nvPr/>
+        </p:nvSpPr>
+        <p:spPr>
+          <a:xfrm>
+            <a:off x="731520" y="640080"/>
+            <a:ext cx="7315200" cy="548640"/>
+          </a:xfrm>
+          <a:prstGeom prst="rect">
+            <a:avLst/>
+          </a:prstGeom>
+          <a:noFill/>
+          <a:ln/>
+        </p:spPr>
+        <p:txBody>
+          <a:bodyPr wrap="square" rtlCol="0" anchor="ctr"/>
+          <a:lstStyle/>
+          <a:p>
+            <a:pPr indent="0" marL="0">
+              <a:buNone/>
+            </a:pPr>
+            <a:r>
+              <a:rPr lang="en-US" sz="3200" b="1" dirty="0">
+                <a:solidFill>
+                  <a:srgbClr val="FFFFFF"/>
+                </a:solidFill>
+                <a:latin typeface="Arial" pitchFamily="34" charset="0"/>
+                <a:ea typeface="Arial" pitchFamily="34" charset="-122"/>
+                <a:cs typeface="Arial" pitchFamily="34" charset="-120"/>
+              </a:rPr>
+              <a:t>What You Built Today</a:t>
+            </a:r>
+            <a:endParaRPr lang="en-US" sz="3200" dirty="0"/>
+          </a:p>
+        </p:txBody>
+      </p:sp>
+      <p:sp>
+        <p:nvSpPr>
+          <p:cNvPr id="6" name="Text 4"/>
+          <p:cNvSpPr/>
+          <p:nvPr/>
+        </p:nvSpPr>
+        <p:spPr>
+          <a:xfrm>
+            <a:off x="731520" y="1463040"/>
+            <a:ext cx="7315200" cy="2286000"/>
+          </a:xfrm>
+          <a:prstGeom prst="rect">
+            <a:avLst/>
+          </a:prstGeom>
+          <a:noFill/>
+          <a:ln/>
+        </p:spPr>
+        <p:txBody>
+          <a:bodyPr wrap="square" rtlCol="0" anchor="ctr"/>
+          <a:lstStyle/>
+          <a:p>
+            <a:pPr indent="0" marL="0">
+              <a:spcAft>
+                <a:spcPts val="1200"/>
+              </a:spcAft>
+              <a:buNone/>
+            </a:pPr>
+            <a:r>
+              <a:rPr lang="en-US" sz="1600" dirty="0">
+                <a:solidFill>
+                  <a:srgbClr val="9CA3AF"/>
+                </a:solidFill>
+                <a:latin typeface="Arial" pitchFamily="34" charset="0"/>
+                <a:ea typeface="Arial" pitchFamily="34" charset="-122"/>
+                <a:cs typeface="Arial" pitchFamily="34" charset="-120"/>
+              </a:rPr>
+              <a:t>1. Installed OpenClaw (npm or Docker)</a:t>
+            </a:r>
+            <a:endParaRPr lang="en-US" sz="1600" dirty="0"/>
+          </a:p>
+          <a:p>
+            <a:pPr indent="0" marL="0">
+              <a:spcAft>
+                <a:spcPts val="1200"/>
+              </a:spcAft>
+              <a:buNone/>
+            </a:pPr>
+            <a:r>
+              <a:rPr lang="en-US" sz="1600" dirty="0">
+                <a:solidFill>
+                  <a:srgbClr val="9CA3AF"/>
+                </a:solidFill>
+                <a:latin typeface="Arial" pitchFamily="34" charset="0"/>
+                <a:ea typeface="Arial" pitchFamily="34" charset="-122"/>
+                <a:cs typeface="Arial" pitchFamily="34" charset="-120"/>
+              </a:rPr>
+              <a:t>2. Connected to Nebius Token Factory</a:t>
+            </a:r>
+            <a:endParaRPr lang="en-US" sz="1600" dirty="0"/>
+          </a:p>
+          <a:p>
+            <a:pPr indent="0" marL="0">
+              <a:spcAft>
+                <a:spcPts val="1200"/>
+              </a:spcAft>
+              <a:buNone/>
+            </a:pPr>
+            <a:r>
+              <a:rPr lang="en-US" sz="1600" dirty="0">
+                <a:solidFill>
+                  <a:srgbClr val="9CA3AF"/>
+                </a:solidFill>
+                <a:latin typeface="Arial" pitchFamily="34" charset="0"/>
+                <a:ea typeface="Arial" pitchFamily="34" charset="-122"/>
+                <a:cs typeface="Arial" pitchFamily="34" charset="-120"/>
+              </a:rPr>
+              <a:t>3. Selected a model and configured tool calling</a:t>
+            </a:r>
+            <a:endParaRPr lang="en-US" sz="1600" dirty="0"/>
+          </a:p>
+          <a:p>
+            <a:pPr indent="0" marL="0">
+              <a:spcAft>
+                <a:spcPts val="1200"/>
+              </a:spcAft>
+              <a:buNone/>
+            </a:pPr>
+            <a:r>
+              <a:rPr lang="en-US" sz="1600" dirty="0">
+                <a:solidFill>
+                  <a:srgbClr val="9CA3AF"/>
+                </a:solidFill>
+                <a:latin typeface="Arial" pitchFamily="34" charset="0"/>
+                <a:ea typeface="Arial" pitchFamily="34" charset="-122"/>
+                <a:cs typeface="Arial" pitchFamily="34" charset="-120"/>
+              </a:rPr>
+              <a:t>4. Understand three deployment methods</a:t>
+            </a:r>
+            <a:endParaRPr lang="en-US" sz="1600" dirty="0"/>
+          </a:p>
+          <a:p>
+            <a:pPr indent="0" marL="0">
+              <a:spcAft>
+                <a:spcPts val="1200"/>
+              </a:spcAft>
+              <a:buNone/>
+            </a:pPr>
+            <a:r>
+              <a:rPr lang="en-US" sz="1600" dirty="0">
+                <a:solidFill>
+                  <a:srgbClr val="9CA3AF"/>
+                </a:solidFill>
+                <a:latin typeface="Arial" pitchFamily="34" charset="0"/>
+                <a:ea typeface="Arial" pitchFamily="34" charset="-122"/>
+                <a:cs typeface="Arial" pitchFamily="34" charset="-120"/>
+              </a:rPr>
+              <a:t>5. Know how to go from prototype to production</a:t>
+            </a:r>
+            <a:endParaRPr lang="en-US" sz="1600" dirty="0"/>
+          </a:p>
+        </p:txBody>
+      </p:sp>
+      <p:sp>
+        <p:nvSpPr>
+          <p:cNvPr id="7" name="Text 5"/>
+          <p:cNvSpPr/>
+          <p:nvPr/>
+        </p:nvSpPr>
+        <p:spPr>
+          <a:xfrm>
+            <a:off x="731520" y="3657600"/>
+            <a:ext cx="7315200" cy="457200"/>
+          </a:xfrm>
+          <a:prstGeom prst="rect">
+            <a:avLst/>
+          </a:prstGeom>
+          <a:noFill/>
+          <a:ln/>
+        </p:spPr>
+        <p:txBody>
+          <a:bodyPr wrap="square" rtlCol="0" anchor="ctr"/>
+          <a:lstStyle/>
+          <a:p>
+            <a:pPr indent="0" marL="0">
+              <a:buNone/>
+            </a:pPr>
+            <a:r>
+              <a:rPr lang="en-US" sz="1600" b="1" dirty="0">
+                <a:solidFill>
+                  <a:srgbClr val="B8FF4A"/>
+                </a:solidFill>
+                <a:latin typeface="Arial" pitchFamily="34" charset="0"/>
+                <a:ea typeface="Arial" pitchFamily="34" charset="-122"/>
+                <a:cs typeface="Arial" pitchFamily="34" charset="-120"/>
+              </a:rPr>
+              <a:t>No Claude. No OpenAI. Just open-source on Nebius.</a:t>
+            </a:r>
+            <a:endParaRPr lang="en-US" sz="1600" dirty="0"/>
+          </a:p>
+        </p:txBody>
+      </p:sp>
     </p:spTree>
   </p:cSld>
   <p:clrMapOvr>
@@ -10638,706 +10059,6 @@
                 <a:ea typeface="Arial" pitchFamily="34" charset="-122"/>
                 <a:cs typeface="Arial" pitchFamily="34" charset="-120"/>
               </a:rPr>
-              <a:t>What You Built Today</a:t>
-            </a:r>
-            <a:endParaRPr lang="en-US" sz="3200" dirty="0"/>
-          </a:p>
-        </p:txBody>
-      </p:sp>
-      <p:sp>
-        <p:nvSpPr>
-          <p:cNvPr id="6" name="Text 4"/>
-          <p:cNvSpPr/>
-          <p:nvPr/>
-        </p:nvSpPr>
-        <p:spPr>
-          <a:xfrm>
-            <a:off x="731520" y="1463040"/>
-            <a:ext cx="7315200" cy="2286000"/>
-          </a:xfrm>
-          <a:prstGeom prst="rect">
-            <a:avLst/>
-          </a:prstGeom>
-          <a:noFill/>
-          <a:ln/>
-        </p:spPr>
-        <p:txBody>
-          <a:bodyPr wrap="square" rtlCol="0" anchor="ctr"/>
-          <a:lstStyle/>
-          <a:p>
-            <a:pPr indent="0" marL="0">
-              <a:spcAft>
-                <a:spcPts val="1200"/>
-              </a:spcAft>
-              <a:buNone/>
-            </a:pPr>
-            <a:r>
-              <a:rPr lang="en-US" sz="1600" dirty="0">
-                <a:solidFill>
-                  <a:srgbClr val="9CA3AF"/>
-                </a:solidFill>
-                <a:latin typeface="Arial" pitchFamily="34" charset="0"/>
-                <a:ea typeface="Arial" pitchFamily="34" charset="-122"/>
-                <a:cs typeface="Arial" pitchFamily="34" charset="-120"/>
-              </a:rPr>
-              <a:t>1. Installed OpenClaw (npm or Docker)</a:t>
-            </a:r>
-            <a:endParaRPr lang="en-US" sz="1600" dirty="0"/>
-          </a:p>
-          <a:p>
-            <a:pPr indent="0" marL="0">
-              <a:spcAft>
-                <a:spcPts val="1200"/>
-              </a:spcAft>
-              <a:buNone/>
-            </a:pPr>
-            <a:r>
-              <a:rPr lang="en-US" sz="1600" dirty="0">
-                <a:solidFill>
-                  <a:srgbClr val="9CA3AF"/>
-                </a:solidFill>
-                <a:latin typeface="Arial" pitchFamily="34" charset="0"/>
-                <a:ea typeface="Arial" pitchFamily="34" charset="-122"/>
-                <a:cs typeface="Arial" pitchFamily="34" charset="-120"/>
-              </a:rPr>
-              <a:t>2. Connected to Nebius Token Factory</a:t>
-            </a:r>
-            <a:endParaRPr lang="en-US" sz="1600" dirty="0"/>
-          </a:p>
-          <a:p>
-            <a:pPr indent="0" marL="0">
-              <a:spcAft>
-                <a:spcPts val="1200"/>
-              </a:spcAft>
-              <a:buNone/>
-            </a:pPr>
-            <a:r>
-              <a:rPr lang="en-US" sz="1600" dirty="0">
-                <a:solidFill>
-                  <a:srgbClr val="9CA3AF"/>
-                </a:solidFill>
-                <a:latin typeface="Arial" pitchFamily="34" charset="0"/>
-                <a:ea typeface="Arial" pitchFamily="34" charset="-122"/>
-                <a:cs typeface="Arial" pitchFamily="34" charset="-120"/>
-              </a:rPr>
-              <a:t>3. Selected a model and configured tool calling</a:t>
-            </a:r>
-            <a:endParaRPr lang="en-US" sz="1600" dirty="0"/>
-          </a:p>
-          <a:p>
-            <a:pPr indent="0" marL="0">
-              <a:spcAft>
-                <a:spcPts val="1200"/>
-              </a:spcAft>
-              <a:buNone/>
-            </a:pPr>
-            <a:r>
-              <a:rPr lang="en-US" sz="1600" dirty="0">
-                <a:solidFill>
-                  <a:srgbClr val="9CA3AF"/>
-                </a:solidFill>
-                <a:latin typeface="Arial" pitchFamily="34" charset="0"/>
-                <a:ea typeface="Arial" pitchFamily="34" charset="-122"/>
-                <a:cs typeface="Arial" pitchFamily="34" charset="-120"/>
-              </a:rPr>
-              <a:t>4. Understand three deployment methods</a:t>
-            </a:r>
-            <a:endParaRPr lang="en-US" sz="1600" dirty="0"/>
-          </a:p>
-          <a:p>
-            <a:pPr indent="0" marL="0">
-              <a:spcAft>
-                <a:spcPts val="1200"/>
-              </a:spcAft>
-              <a:buNone/>
-            </a:pPr>
-            <a:r>
-              <a:rPr lang="en-US" sz="1600" dirty="0">
-                <a:solidFill>
-                  <a:srgbClr val="9CA3AF"/>
-                </a:solidFill>
-                <a:latin typeface="Arial" pitchFamily="34" charset="0"/>
-                <a:ea typeface="Arial" pitchFamily="34" charset="-122"/>
-                <a:cs typeface="Arial" pitchFamily="34" charset="-120"/>
-              </a:rPr>
-              <a:t>5. Know how to go from prototype to production</a:t>
-            </a:r>
-            <a:endParaRPr lang="en-US" sz="1600" dirty="0"/>
-          </a:p>
-        </p:txBody>
-      </p:sp>
-      <p:sp>
-        <p:nvSpPr>
-          <p:cNvPr id="7" name="Text 5"/>
-          <p:cNvSpPr/>
-          <p:nvPr/>
-        </p:nvSpPr>
-        <p:spPr>
-          <a:xfrm>
-            <a:off x="731520" y="3657600"/>
-            <a:ext cx="7315200" cy="731520"/>
-          </a:xfrm>
-          <a:prstGeom prst="rect">
-            <a:avLst/>
-          </a:prstGeom>
-          <a:noFill/>
-          <a:ln/>
-        </p:spPr>
-        <p:txBody>
-          <a:bodyPr wrap="square" rtlCol="0" anchor="ctr"/>
-          <a:lstStyle/>
-          <a:p>
-            <a:pPr indent="0" marL="0">
-              <a:buNone/>
-            </a:pPr>
-            <a:r>
-              <a:rPr lang="en-US" sz="1600" b="1" dirty="0">
-                <a:solidFill>
-                  <a:srgbClr val="B8FF4A"/>
-                </a:solidFill>
-                <a:latin typeface="Arial" pitchFamily="34" charset="0"/>
-                <a:ea typeface="Arial" pitchFamily="34" charset="-122"/>
-                <a:cs typeface="Arial" pitchFamily="34" charset="-120"/>
-              </a:rPr>
-              <a:t>Your agent is live. No Claude API key needed.</a:t>
-            </a:r>
-            <a:endParaRPr lang="en-US" sz="1600" dirty="0"/>
-          </a:p>
-          <a:p>
-            <a:pPr indent="0" marL="0">
-              <a:buNone/>
-            </a:pPr>
-            <a:r>
-              <a:rPr lang="en-US" sz="1600" b="1" dirty="0">
-                <a:solidFill>
-                  <a:srgbClr val="B8FF4A"/>
-                </a:solidFill>
-                <a:latin typeface="Arial" pitchFamily="34" charset="0"/>
-                <a:ea typeface="Arial" pitchFamily="34" charset="-122"/>
-                <a:cs typeface="Arial" pitchFamily="34" charset="-120"/>
-              </a:rPr>
-              <a:t>No OpenAI. Just open-source models on Nebius.</a:t>
-            </a:r>
-            <a:endParaRPr lang="en-US" sz="1600" dirty="0"/>
-          </a:p>
-        </p:txBody>
-      </p:sp>
-    </p:spTree>
-  </p:cSld>
-  <p:clrMapOvr>
-    <a:masterClrMapping/>
-  </p:clrMapOvr>
-</p:sld>
-</file>
-
-<file path=ppt/slides/slide2.xml><?xml version="1.0" encoding="utf-8"?>
-<p:sld xmlns:a="http://schemas.openxmlformats.org/drawingml/2006/main" xmlns:r="http://schemas.openxmlformats.org/officeDocument/2006/relationships" xmlns:p="http://schemas.openxmlformats.org/presentationml/2006/main">
-  <p:cSld name="Slide 2">
-    <p:bg>
-      <p:bgPr>
-        <a:solidFill>
-          <a:srgbClr val="0F1117"/>
-        </a:solidFill>
-      </p:bgPr>
-    </p:bg>
-    <p:spTree>
-      <p:nvGrpSpPr>
-        <p:cNvPr id="1" name=""/>
-        <p:cNvGrpSpPr/>
-        <p:nvPr/>
-      </p:nvGrpSpPr>
-      <p:grpSpPr>
-        <a:xfrm>
-          <a:off x="0" y="0"/>
-          <a:ext cx="0" cy="0"/>
-          <a:chOff x="0" y="0"/>
-          <a:chExt cx="0" cy="0"/>
-        </a:xfrm>
-      </p:grpSpPr>
-      <p:sp>
-        <p:nvSpPr>
-          <p:cNvPr id="2" name="Text 0"/>
-          <p:cNvSpPr/>
-          <p:nvPr/>
-        </p:nvSpPr>
-        <p:spPr>
-          <a:xfrm>
-            <a:off x="365760" y="228600"/>
-            <a:ext cx="1097280" cy="274320"/>
-          </a:xfrm>
-          <a:prstGeom prst="rect">
-            <a:avLst/>
-          </a:prstGeom>
-          <a:noFill/>
-          <a:ln/>
-        </p:spPr>
-        <p:txBody>
-          <a:bodyPr wrap="square" rtlCol="0" anchor="ctr"/>
-          <a:lstStyle/>
-          <a:p>
-            <a:pPr indent="0" marL="0">
-              <a:buNone/>
-            </a:pPr>
-            <a:r>
-              <a:rPr lang="en-US" sz="1000" b="1" spc="400" kern="0" dirty="0">
-                <a:solidFill>
-                  <a:srgbClr val="B8FF4A"/>
-                </a:solidFill>
-                <a:latin typeface="Arial" pitchFamily="34" charset="0"/>
-                <a:ea typeface="Arial" pitchFamily="34" charset="-122"/>
-                <a:cs typeface="Arial" pitchFamily="34" charset="-120"/>
-              </a:rPr>
-              <a:t>NEBIUS</a:t>
-            </a:r>
-            <a:endParaRPr lang="en-US" sz="1000" dirty="0"/>
-          </a:p>
-        </p:txBody>
-      </p:sp>
-      <p:sp>
-        <p:nvSpPr>
-          <p:cNvPr id="3" name="Text 1"/>
-          <p:cNvSpPr/>
-          <p:nvPr/>
-        </p:nvSpPr>
-        <p:spPr>
-          <a:xfrm>
-            <a:off x="365760" y="4709160"/>
-            <a:ext cx="1097280" cy="274320"/>
-          </a:xfrm>
-          <a:prstGeom prst="rect">
-            <a:avLst/>
-          </a:prstGeom>
-          <a:noFill/>
-          <a:ln/>
-        </p:spPr>
-        <p:txBody>
-          <a:bodyPr wrap="square" rtlCol="0" anchor="ctr"/>
-          <a:lstStyle/>
-          <a:p>
-            <a:pPr indent="0" marL="0">
-              <a:buNone/>
-            </a:pPr>
-            <a:r>
-              <a:rPr lang="en-US" sz="900" dirty="0">
-                <a:solidFill>
-                  <a:srgbClr val="555555"/>
-                </a:solidFill>
-                <a:latin typeface="Arial" pitchFamily="34" charset="0"/>
-                <a:ea typeface="Arial" pitchFamily="34" charset="-122"/>
-                <a:cs typeface="Arial" pitchFamily="34" charset="-120"/>
-              </a:rPr>
-              <a:t>ClawCamp</a:t>
-            </a:r>
-            <a:endParaRPr lang="en-US" sz="900" dirty="0"/>
-          </a:p>
-        </p:txBody>
-      </p:sp>
-      <p:sp>
-        <p:nvSpPr>
-          <p:cNvPr id="4" name="Shape 2"/>
-          <p:cNvSpPr/>
-          <p:nvPr/>
-        </p:nvSpPr>
-        <p:spPr>
-          <a:xfrm>
-            <a:off x="0" y="4983480"/>
-            <a:ext cx="9144000" cy="164592"/>
-          </a:xfrm>
-          <a:prstGeom prst="rect">
-            <a:avLst/>
-          </a:prstGeom>
-          <a:solidFill>
-            <a:srgbClr val="B8FF4A"/>
-          </a:solidFill>
-          <a:ln/>
-        </p:spPr>
-      </p:sp>
-      <p:sp>
-        <p:nvSpPr>
-          <p:cNvPr id="5" name="Text 3"/>
-          <p:cNvSpPr/>
-          <p:nvPr/>
-        </p:nvSpPr>
-        <p:spPr>
-          <a:xfrm>
-            <a:off x="731520" y="640080"/>
-            <a:ext cx="7315200" cy="548640"/>
-          </a:xfrm>
-          <a:prstGeom prst="rect">
-            <a:avLst/>
-          </a:prstGeom>
-          <a:noFill/>
-          <a:ln/>
-        </p:spPr>
-        <p:txBody>
-          <a:bodyPr wrap="square" rtlCol="0" anchor="ctr"/>
-          <a:lstStyle/>
-          <a:p>
-            <a:pPr indent="0" marL="0">
-              <a:buNone/>
-            </a:pPr>
-            <a:r>
-              <a:rPr lang="en-US" sz="3200" b="1" dirty="0">
-                <a:solidFill>
-                  <a:srgbClr val="FFFFFF"/>
-                </a:solidFill>
-                <a:latin typeface="Arial" pitchFamily="34" charset="0"/>
-                <a:ea typeface="Arial" pitchFamily="34" charset="-122"/>
-                <a:cs typeface="Arial" pitchFamily="34" charset="-120"/>
-              </a:rPr>
-              <a:t>The Problem</a:t>
-            </a:r>
-            <a:endParaRPr lang="en-US" sz="3200" dirty="0"/>
-          </a:p>
-        </p:txBody>
-      </p:sp>
-      <p:sp>
-        <p:nvSpPr>
-          <p:cNvPr id="6" name="Text 4"/>
-          <p:cNvSpPr/>
-          <p:nvPr/>
-        </p:nvSpPr>
-        <p:spPr>
-          <a:xfrm>
-            <a:off x="731520" y="1280160"/>
-            <a:ext cx="6400800" cy="365760"/>
-          </a:xfrm>
-          <a:prstGeom prst="rect">
-            <a:avLst/>
-          </a:prstGeom>
-          <a:noFill/>
-          <a:ln/>
-        </p:spPr>
-        <p:txBody>
-          <a:bodyPr wrap="square" rtlCol="0" anchor="ctr"/>
-          <a:lstStyle/>
-          <a:p>
-            <a:pPr indent="0" marL="0">
-              <a:buNone/>
-            </a:pPr>
-            <a:r>
-              <a:rPr lang="en-US" sz="1600" dirty="0">
-                <a:solidFill>
-                  <a:srgbClr val="B8FF4A"/>
-                </a:solidFill>
-                <a:latin typeface="Arial" pitchFamily="34" charset="0"/>
-                <a:ea typeface="Arial" pitchFamily="34" charset="-122"/>
-                <a:cs typeface="Arial" pitchFamily="34" charset="-120"/>
-              </a:rPr>
-              <a:t>Running AI agents is expensive and complicated</a:t>
-            </a:r>
-            <a:endParaRPr lang="en-US" sz="1600" dirty="0"/>
-          </a:p>
-        </p:txBody>
-      </p:sp>
-      <p:sp>
-        <p:nvSpPr>
-          <p:cNvPr id="7" name="Text 5"/>
-          <p:cNvSpPr/>
-          <p:nvPr/>
-        </p:nvSpPr>
-        <p:spPr>
-          <a:xfrm>
-            <a:off x="731520" y="1828800"/>
-            <a:ext cx="6400800" cy="1828800"/>
-          </a:xfrm>
-          <a:prstGeom prst="rect">
-            <a:avLst/>
-          </a:prstGeom>
-          <a:noFill/>
-          <a:ln/>
-        </p:spPr>
-        <p:txBody>
-          <a:bodyPr wrap="square" rtlCol="0" anchor="ctr"/>
-          <a:lstStyle/>
-          <a:p>
-            <a:pPr marL="342900" indent="-342900">
-              <a:spcAft>
-                <a:spcPts val="800"/>
-              </a:spcAft>
-              <a:buSzPct val="100000"/>
-              <a:buChar char="•"/>
-            </a:pPr>
-            <a:r>
-              <a:rPr lang="en-US" sz="1400" dirty="0">
-                <a:solidFill>
-                  <a:srgbClr val="9CA3AF"/>
-                </a:solidFill>
-                <a:latin typeface="Arial" pitchFamily="34" charset="0"/>
-                <a:ea typeface="Arial" pitchFamily="34" charset="-122"/>
-                <a:cs typeface="Arial" pitchFamily="34" charset="-120"/>
-              </a:rPr>
-              <a:t>A Mac Mini for local inference: $1,000+</a:t>
-            </a:r>
-            <a:endParaRPr lang="en-US" sz="1400" dirty="0"/>
-          </a:p>
-          <a:p>
-            <a:pPr marL="342900" indent="-342900">
-              <a:spcAft>
-                <a:spcPts val="800"/>
-              </a:spcAft>
-              <a:buSzPct val="100000"/>
-              <a:buChar char="•"/>
-            </a:pPr>
-            <a:r>
-              <a:rPr lang="en-US" sz="1400" dirty="0">
-                <a:solidFill>
-                  <a:srgbClr val="9CA3AF"/>
-                </a:solidFill>
-                <a:latin typeface="Arial" pitchFamily="34" charset="0"/>
-                <a:ea typeface="Arial" pitchFamily="34" charset="-122"/>
-                <a:cs typeface="Arial" pitchFamily="34" charset="-120"/>
-              </a:rPr>
-              <a:t>Exposes your home network</a:t>
-            </a:r>
-            <a:endParaRPr lang="en-US" sz="1400" dirty="0"/>
-          </a:p>
-          <a:p>
-            <a:pPr marL="342900" indent="-342900">
-              <a:spcAft>
-                <a:spcPts val="800"/>
-              </a:spcAft>
-              <a:buSzPct val="100000"/>
-              <a:buChar char="•"/>
-            </a:pPr>
-            <a:r>
-              <a:rPr lang="en-US" sz="1400" dirty="0">
-                <a:solidFill>
-                  <a:srgbClr val="9CA3AF"/>
-                </a:solidFill>
-                <a:latin typeface="Arial" pitchFamily="34" charset="0"/>
-                <a:ea typeface="Arial" pitchFamily="34" charset="-122"/>
-                <a:cs typeface="Arial" pitchFamily="34" charset="-120"/>
-              </a:rPr>
-              <a:t>Runs ONE agent at a time</a:t>
-            </a:r>
-            <a:endParaRPr lang="en-US" sz="1400" dirty="0"/>
-          </a:p>
-          <a:p>
-            <a:pPr marL="342900" indent="-342900">
-              <a:spcAft>
-                <a:spcPts val="800"/>
-              </a:spcAft>
-              <a:buSzPct val="100000"/>
-              <a:buChar char="•"/>
-            </a:pPr>
-            <a:r>
-              <a:rPr lang="en-US" sz="1400" dirty="0">
-                <a:solidFill>
-                  <a:srgbClr val="9CA3AF"/>
-                </a:solidFill>
-                <a:latin typeface="Arial" pitchFamily="34" charset="0"/>
-                <a:ea typeface="Arial" pitchFamily="34" charset="-122"/>
-                <a:cs typeface="Arial" pitchFamily="34" charset="-120"/>
-              </a:rPr>
-              <a:t>No scaling, no redundancy, no sleep</a:t>
-            </a:r>
-            <a:endParaRPr lang="en-US" sz="1400" dirty="0"/>
-          </a:p>
-        </p:txBody>
-      </p:sp>
-      <p:sp>
-        <p:nvSpPr>
-          <p:cNvPr id="8" name="Text 6"/>
-          <p:cNvSpPr/>
-          <p:nvPr/>
-        </p:nvSpPr>
-        <p:spPr>
-          <a:xfrm>
-            <a:off x="731520" y="3840480"/>
-            <a:ext cx="7315200" cy="457200"/>
-          </a:xfrm>
-          <a:prstGeom prst="rect">
-            <a:avLst/>
-          </a:prstGeom>
-          <a:noFill/>
-          <a:ln/>
-        </p:spPr>
-        <p:txBody>
-          <a:bodyPr wrap="square" rtlCol="0" anchor="ctr"/>
-          <a:lstStyle/>
-          <a:p>
-            <a:pPr indent="0" marL="0">
-              <a:buNone/>
-            </a:pPr>
-            <a:r>
-              <a:rPr lang="en-US" sz="1600" b="1" dirty="0">
-                <a:solidFill>
-                  <a:srgbClr val="FFFFFF"/>
-                </a:solidFill>
-                <a:latin typeface="Arial" pitchFamily="34" charset="0"/>
-                <a:ea typeface="Arial" pitchFamily="34" charset="-122"/>
-                <a:cs typeface="Arial" pitchFamily="34" charset="-120"/>
-              </a:rPr>
-              <a:t>What if you could run 100 agents for the cost of one Mac Mini?</a:t>
-            </a:r>
-            <a:endParaRPr lang="en-US" sz="1600" dirty="0"/>
-          </a:p>
-        </p:txBody>
-      </p:sp>
-    </p:spTree>
-  </p:cSld>
-  <p:clrMapOvr>
-    <a:masterClrMapping/>
-  </p:clrMapOvr>
-</p:sld>
-</file>
-
-<file path=ppt/slides/slide20.xml><?xml version="1.0" encoding="utf-8"?>
-<p:sld xmlns:a="http://schemas.openxmlformats.org/drawingml/2006/main" xmlns:r="http://schemas.openxmlformats.org/officeDocument/2006/relationships" xmlns:p="http://schemas.openxmlformats.org/presentationml/2006/main">
-  <p:cSld name="Slide 20">
-    <p:bg>
-      <p:bgPr>
-        <a:solidFill>
-          <a:srgbClr val="0F1117"/>
-        </a:solidFill>
-      </p:bgPr>
-    </p:bg>
-    <p:spTree>
-      <p:nvGrpSpPr>
-        <p:cNvPr id="1" name=""/>
-        <p:cNvGrpSpPr/>
-        <p:nvPr/>
-      </p:nvGrpSpPr>
-      <p:grpSpPr>
-        <a:xfrm>
-          <a:off x="0" y="0"/>
-          <a:ext cx="0" cy="0"/>
-          <a:chOff x="0" y="0"/>
-          <a:chExt cx="0" cy="0"/>
-        </a:xfrm>
-      </p:grpSpPr>
-      <p:sp>
-        <p:nvSpPr>
-          <p:cNvPr id="2" name="Text 0"/>
-          <p:cNvSpPr/>
-          <p:nvPr/>
-        </p:nvSpPr>
-        <p:spPr>
-          <a:xfrm>
-            <a:off x="365760" y="228600"/>
-            <a:ext cx="1097280" cy="274320"/>
-          </a:xfrm>
-          <a:prstGeom prst="rect">
-            <a:avLst/>
-          </a:prstGeom>
-          <a:noFill/>
-          <a:ln/>
-        </p:spPr>
-        <p:txBody>
-          <a:bodyPr wrap="square" rtlCol="0" anchor="ctr"/>
-          <a:lstStyle/>
-          <a:p>
-            <a:pPr indent="0" marL="0">
-              <a:buNone/>
-            </a:pPr>
-            <a:r>
-              <a:rPr lang="en-US" sz="1000" b="1" spc="400" kern="0" dirty="0">
-                <a:solidFill>
-                  <a:srgbClr val="B8FF4A"/>
-                </a:solidFill>
-                <a:latin typeface="Arial" pitchFamily="34" charset="0"/>
-                <a:ea typeface="Arial" pitchFamily="34" charset="-122"/>
-                <a:cs typeface="Arial" pitchFamily="34" charset="-120"/>
-              </a:rPr>
-              <a:t>NEBIUS</a:t>
-            </a:r>
-            <a:endParaRPr lang="en-US" sz="1000" dirty="0"/>
-          </a:p>
-        </p:txBody>
-      </p:sp>
-      <p:sp>
-        <p:nvSpPr>
-          <p:cNvPr id="3" name="Text 1"/>
-          <p:cNvSpPr/>
-          <p:nvPr/>
-        </p:nvSpPr>
-        <p:spPr>
-          <a:xfrm>
-            <a:off x="365760" y="4709160"/>
-            <a:ext cx="1097280" cy="274320"/>
-          </a:xfrm>
-          <a:prstGeom prst="rect">
-            <a:avLst/>
-          </a:prstGeom>
-          <a:noFill/>
-          <a:ln/>
-        </p:spPr>
-        <p:txBody>
-          <a:bodyPr wrap="square" rtlCol="0" anchor="ctr"/>
-          <a:lstStyle/>
-          <a:p>
-            <a:pPr indent="0" marL="0">
-              <a:buNone/>
-            </a:pPr>
-            <a:r>
-              <a:rPr lang="en-US" sz="900" dirty="0">
-                <a:solidFill>
-                  <a:srgbClr val="555555"/>
-                </a:solidFill>
-                <a:latin typeface="Arial" pitchFamily="34" charset="0"/>
-                <a:ea typeface="Arial" pitchFamily="34" charset="-122"/>
-                <a:cs typeface="Arial" pitchFamily="34" charset="-120"/>
-              </a:rPr>
-              <a:t>ClawCamp</a:t>
-            </a:r>
-            <a:endParaRPr lang="en-US" sz="900" dirty="0"/>
-          </a:p>
-        </p:txBody>
-      </p:sp>
-      <p:sp>
-        <p:nvSpPr>
-          <p:cNvPr id="4" name="Shape 2"/>
-          <p:cNvSpPr/>
-          <p:nvPr/>
-        </p:nvSpPr>
-        <p:spPr>
-          <a:xfrm>
-            <a:off x="0" y="4983480"/>
-            <a:ext cx="9144000" cy="164592"/>
-          </a:xfrm>
-          <a:prstGeom prst="rect">
-            <a:avLst/>
-          </a:prstGeom>
-          <a:solidFill>
-            <a:srgbClr val="B8FF4A"/>
-          </a:solidFill>
-          <a:ln/>
-        </p:spPr>
-      </p:sp>
-      <p:sp>
-        <p:nvSpPr>
-          <p:cNvPr id="5" name="Text 3"/>
-          <p:cNvSpPr/>
-          <p:nvPr/>
-        </p:nvSpPr>
-        <p:spPr>
-          <a:xfrm>
-            <a:off x="731520" y="640080"/>
-            <a:ext cx="7315200" cy="548640"/>
-          </a:xfrm>
-          <a:prstGeom prst="rect">
-            <a:avLst/>
-          </a:prstGeom>
-          <a:noFill/>
-          <a:ln/>
-        </p:spPr>
-        <p:txBody>
-          <a:bodyPr wrap="square" rtlCol="0" anchor="ctr"/>
-          <a:lstStyle/>
-          <a:p>
-            <a:pPr indent="0" marL="0">
-              <a:buNone/>
-            </a:pPr>
-            <a:r>
-              <a:rPr lang="en-US" sz="3200" b="1" dirty="0">
-                <a:solidFill>
-                  <a:srgbClr val="FFFFFF"/>
-                </a:solidFill>
-                <a:latin typeface="Arial" pitchFamily="34" charset="0"/>
-                <a:ea typeface="Arial" pitchFamily="34" charset="-122"/>
-                <a:cs typeface="Arial" pitchFamily="34" charset="-120"/>
-              </a:rPr>
               <a:t>Resources</a:t>
             </a:r>
             <a:endParaRPr lang="en-US" sz="3200" dirty="0"/>
@@ -11346,7 +10067,7 @@
       </p:sp>
       <p:graphicFrame>
         <p:nvGraphicFramePr>
-          <p:cNvPr id="21" name="Table 0"/>
+          <p:cNvPr id="20" name="Table 0"/>
           <p:cNvGraphicFramePr>
             <a:graphicFrameLocks noGrp="1"/>
           </p:cNvGraphicFramePr>
@@ -12078,282 +10799,6 @@
                           <a:ea typeface="Arial" pitchFamily="34" charset="-122"/>
                           <a:cs typeface="Arial" pitchFamily="34" charset="-120"/>
                         </a:rPr>
-                        <a:t>Agent Inference</a:t>
-                      </a:r>
-                      <a:endParaRPr lang="en-US" sz="900" dirty="0">
-                        <a:latin typeface="Arial" charset="0"/>
-                        <a:ea typeface="Arial" charset="0"/>
-                        <a:cs typeface="Arial" charset="0"/>
-                      </a:endParaRPr>
-                    </a:p>
-                  </a:txBody>
-                  <a:tcPr marL="91440" marR="91440" marT="45720" marB="45720">
-                    <a:lnL w="6350" cap="flat" cmpd="sng" algn="ctr">
-                      <a:solidFill>
-                        <a:srgbClr val="2A2D3E"/>
-                      </a:solidFill>
-                      <a:prstDash val="solid"/>
-                      <a:round/>
-                      <a:headEnd type="none" w="med" len="med"/>
-                      <a:tailEnd type="none" w="med" len="med"/>
-                    </a:lnL>
-                    <a:lnR w="6350" cap="flat" cmpd="sng" algn="ctr">
-                      <a:solidFill>
-                        <a:srgbClr val="2A2D3E"/>
-                      </a:solidFill>
-                      <a:prstDash val="solid"/>
-                      <a:round/>
-                      <a:headEnd type="none" w="med" len="med"/>
-                      <a:tailEnd type="none" w="med" len="med"/>
-                    </a:lnR>
-                    <a:lnT w="6350" cap="flat" cmpd="sng" algn="ctr">
-                      <a:solidFill>
-                        <a:srgbClr val="2A2D3E"/>
-                      </a:solidFill>
-                      <a:prstDash val="solid"/>
-                      <a:round/>
-                      <a:headEnd type="none" w="med" len="med"/>
-                      <a:tailEnd type="none" w="med" len="med"/>
-                    </a:lnT>
-                    <a:lnB w="6350" cap="flat" cmpd="sng" algn="ctr">
-                      <a:solidFill>
-                        <a:srgbClr val="2A2D3E"/>
-                      </a:solidFill>
-                      <a:prstDash val="solid"/>
-                      <a:round/>
-                      <a:headEnd type="none" w="med" len="med"/>
-                      <a:tailEnd type="none" w="med" len="med"/>
-                    </a:lnB>
-                    <a:solidFill>
-                      <a:srgbClr val="1A1D2E"/>
-                    </a:solidFill>
-                  </a:tcPr>
-                </a:tc>
-                <a:tc>
-                  <a:txBody>
-                    <a:bodyPr/>
-                    <a:lstStyle/>
-                    <a:p>
-                      <a:pPr indent="0" marL="0">
-                        <a:buNone/>
-                      </a:pPr>
-                      <a:r>
-                        <a:rPr lang="en-US" sz="900" dirty="0">
-                          <a:solidFill>
-                            <a:srgbClr val="FFFFFF"/>
-                          </a:solidFill>
-                          <a:latin typeface="Arial" pitchFamily="34" charset="0"/>
-                          <a:ea typeface="Arial" pitchFamily="34" charset="-122"/>
-                          <a:cs typeface="Arial" pitchFamily="34" charset="-120"/>
-                        </a:rPr>
-                        <a:t>claw.camp/curriculum/agent-inference</a:t>
-                      </a:r>
-                      <a:endParaRPr lang="en-US" sz="900" dirty="0">
-                        <a:latin typeface="Arial" charset="0"/>
-                        <a:ea typeface="Arial" charset="0"/>
-                        <a:cs typeface="Arial" charset="0"/>
-                      </a:endParaRPr>
-                    </a:p>
-                  </a:txBody>
-                  <a:tcPr marL="91440" marR="91440" marT="45720" marB="45720">
-                    <a:lnL w="6350" cap="flat" cmpd="sng" algn="ctr">
-                      <a:solidFill>
-                        <a:srgbClr val="2A2D3E"/>
-                      </a:solidFill>
-                      <a:prstDash val="solid"/>
-                      <a:round/>
-                      <a:headEnd type="none" w="med" len="med"/>
-                      <a:tailEnd type="none" w="med" len="med"/>
-                    </a:lnL>
-                    <a:lnR w="6350" cap="flat" cmpd="sng" algn="ctr">
-                      <a:solidFill>
-                        <a:srgbClr val="2A2D3E"/>
-                      </a:solidFill>
-                      <a:prstDash val="solid"/>
-                      <a:round/>
-                      <a:headEnd type="none" w="med" len="med"/>
-                      <a:tailEnd type="none" w="med" len="med"/>
-                    </a:lnR>
-                    <a:lnT w="6350" cap="flat" cmpd="sng" algn="ctr">
-                      <a:solidFill>
-                        <a:srgbClr val="2A2D3E"/>
-                      </a:solidFill>
-                      <a:prstDash val="solid"/>
-                      <a:round/>
-                      <a:headEnd type="none" w="med" len="med"/>
-                      <a:tailEnd type="none" w="med" len="med"/>
-                    </a:lnT>
-                    <a:lnB w="6350" cap="flat" cmpd="sng" algn="ctr">
-                      <a:solidFill>
-                        <a:srgbClr val="2A2D3E"/>
-                      </a:solidFill>
-                      <a:prstDash val="solid"/>
-                      <a:round/>
-                      <a:headEnd type="none" w="med" len="med"/>
-                      <a:tailEnd type="none" w="med" len="med"/>
-                    </a:lnB>
-                    <a:solidFill>
-                      <a:srgbClr val="1A1D2E"/>
-                    </a:solidFill>
-                  </a:tcPr>
-                </a:tc>
-              </a:tr>
-              <a:tr h="320040">
-                <a:tc>
-                  <a:txBody>
-                    <a:bodyPr/>
-                    <a:lstStyle/>
-                    <a:p>
-                      <a:pPr indent="0" marL="0">
-                        <a:buNone/>
-                      </a:pPr>
-                      <a:r>
-                        <a:rPr lang="en-US" sz="900" dirty="0">
-                          <a:solidFill>
-                            <a:srgbClr val="FFFFFF"/>
-                          </a:solidFill>
-                          <a:latin typeface="Arial" pitchFamily="34" charset="0"/>
-                          <a:ea typeface="Arial" pitchFamily="34" charset="-122"/>
-                          <a:cs typeface="Arial" pitchFamily="34" charset="-120"/>
-                        </a:rPr>
-                        <a:t>Deployment Patterns</a:t>
-                      </a:r>
-                      <a:endParaRPr lang="en-US" sz="900" dirty="0">
-                        <a:latin typeface="Arial" charset="0"/>
-                        <a:ea typeface="Arial" charset="0"/>
-                        <a:cs typeface="Arial" charset="0"/>
-                      </a:endParaRPr>
-                    </a:p>
-                  </a:txBody>
-                  <a:tcPr marL="91440" marR="91440" marT="45720" marB="45720">
-                    <a:lnL w="6350" cap="flat" cmpd="sng" algn="ctr">
-                      <a:solidFill>
-                        <a:srgbClr val="2A2D3E"/>
-                      </a:solidFill>
-                      <a:prstDash val="solid"/>
-                      <a:round/>
-                      <a:headEnd type="none" w="med" len="med"/>
-                      <a:tailEnd type="none" w="med" len="med"/>
-                    </a:lnL>
-                    <a:lnR w="6350" cap="flat" cmpd="sng" algn="ctr">
-                      <a:solidFill>
-                        <a:srgbClr val="2A2D3E"/>
-                      </a:solidFill>
-                      <a:prstDash val="solid"/>
-                      <a:round/>
-                      <a:headEnd type="none" w="med" len="med"/>
-                      <a:tailEnd type="none" w="med" len="med"/>
-                    </a:lnR>
-                    <a:lnT w="6350" cap="flat" cmpd="sng" algn="ctr">
-                      <a:solidFill>
-                        <a:srgbClr val="2A2D3E"/>
-                      </a:solidFill>
-                      <a:prstDash val="solid"/>
-                      <a:round/>
-                      <a:headEnd type="none" w="med" len="med"/>
-                      <a:tailEnd type="none" w="med" len="med"/>
-                    </a:lnT>
-                    <a:lnB w="6350" cap="flat" cmpd="sng" algn="ctr">
-                      <a:solidFill>
-                        <a:srgbClr val="2A2D3E"/>
-                      </a:solidFill>
-                      <a:prstDash val="solid"/>
-                      <a:round/>
-                      <a:headEnd type="none" w="med" len="med"/>
-                      <a:tailEnd type="none" w="med" len="med"/>
-                    </a:lnB>
-                    <a:solidFill>
-                      <a:srgbClr val="1A1D2E"/>
-                    </a:solidFill>
-                  </a:tcPr>
-                </a:tc>
-                <a:tc>
-                  <a:txBody>
-                    <a:bodyPr/>
-                    <a:lstStyle/>
-                    <a:p>
-                      <a:pPr indent="0" marL="0">
-                        <a:buNone/>
-                      </a:pPr>
-                      <a:r>
-                        <a:rPr lang="en-US" sz="900" dirty="0">
-                          <a:solidFill>
-                            <a:srgbClr val="FFFFFF"/>
-                          </a:solidFill>
-                          <a:latin typeface="Arial" pitchFamily="34" charset="0"/>
-                          <a:ea typeface="Arial" pitchFamily="34" charset="-122"/>
-                          <a:cs typeface="Arial" pitchFamily="34" charset="-120"/>
-                        </a:rPr>
-                        <a:t>claw.camp/curriculum/deploy-patterns</a:t>
-                      </a:r>
-                      <a:endParaRPr lang="en-US" sz="900" dirty="0">
-                        <a:latin typeface="Arial" charset="0"/>
-                        <a:ea typeface="Arial" charset="0"/>
-                        <a:cs typeface="Arial" charset="0"/>
-                      </a:endParaRPr>
-                    </a:p>
-                  </a:txBody>
-                  <a:tcPr marL="91440" marR="91440" marT="45720" marB="45720">
-                    <a:lnL w="6350" cap="flat" cmpd="sng" algn="ctr">
-                      <a:solidFill>
-                        <a:srgbClr val="2A2D3E"/>
-                      </a:solidFill>
-                      <a:prstDash val="solid"/>
-                      <a:round/>
-                      <a:headEnd type="none" w="med" len="med"/>
-                      <a:tailEnd type="none" w="med" len="med"/>
-                    </a:lnL>
-                    <a:lnR w="6350" cap="flat" cmpd="sng" algn="ctr">
-                      <a:solidFill>
-                        <a:srgbClr val="2A2D3E"/>
-                      </a:solidFill>
-                      <a:prstDash val="solid"/>
-                      <a:round/>
-                      <a:headEnd type="none" w="med" len="med"/>
-                      <a:tailEnd type="none" w="med" len="med"/>
-                    </a:lnR>
-                    <a:lnT w="6350" cap="flat" cmpd="sng" algn="ctr">
-                      <a:solidFill>
-                        <a:srgbClr val="2A2D3E"/>
-                      </a:solidFill>
-                      <a:prstDash val="solid"/>
-                      <a:round/>
-                      <a:headEnd type="none" w="med" len="med"/>
-                      <a:tailEnd type="none" w="med" len="med"/>
-                    </a:lnT>
-                    <a:lnB w="6350" cap="flat" cmpd="sng" algn="ctr">
-                      <a:solidFill>
-                        <a:srgbClr val="2A2D3E"/>
-                      </a:solidFill>
-                      <a:prstDash val="solid"/>
-                      <a:round/>
-                      <a:headEnd type="none" w="med" len="med"/>
-                      <a:tailEnd type="none" w="med" len="med"/>
-                    </a:lnB>
-                    <a:solidFill>
-                      <a:srgbClr val="1A1D2E"/>
-                    </a:solidFill>
-                  </a:tcPr>
-                </a:tc>
-              </a:tr>
-              <a:tr h="320040">
-                <a:tc>
-                  <a:txBody>
-                    <a:bodyPr/>
-                    <a:lstStyle/>
-                    <a:p>
-                      <a:pPr indent="0" marL="0">
-                        <a:buNone/>
-                      </a:pPr>
-                      <a:r>
-                        <a:rPr lang="en-US" sz="900" dirty="0">
-                          <a:solidFill>
-                            <a:srgbClr val="FFFFFF"/>
-                          </a:solidFill>
-                          <a:latin typeface="Arial" pitchFamily="34" charset="0"/>
-                          <a:ea typeface="Arial" pitchFamily="34" charset="-122"/>
-                          <a:cs typeface="Arial" pitchFamily="34" charset="-120"/>
-                        </a:rPr>
                         <a:t>Discord</a:t>
                       </a:r>
                       <a:endParaRPr lang="en-US" sz="900" dirty="0">
@@ -12486,9 +10931,9 @@
 </p:sld>
 </file>
 
-<file path=ppt/slides/slide21.xml><?xml version="1.0" encoding="utf-8"?>
+<file path=ppt/slides/slide2.xml><?xml version="1.0" encoding="utf-8"?>
 <p:sld xmlns:a="http://schemas.openxmlformats.org/drawingml/2006/main" xmlns:r="http://schemas.openxmlformats.org/officeDocument/2006/relationships" xmlns:p="http://schemas.openxmlformats.org/presentationml/2006/main">
-  <p:cSld name="Slide 21">
+  <p:cSld name="Slide 2">
     <p:bg>
       <p:bgPr>
         <a:solidFill>
@@ -12641,7 +11086,7 @@
                 <a:ea typeface="Arial" pitchFamily="34" charset="-122"/>
                 <a:cs typeface="Arial" pitchFamily="34" charset="-120"/>
               </a:rPr>
-              <a:t>Next Steps</a:t>
+              <a:t>The Problem</a:t>
             </a:r>
             <a:endParaRPr lang="en-US" sz="3200" dirty="0"/>
           </a:p>
@@ -12649,36 +11094,14 @@
       </p:sp>
       <p:sp>
         <p:nvSpPr>
-          <p:cNvPr id="6" name="Shape 4"/>
+          <p:cNvPr id="6" name="Text 4"/>
           <p:cNvSpPr/>
           <p:nvPr/>
         </p:nvSpPr>
         <p:spPr>
           <a:xfrm>
-            <a:off x="457200" y="1371600"/>
-            <a:ext cx="2743200" cy="2560320"/>
-          </a:xfrm>
-          <a:prstGeom prst="roundRect">
-            <a:avLst>
-              <a:gd name="adj" fmla="val 2857"/>
-            </a:avLst>
-          </a:prstGeom>
-          <a:solidFill>
-            <a:srgbClr val="1A1D2E"/>
-          </a:solidFill>
-          <a:ln/>
-        </p:spPr>
-      </p:sp>
-      <p:sp>
-        <p:nvSpPr>
-          <p:cNvPr id="7" name="Text 5"/>
-          <p:cNvSpPr/>
-          <p:nvPr/>
-        </p:nvSpPr>
-        <p:spPr>
-          <a:xfrm>
-            <a:off x="457200" y="1417320"/>
-            <a:ext cx="2743200" cy="320040"/>
+            <a:off x="731520" y="1280160"/>
+            <a:ext cx="6400800" cy="365760"/>
           </a:xfrm>
           <a:prstGeom prst="rect">
             <a:avLst/>
@@ -12690,11 +11113,11 @@
           <a:bodyPr wrap="square" rtlCol="0" anchor="ctr"/>
           <a:lstStyle/>
           <a:p>
-            <a:pPr algn="ctr" indent="0" marL="0">
+            <a:pPr indent="0" marL="0">
               <a:buNone/>
             </a:pPr>
             <a:r>
-              <a:rPr lang="en-US" sz="1400" b="1" dirty="0">
+              <a:rPr lang="en-US" sz="1600" dirty="0">
                 <a:solidFill>
                   <a:srgbClr val="B8FF4A"/>
                 </a:solidFill>
@@ -12702,22 +11125,22 @@
                 <a:ea typeface="Arial" pitchFamily="34" charset="-122"/>
                 <a:cs typeface="Arial" pitchFamily="34" charset="-120"/>
               </a:rPr>
-              <a:t>Beginner</a:t>
-            </a:r>
-            <a:endParaRPr lang="en-US" sz="1400" dirty="0"/>
+              <a:t>Running AI agents is expensive and complicated</a:t>
+            </a:r>
+            <a:endParaRPr lang="en-US" sz="1600" dirty="0"/>
           </a:p>
         </p:txBody>
       </p:sp>
       <p:sp>
         <p:nvSpPr>
-          <p:cNvPr id="8" name="Text 6"/>
+          <p:cNvPr id="7" name="Text 5"/>
           <p:cNvSpPr/>
           <p:nvPr/>
         </p:nvSpPr>
         <p:spPr>
           <a:xfrm>
-            <a:off x="640080" y="1828800"/>
-            <a:ext cx="2377440" cy="1828800"/>
+            <a:off x="731520" y="1828800"/>
+            <a:ext cx="6400800" cy="1828800"/>
           </a:xfrm>
           <a:prstGeom prst="rect">
             <a:avLst/>
@@ -12730,11 +11153,14 @@
           <a:lstStyle/>
           <a:p>
             <a:pPr marL="342900" indent="-342900">
+              <a:spcAft>
+                <a:spcPts val="800"/>
+              </a:spcAft>
               <a:buSzPct val="100000"/>
               <a:buChar char="•"/>
             </a:pPr>
             <a:r>
-              <a:rPr lang="en-US" sz="1000" dirty="0">
+              <a:rPr lang="en-US" sz="1400" dirty="0">
                 <a:solidFill>
                   <a:srgbClr val="9CA3AF"/>
                 </a:solidFill>
@@ -12742,17 +11168,20 @@
                 <a:ea typeface="Arial" pitchFamily="34" charset="-122"/>
                 <a:cs typeface="Arial" pitchFamily="34" charset="-120"/>
               </a:rPr>
-              <a:t>Deploy via Web Console (20 min)</a:t>
-            </a:r>
-            <a:endParaRPr lang="en-US" sz="1000" dirty="0"/>
+              <a:t>A Mac Mini for local inference: $1,000+</a:t>
+            </a:r>
+            <a:endParaRPr lang="en-US" sz="1400" dirty="0"/>
           </a:p>
           <a:p>
             <a:pPr marL="342900" indent="-342900">
+              <a:spcAft>
+                <a:spcPts val="800"/>
+              </a:spcAft>
               <a:buSzPct val="100000"/>
               <a:buChar char="•"/>
             </a:pPr>
             <a:r>
-              <a:rPr lang="en-US" sz="1000" dirty="0">
+              <a:rPr lang="en-US" sz="1400" dirty="0">
                 <a:solidFill>
                   <a:srgbClr val="9CA3AF"/>
                 </a:solidFill>
@@ -12760,44 +11189,64 @@
                 <a:ea typeface="Arial" pitchFamily="34" charset="-122"/>
                 <a:cs typeface="Arial" pitchFamily="34" charset="-120"/>
               </a:rPr>
-              <a:t>Deploy with Install Scripts (15 min)</a:t>
-            </a:r>
-            <a:endParaRPr lang="en-US" sz="1000" dirty="0"/>
+              <a:t>Exposes your home network</a:t>
+            </a:r>
+            <a:endParaRPr lang="en-US" sz="1400" dirty="0"/>
+          </a:p>
+          <a:p>
+            <a:pPr marL="342900" indent="-342900">
+              <a:spcAft>
+                <a:spcPts val="800"/>
+              </a:spcAft>
+              <a:buSzPct val="100000"/>
+              <a:buChar char="•"/>
+            </a:pPr>
+            <a:r>
+              <a:rPr lang="en-US" sz="1400" dirty="0">
+                <a:solidFill>
+                  <a:srgbClr val="9CA3AF"/>
+                </a:solidFill>
+                <a:latin typeface="Arial" pitchFamily="34" charset="0"/>
+                <a:ea typeface="Arial" pitchFamily="34" charset="-122"/>
+                <a:cs typeface="Arial" pitchFamily="34" charset="-120"/>
+              </a:rPr>
+              <a:t>Runs ONE agent at a time</a:t>
+            </a:r>
+            <a:endParaRPr lang="en-US" sz="1400" dirty="0"/>
+          </a:p>
+          <a:p>
+            <a:pPr marL="342900" indent="-342900">
+              <a:spcAft>
+                <a:spcPts val="800"/>
+              </a:spcAft>
+              <a:buSzPct val="100000"/>
+              <a:buChar char="•"/>
+            </a:pPr>
+            <a:r>
+              <a:rPr lang="en-US" sz="1400" dirty="0">
+                <a:solidFill>
+                  <a:srgbClr val="9CA3AF"/>
+                </a:solidFill>
+                <a:latin typeface="Arial" pitchFamily="34" charset="0"/>
+                <a:ea typeface="Arial" pitchFamily="34" charset="-122"/>
+                <a:cs typeface="Arial" pitchFamily="34" charset="-120"/>
+              </a:rPr>
+              <a:t>No scaling, no redundancy, no sleep</a:t>
+            </a:r>
+            <a:endParaRPr lang="en-US" sz="1400" dirty="0"/>
           </a:p>
         </p:txBody>
       </p:sp>
       <p:sp>
         <p:nvSpPr>
-          <p:cNvPr id="9" name="Shape 7"/>
+          <p:cNvPr id="8" name="Text 6"/>
           <p:cNvSpPr/>
           <p:nvPr/>
         </p:nvSpPr>
         <p:spPr>
           <a:xfrm>
-            <a:off x="3383280" y="1371600"/>
-            <a:ext cx="2743200" cy="2560320"/>
-          </a:xfrm>
-          <a:prstGeom prst="roundRect">
-            <a:avLst>
-              <a:gd name="adj" fmla="val 2857"/>
-            </a:avLst>
-          </a:prstGeom>
-          <a:solidFill>
-            <a:srgbClr val="1A1D2E"/>
-          </a:solidFill>
-          <a:ln/>
-        </p:spPr>
-      </p:sp>
-      <p:sp>
-        <p:nvSpPr>
-          <p:cNvPr id="10" name="Text 8"/>
-          <p:cNvSpPr/>
-          <p:nvPr/>
-        </p:nvSpPr>
-        <p:spPr>
-          <a:xfrm>
-            <a:off x="3383280" y="1417320"/>
-            <a:ext cx="2743200" cy="320040"/>
+            <a:off x="731520" y="3840480"/>
+            <a:ext cx="7315200" cy="457200"/>
           </a:xfrm>
           <a:prstGeom prst="rect">
             <a:avLst/>
@@ -12809,34 +11258,66 @@
           <a:bodyPr wrap="square" rtlCol="0" anchor="ctr"/>
           <a:lstStyle/>
           <a:p>
-            <a:pPr algn="ctr" indent="0" marL="0">
+            <a:pPr indent="0" marL="0">
               <a:buNone/>
             </a:pPr>
             <a:r>
-              <a:rPr lang="en-US" sz="1400" b="1" dirty="0">
-                <a:solidFill>
-                  <a:srgbClr val="B8FF4A"/>
+              <a:rPr lang="en-US" sz="1600" b="1" dirty="0">
+                <a:solidFill>
+                  <a:srgbClr val="FFFFFF"/>
                 </a:solidFill>
                 <a:latin typeface="Arial" pitchFamily="34" charset="0"/>
                 <a:ea typeface="Arial" pitchFamily="34" charset="-122"/>
                 <a:cs typeface="Arial" pitchFamily="34" charset="-120"/>
               </a:rPr>
-              <a:t>Intermediate</a:t>
-            </a:r>
-            <a:endParaRPr lang="en-US" sz="1400" dirty="0"/>
+              <a:t>What if you could run 100 agents for the cost of one Mac Mini?</a:t>
+            </a:r>
+            <a:endParaRPr lang="en-US" sz="1600" dirty="0"/>
           </a:p>
         </p:txBody>
       </p:sp>
-      <p:sp>
-        <p:nvSpPr>
-          <p:cNvPr id="11" name="Text 9"/>
+    </p:spTree>
+  </p:cSld>
+  <p:clrMapOvr>
+    <a:masterClrMapping/>
+  </p:clrMapOvr>
+</p:sld>
+</file>
+
+<file path=ppt/slides/slide20.xml><?xml version="1.0" encoding="utf-8"?>
+<p:sld xmlns:a="http://schemas.openxmlformats.org/drawingml/2006/main" xmlns:r="http://schemas.openxmlformats.org/officeDocument/2006/relationships" xmlns:p="http://schemas.openxmlformats.org/presentationml/2006/main">
+  <p:cSld name="Slide 20">
+    <p:bg>
+      <p:bgPr>
+        <a:solidFill>
+          <a:srgbClr val="0F1117"/>
+        </a:solidFill>
+      </p:bgPr>
+    </p:bg>
+    <p:spTree>
+      <p:nvGrpSpPr>
+        <p:cNvPr id="1" name=""/>
+        <p:cNvGrpSpPr/>
+        <p:nvPr/>
+      </p:nvGrpSpPr>
+      <p:grpSpPr>
+        <a:xfrm>
+          <a:off x="0" y="0"/>
+          <a:ext cx="0" cy="0"/>
+          <a:chOff x="0" y="0"/>
+          <a:chExt cx="0" cy="0"/>
+        </a:xfrm>
+      </p:grpSpPr>
+      <p:sp>
+        <p:nvSpPr>
+          <p:cNvPr id="2" name="Text 0"/>
           <p:cNvSpPr/>
           <p:nvPr/>
         </p:nvSpPr>
         <p:spPr>
           <a:xfrm>
-            <a:off x="3566160" y="1828800"/>
-            <a:ext cx="2377440" cy="1828800"/>
+            <a:off x="365760" y="228600"/>
+            <a:ext cx="1097280" cy="274320"/>
           </a:xfrm>
           <a:prstGeom prst="rect">
             <a:avLst/>
@@ -12848,75 +11329,34 @@
           <a:bodyPr wrap="square" rtlCol="0" anchor="ctr"/>
           <a:lstStyle/>
           <a:p>
-            <a:pPr marL="342900" indent="-342900">
-              <a:buSzPct val="100000"/>
-              <a:buChar char="•"/>
-            </a:pPr>
-            <a:r>
-              <a:rPr lang="en-US" sz="1000" dirty="0">
-                <a:solidFill>
-                  <a:srgbClr val="9CA3AF"/>
+            <a:pPr indent="0" marL="0">
+              <a:buNone/>
+            </a:pPr>
+            <a:r>
+              <a:rPr lang="en-US" sz="1000" b="1" spc="400" kern="0" dirty="0">
+                <a:solidFill>
+                  <a:srgbClr val="B8FF4A"/>
                 </a:solidFill>
                 <a:latin typeface="Arial" pitchFamily="34" charset="0"/>
                 <a:ea typeface="Arial" pitchFamily="34" charset="-122"/>
                 <a:cs typeface="Arial" pitchFamily="34" charset="-120"/>
               </a:rPr>
-              <a:t>Deployment Patterns (45 min)</a:t>
+              <a:t>NEBIUS</a:t>
             </a:r>
             <a:endParaRPr lang="en-US" sz="1000" dirty="0"/>
           </a:p>
-          <a:p>
-            <a:pPr marL="342900" indent="-342900">
-              <a:buSzPct val="100000"/>
-              <a:buChar char="•"/>
-            </a:pPr>
-            <a:r>
-              <a:rPr lang="en-US" sz="1000" dirty="0">
-                <a:solidFill>
-                  <a:srgbClr val="9CA3AF"/>
-                </a:solidFill>
-                <a:latin typeface="Arial" pitchFamily="34" charset="0"/>
-                <a:ea typeface="Arial" pitchFamily="34" charset="-122"/>
-                <a:cs typeface="Arial" pitchFamily="34" charset="-120"/>
-              </a:rPr>
-              <a:t>Private Agents (55 min)</a:t>
-            </a:r>
-            <a:endParaRPr lang="en-US" sz="1000" dirty="0"/>
-          </a:p>
         </p:txBody>
       </p:sp>
       <p:sp>
         <p:nvSpPr>
-          <p:cNvPr id="12" name="Shape 10"/>
+          <p:cNvPr id="3" name="Text 1"/>
           <p:cNvSpPr/>
           <p:nvPr/>
         </p:nvSpPr>
         <p:spPr>
           <a:xfrm>
-            <a:off x="6309360" y="1371600"/>
-            <a:ext cx="2743200" cy="2560320"/>
-          </a:xfrm>
-          <a:prstGeom prst="roundRect">
-            <a:avLst>
-              <a:gd name="adj" fmla="val 2857"/>
-            </a:avLst>
-          </a:prstGeom>
-          <a:solidFill>
-            <a:srgbClr val="1A1D2E"/>
-          </a:solidFill>
-          <a:ln/>
-        </p:spPr>
-      </p:sp>
-      <p:sp>
-        <p:nvSpPr>
-          <p:cNvPr id="13" name="Text 11"/>
-          <p:cNvSpPr/>
-          <p:nvPr/>
-        </p:nvSpPr>
-        <p:spPr>
-          <a:xfrm>
-            <a:off x="6309360" y="1417320"/>
-            <a:ext cx="2743200" cy="320040"/>
+            <a:off x="365760" y="4709160"/>
+            <a:ext cx="1097280" cy="274320"/>
           </a:xfrm>
           <a:prstGeom prst="rect">
             <a:avLst/>
@@ -12928,34 +11368,54 @@
           <a:bodyPr wrap="square" rtlCol="0" anchor="ctr"/>
           <a:lstStyle/>
           <a:p>
-            <a:pPr algn="ctr" indent="0" marL="0">
+            <a:pPr indent="0" marL="0">
               <a:buNone/>
             </a:pPr>
             <a:r>
-              <a:rPr lang="en-US" sz="1400" b="1" dirty="0">
-                <a:solidFill>
-                  <a:srgbClr val="B8FF4A"/>
+              <a:rPr lang="en-US" sz="900" dirty="0">
+                <a:solidFill>
+                  <a:srgbClr val="555555"/>
                 </a:solidFill>
                 <a:latin typeface="Arial" pitchFamily="34" charset="0"/>
                 <a:ea typeface="Arial" pitchFamily="34" charset="-122"/>
                 <a:cs typeface="Arial" pitchFamily="34" charset="-120"/>
               </a:rPr>
-              <a:t>Advanced</a:t>
-            </a:r>
-            <a:endParaRPr lang="en-US" sz="1400" dirty="0"/>
+              <a:t>ClawCamp</a:t>
+            </a:r>
+            <a:endParaRPr lang="en-US" sz="900" dirty="0"/>
           </a:p>
         </p:txBody>
       </p:sp>
       <p:sp>
         <p:nvSpPr>
-          <p:cNvPr id="14" name="Text 12"/>
+          <p:cNvPr id="4" name="Shape 2"/>
           <p:cNvSpPr/>
           <p:nvPr/>
         </p:nvSpPr>
         <p:spPr>
           <a:xfrm>
-            <a:off x="6492240" y="1828800"/>
-            <a:ext cx="2377440" cy="1828800"/>
+            <a:off x="0" y="4983480"/>
+            <a:ext cx="9144000" cy="164592"/>
+          </a:xfrm>
+          <a:prstGeom prst="rect">
+            <a:avLst/>
+          </a:prstGeom>
+          <a:solidFill>
+            <a:srgbClr val="B8FF4A"/>
+          </a:solidFill>
+          <a:ln/>
+        </p:spPr>
+      </p:sp>
+      <p:sp>
+        <p:nvSpPr>
+          <p:cNvPr id="5" name="Text 3"/>
+          <p:cNvSpPr/>
+          <p:nvPr/>
+        </p:nvSpPr>
+        <p:spPr>
+          <a:xfrm>
+            <a:off x="731520" y="640080"/>
+            <a:ext cx="7315200" cy="548640"/>
           </a:xfrm>
           <a:prstGeom prst="rect">
             <a:avLst/>
@@ -12967,6 +11427,106 @@
           <a:bodyPr wrap="square" rtlCol="0" anchor="ctr"/>
           <a:lstStyle/>
           <a:p>
+            <a:pPr indent="0" marL="0">
+              <a:buNone/>
+            </a:pPr>
+            <a:r>
+              <a:rPr lang="en-US" sz="3200" b="1" dirty="0">
+                <a:solidFill>
+                  <a:srgbClr val="FFFFFF"/>
+                </a:solidFill>
+                <a:latin typeface="Arial" pitchFamily="34" charset="0"/>
+                <a:ea typeface="Arial" pitchFamily="34" charset="-122"/>
+                <a:cs typeface="Arial" pitchFamily="34" charset="-120"/>
+              </a:rPr>
+              <a:t>Next Steps</a:t>
+            </a:r>
+            <a:endParaRPr lang="en-US" sz="3200" dirty="0"/>
+          </a:p>
+        </p:txBody>
+      </p:sp>
+      <p:sp>
+        <p:nvSpPr>
+          <p:cNvPr id="6" name="Shape 4"/>
+          <p:cNvSpPr/>
+          <p:nvPr/>
+        </p:nvSpPr>
+        <p:spPr>
+          <a:xfrm>
+            <a:off x="457200" y="1371600"/>
+            <a:ext cx="2651760" cy="2286000"/>
+          </a:xfrm>
+          <a:prstGeom prst="roundRect">
+            <a:avLst>
+              <a:gd name="adj" fmla="val 3200"/>
+            </a:avLst>
+          </a:prstGeom>
+          <a:solidFill>
+            <a:srgbClr val="1A1D2E"/>
+          </a:solidFill>
+          <a:ln/>
+        </p:spPr>
+      </p:sp>
+      <p:sp>
+        <p:nvSpPr>
+          <p:cNvPr id="7" name="Text 5"/>
+          <p:cNvSpPr/>
+          <p:nvPr/>
+        </p:nvSpPr>
+        <p:spPr>
+          <a:xfrm>
+            <a:off x="457200" y="1417320"/>
+            <a:ext cx="2651760" cy="320040"/>
+          </a:xfrm>
+          <a:prstGeom prst="rect">
+            <a:avLst/>
+          </a:prstGeom>
+          <a:noFill/>
+          <a:ln/>
+        </p:spPr>
+        <p:txBody>
+          <a:bodyPr wrap="square" rtlCol="0" anchor="ctr"/>
+          <a:lstStyle/>
+          <a:p>
+            <a:pPr algn="ctr" indent="0" marL="0">
+              <a:buNone/>
+            </a:pPr>
+            <a:r>
+              <a:rPr lang="en-US" sz="1400" b="1" dirty="0">
+                <a:solidFill>
+                  <a:srgbClr val="B8FF4A"/>
+                </a:solidFill>
+                <a:latin typeface="Arial" pitchFamily="34" charset="0"/>
+                <a:ea typeface="Arial" pitchFamily="34" charset="-122"/>
+                <a:cs typeface="Arial" pitchFamily="34" charset="-120"/>
+              </a:rPr>
+              <a:t>Beginner</a:t>
+            </a:r>
+            <a:endParaRPr lang="en-US" sz="1400" dirty="0"/>
+          </a:p>
+        </p:txBody>
+      </p:sp>
+      <p:sp>
+        <p:nvSpPr>
+          <p:cNvPr id="8" name="Text 6"/>
+          <p:cNvSpPr/>
+          <p:nvPr/>
+        </p:nvSpPr>
+        <p:spPr>
+          <a:xfrm>
+            <a:off x="640080" y="1828800"/>
+            <a:ext cx="2286000" cy="1645920"/>
+          </a:xfrm>
+          <a:prstGeom prst="rect">
+            <a:avLst/>
+          </a:prstGeom>
+          <a:noFill/>
+          <a:ln/>
+        </p:spPr>
+        <p:txBody>
+          <a:bodyPr wrap="square" rtlCol="0" anchor="ctr"/>
+          <a:lstStyle/>
+          <a:p>
             <a:pPr marL="342900" indent="-342900">
               <a:buSzPct val="100000"/>
               <a:buChar char="•"/>
@@ -12980,7 +11540,7 @@
                 <a:ea typeface="Arial" pitchFamily="34" charset="-122"/>
                 <a:cs typeface="Arial" pitchFamily="34" charset="-120"/>
               </a:rPr>
-              <a:t>Agent Lifecycle (70 min)</a:t>
+              <a:t>Deploy via Console (20m)</a:t>
             </a:r>
             <a:endParaRPr lang="en-US" sz="1000" dirty="0"/>
           </a:p>
@@ -12998,7 +11558,245 @@
                 <a:ea typeface="Arial" pitchFamily="34" charset="-122"/>
                 <a:cs typeface="Arial" pitchFamily="34" charset="-120"/>
               </a:rPr>
-              <a:t>Robotics with Solo CLI (75 min)</a:t>
+              <a:t>Install Scripts (15m)</a:t>
+            </a:r>
+            <a:endParaRPr lang="en-US" sz="1000" dirty="0"/>
+          </a:p>
+        </p:txBody>
+      </p:sp>
+      <p:sp>
+        <p:nvSpPr>
+          <p:cNvPr id="9" name="Shape 7"/>
+          <p:cNvSpPr/>
+          <p:nvPr/>
+        </p:nvSpPr>
+        <p:spPr>
+          <a:xfrm>
+            <a:off x="3383280" y="1371600"/>
+            <a:ext cx="2651760" cy="2286000"/>
+          </a:xfrm>
+          <a:prstGeom prst="roundRect">
+            <a:avLst>
+              <a:gd name="adj" fmla="val 3200"/>
+            </a:avLst>
+          </a:prstGeom>
+          <a:solidFill>
+            <a:srgbClr val="1A1D2E"/>
+          </a:solidFill>
+          <a:ln/>
+        </p:spPr>
+      </p:sp>
+      <p:sp>
+        <p:nvSpPr>
+          <p:cNvPr id="10" name="Text 8"/>
+          <p:cNvSpPr/>
+          <p:nvPr/>
+        </p:nvSpPr>
+        <p:spPr>
+          <a:xfrm>
+            <a:off x="3383280" y="1417320"/>
+            <a:ext cx="2651760" cy="320040"/>
+          </a:xfrm>
+          <a:prstGeom prst="rect">
+            <a:avLst/>
+          </a:prstGeom>
+          <a:noFill/>
+          <a:ln/>
+        </p:spPr>
+        <p:txBody>
+          <a:bodyPr wrap="square" rtlCol="0" anchor="ctr"/>
+          <a:lstStyle/>
+          <a:p>
+            <a:pPr algn="ctr" indent="0" marL="0">
+              <a:buNone/>
+            </a:pPr>
+            <a:r>
+              <a:rPr lang="en-US" sz="1400" b="1" dirty="0">
+                <a:solidFill>
+                  <a:srgbClr val="B8FF4A"/>
+                </a:solidFill>
+                <a:latin typeface="Arial" pitchFamily="34" charset="0"/>
+                <a:ea typeface="Arial" pitchFamily="34" charset="-122"/>
+                <a:cs typeface="Arial" pitchFamily="34" charset="-120"/>
+              </a:rPr>
+              <a:t>Intermediate</a:t>
+            </a:r>
+            <a:endParaRPr lang="en-US" sz="1400" dirty="0"/>
+          </a:p>
+        </p:txBody>
+      </p:sp>
+      <p:sp>
+        <p:nvSpPr>
+          <p:cNvPr id="11" name="Text 9"/>
+          <p:cNvSpPr/>
+          <p:nvPr/>
+        </p:nvSpPr>
+        <p:spPr>
+          <a:xfrm>
+            <a:off x="3566160" y="1828800"/>
+            <a:ext cx="2286000" cy="1645920"/>
+          </a:xfrm>
+          <a:prstGeom prst="rect">
+            <a:avLst/>
+          </a:prstGeom>
+          <a:noFill/>
+          <a:ln/>
+        </p:spPr>
+        <p:txBody>
+          <a:bodyPr wrap="square" rtlCol="0" anchor="ctr"/>
+          <a:lstStyle/>
+          <a:p>
+            <a:pPr marL="342900" indent="-342900">
+              <a:buSzPct val="100000"/>
+              <a:buChar char="•"/>
+            </a:pPr>
+            <a:r>
+              <a:rPr lang="en-US" sz="1000" dirty="0">
+                <a:solidFill>
+                  <a:srgbClr val="9CA3AF"/>
+                </a:solidFill>
+                <a:latin typeface="Arial" pitchFamily="34" charset="0"/>
+                <a:ea typeface="Arial" pitchFamily="34" charset="-122"/>
+                <a:cs typeface="Arial" pitchFamily="34" charset="-120"/>
+              </a:rPr>
+              <a:t>Deploy Patterns (45m)</a:t>
+            </a:r>
+            <a:endParaRPr lang="en-US" sz="1000" dirty="0"/>
+          </a:p>
+          <a:p>
+            <a:pPr marL="342900" indent="-342900">
+              <a:buSzPct val="100000"/>
+              <a:buChar char="•"/>
+            </a:pPr>
+            <a:r>
+              <a:rPr lang="en-US" sz="1000" dirty="0">
+                <a:solidFill>
+                  <a:srgbClr val="9CA3AF"/>
+                </a:solidFill>
+                <a:latin typeface="Arial" pitchFamily="34" charset="0"/>
+                <a:ea typeface="Arial" pitchFamily="34" charset="-122"/>
+                <a:cs typeface="Arial" pitchFamily="34" charset="-120"/>
+              </a:rPr>
+              <a:t>Private Agents (55m)</a:t>
+            </a:r>
+            <a:endParaRPr lang="en-US" sz="1000" dirty="0"/>
+          </a:p>
+        </p:txBody>
+      </p:sp>
+      <p:sp>
+        <p:nvSpPr>
+          <p:cNvPr id="12" name="Shape 10"/>
+          <p:cNvSpPr/>
+          <p:nvPr/>
+        </p:nvSpPr>
+        <p:spPr>
+          <a:xfrm>
+            <a:off x="6309360" y="1371600"/>
+            <a:ext cx="2651760" cy="2286000"/>
+          </a:xfrm>
+          <a:prstGeom prst="roundRect">
+            <a:avLst>
+              <a:gd name="adj" fmla="val 3200"/>
+            </a:avLst>
+          </a:prstGeom>
+          <a:solidFill>
+            <a:srgbClr val="1A1D2E"/>
+          </a:solidFill>
+          <a:ln/>
+        </p:spPr>
+      </p:sp>
+      <p:sp>
+        <p:nvSpPr>
+          <p:cNvPr id="13" name="Text 11"/>
+          <p:cNvSpPr/>
+          <p:nvPr/>
+        </p:nvSpPr>
+        <p:spPr>
+          <a:xfrm>
+            <a:off x="6309360" y="1417320"/>
+            <a:ext cx="2651760" cy="320040"/>
+          </a:xfrm>
+          <a:prstGeom prst="rect">
+            <a:avLst/>
+          </a:prstGeom>
+          <a:noFill/>
+          <a:ln/>
+        </p:spPr>
+        <p:txBody>
+          <a:bodyPr wrap="square" rtlCol="0" anchor="ctr"/>
+          <a:lstStyle/>
+          <a:p>
+            <a:pPr algn="ctr" indent="0" marL="0">
+              <a:buNone/>
+            </a:pPr>
+            <a:r>
+              <a:rPr lang="en-US" sz="1400" b="1" dirty="0">
+                <a:solidFill>
+                  <a:srgbClr val="B8FF4A"/>
+                </a:solidFill>
+                <a:latin typeface="Arial" pitchFamily="34" charset="0"/>
+                <a:ea typeface="Arial" pitchFamily="34" charset="-122"/>
+                <a:cs typeface="Arial" pitchFamily="34" charset="-120"/>
+              </a:rPr>
+              <a:t>Advanced</a:t>
+            </a:r>
+            <a:endParaRPr lang="en-US" sz="1400" dirty="0"/>
+          </a:p>
+        </p:txBody>
+      </p:sp>
+      <p:sp>
+        <p:nvSpPr>
+          <p:cNvPr id="14" name="Text 12"/>
+          <p:cNvSpPr/>
+          <p:nvPr/>
+        </p:nvSpPr>
+        <p:spPr>
+          <a:xfrm>
+            <a:off x="6492240" y="1828800"/>
+            <a:ext cx="2286000" cy="1645920"/>
+          </a:xfrm>
+          <a:prstGeom prst="rect">
+            <a:avLst/>
+          </a:prstGeom>
+          <a:noFill/>
+          <a:ln/>
+        </p:spPr>
+        <p:txBody>
+          <a:bodyPr wrap="square" rtlCol="0" anchor="ctr"/>
+          <a:lstStyle/>
+          <a:p>
+            <a:pPr marL="342900" indent="-342900">
+              <a:buSzPct val="100000"/>
+              <a:buChar char="•"/>
+            </a:pPr>
+            <a:r>
+              <a:rPr lang="en-US" sz="1000" dirty="0">
+                <a:solidFill>
+                  <a:srgbClr val="9CA3AF"/>
+                </a:solidFill>
+                <a:latin typeface="Arial" pitchFamily="34" charset="0"/>
+                <a:ea typeface="Arial" pitchFamily="34" charset="-122"/>
+                <a:cs typeface="Arial" pitchFamily="34" charset="-120"/>
+              </a:rPr>
+              <a:t>Agent Lifecycle (70m)</a:t>
+            </a:r>
+            <a:endParaRPr lang="en-US" sz="1000" dirty="0"/>
+          </a:p>
+          <a:p>
+            <a:pPr marL="342900" indent="-342900">
+              <a:buSzPct val="100000"/>
+              <a:buChar char="•"/>
+            </a:pPr>
+            <a:r>
+              <a:rPr lang="en-US" sz="1000" dirty="0">
+                <a:solidFill>
+                  <a:srgbClr val="9CA3AF"/>
+                </a:solidFill>
+                <a:latin typeface="Arial" pitchFamily="34" charset="0"/>
+                <a:ea typeface="Arial" pitchFamily="34" charset="-122"/>
+                <a:cs typeface="Arial" pitchFamily="34" charset="-120"/>
+              </a:rPr>
+              <a:t>Robotics (75m)</a:t>
             </a:r>
             <a:endParaRPr lang="en-US" sz="1000" dirty="0"/>
           </a:p>
@@ -13012,9 +11810,9 @@
 </p:sld>
 </file>
 
-<file path=ppt/slides/slide22.xml><?xml version="1.0" encoding="utf-8"?>
+<file path=ppt/slides/slide21.xml><?xml version="1.0" encoding="utf-8"?>
 <p:sld xmlns:a="http://schemas.openxmlformats.org/drawingml/2006/main" xmlns:r="http://schemas.openxmlformats.org/officeDocument/2006/relationships" xmlns:p="http://schemas.openxmlformats.org/presentationml/2006/main">
-  <p:cSld name="Slide 22">
+  <p:cSld name="Slide 21">
     <p:bg>
       <p:bgPr>
         <a:solidFill>
@@ -13564,45 +12362,6 @@
           </a:p>
         </p:txBody>
       </p:sp>
-      <p:sp>
-        <p:nvSpPr>
-          <p:cNvPr id="7" name="Text 5"/>
-          <p:cNvSpPr/>
-          <p:nvPr/>
-        </p:nvSpPr>
-        <p:spPr>
-          <a:xfrm>
-            <a:off x="731520" y="1737360"/>
-            <a:ext cx="6400800" cy="365760"/>
-          </a:xfrm>
-          <a:prstGeom prst="rect">
-            <a:avLst/>
-          </a:prstGeom>
-          <a:noFill/>
-          <a:ln/>
-        </p:spPr>
-        <p:txBody>
-          <a:bodyPr wrap="square" rtlCol="0" anchor="ctr"/>
-          <a:lstStyle/>
-          <a:p>
-            <a:pPr indent="0" marL="0">
-              <a:buNone/>
-            </a:pPr>
-            <a:r>
-              <a:rPr lang="en-US" sz="1300" dirty="0">
-                <a:solidFill>
-                  <a:srgbClr val="9CA3AF"/>
-                </a:solidFill>
-                <a:latin typeface="Arial" pitchFamily="34" charset="0"/>
-                <a:ea typeface="Arial" pitchFamily="34" charset="-122"/>
-                <a:cs typeface="Arial" pitchFamily="34" charset="-120"/>
-              </a:rPr>
-              <a:t>OpenClaw works with ANY OpenAI-compatible model provider.</a:t>
-            </a:r>
-            <a:endParaRPr lang="en-US" sz="1300" dirty="0"/>
-          </a:p>
-        </p:txBody>
-      </p:sp>
       <p:graphicFrame>
         <p:nvGraphicFramePr>
           <p:cNvPr id="4" name="Table 0"/>
@@ -13618,7 +12377,7 @@
           </p:nvPr>
         </p:nvGraphicFramePr>
         <p:xfrm>
-          <a:off x="731520" y="2286000"/>
+          <a:off x="731520" y="2011680"/>
           <a:ext cx="7680960" cy="914400"/>
         </p:xfrm>
         <a:graphic>
@@ -14460,13 +13219,13 @@
       </p:graphicFrame>
       <p:sp>
         <p:nvSpPr>
-          <p:cNvPr id="9" name="Text 6"/>
+          <p:cNvPr id="8" name="Text 5"/>
           <p:cNvSpPr/>
           <p:nvPr/>
         </p:nvSpPr>
         <p:spPr>
           <a:xfrm>
-            <a:off x="731520" y="3931920"/>
+            <a:off x="731520" y="3657600"/>
             <a:ext cx="7315200" cy="365760"/>
           </a:xfrm>
           <a:prstGeom prst="rect">
@@ -14511,7 +13270,7 @@
     <p:bg>
       <p:bgPr>
         <a:solidFill>
-          <a:srgbClr val="0F1117"/>
+          <a:srgbClr val="FFFFFF"/>
         </a:solidFill>
       </p:bgPr>
     </p:bg>
@@ -14529,541 +13288,30 @@
           <a:chExt cx="0" cy="0"/>
         </a:xfrm>
       </p:grpSpPr>
-      <p:sp>
-        <p:nvSpPr>
-          <p:cNvPr id="2" name="Text 0"/>
-          <p:cNvSpPr/>
+      <p:pic>
+        <p:nvPicPr>
+          <p:cNvPr id="2" name="Image 0" descr="/tmp/nebius-architecture.jpeg">    </p:cNvPr>
+          <p:cNvPicPr>
+            <a:picLocks noChangeAspect="1"/>
+          </p:cNvPicPr>
           <p:nvPr/>
-        </p:nvSpPr>
+        </p:nvPicPr>
+        <p:blipFill>
+          <a:blip r:embed="rId1"/>
+          <a:stretch>
+            <a:fillRect/>
+          </a:stretch>
+        </p:blipFill>
         <p:spPr>
           <a:xfrm>
-            <a:off x="365760" y="228600"/>
-            <a:ext cx="1097280" cy="274320"/>
+            <a:off x="0" y="0"/>
+            <a:ext cx="9144000" cy="5143500"/>
           </a:xfrm>
           <a:prstGeom prst="rect">
             <a:avLst/>
           </a:prstGeom>
-          <a:noFill/>
-          <a:ln/>
         </p:spPr>
-        <p:txBody>
-          <a:bodyPr wrap="square" rtlCol="0" anchor="ctr"/>
-          <a:lstStyle/>
-          <a:p>
-            <a:pPr indent="0" marL="0">
-              <a:buNone/>
-            </a:pPr>
-            <a:r>
-              <a:rPr lang="en-US" sz="1000" b="1" spc="400" kern="0" dirty="0">
-                <a:solidFill>
-                  <a:srgbClr val="B8FF4A"/>
-                </a:solidFill>
-                <a:latin typeface="Arial" pitchFamily="34" charset="0"/>
-                <a:ea typeface="Arial" pitchFamily="34" charset="-122"/>
-                <a:cs typeface="Arial" pitchFamily="34" charset="-120"/>
-              </a:rPr>
-              <a:t>NEBIUS</a:t>
-            </a:r>
-            <a:endParaRPr lang="en-US" sz="1000" dirty="0"/>
-          </a:p>
-        </p:txBody>
-      </p:sp>
-      <p:sp>
-        <p:nvSpPr>
-          <p:cNvPr id="3" name="Text 1"/>
-          <p:cNvSpPr/>
-          <p:nvPr/>
-        </p:nvSpPr>
-        <p:spPr>
-          <a:xfrm>
-            <a:off x="365760" y="4709160"/>
-            <a:ext cx="1097280" cy="274320"/>
-          </a:xfrm>
-          <a:prstGeom prst="rect">
-            <a:avLst/>
-          </a:prstGeom>
-          <a:noFill/>
-          <a:ln/>
-        </p:spPr>
-        <p:txBody>
-          <a:bodyPr wrap="square" rtlCol="0" anchor="ctr"/>
-          <a:lstStyle/>
-          <a:p>
-            <a:pPr indent="0" marL="0">
-              <a:buNone/>
-            </a:pPr>
-            <a:r>
-              <a:rPr lang="en-US" sz="900" dirty="0">
-                <a:solidFill>
-                  <a:srgbClr val="555555"/>
-                </a:solidFill>
-                <a:latin typeface="Arial" pitchFamily="34" charset="0"/>
-                <a:ea typeface="Arial" pitchFamily="34" charset="-122"/>
-                <a:cs typeface="Arial" pitchFamily="34" charset="-120"/>
-              </a:rPr>
-              <a:t>ClawCamp</a:t>
-            </a:r>
-            <a:endParaRPr lang="en-US" sz="900" dirty="0"/>
-          </a:p>
-        </p:txBody>
-      </p:sp>
-      <p:sp>
-        <p:nvSpPr>
-          <p:cNvPr id="4" name="Shape 2"/>
-          <p:cNvSpPr/>
-          <p:nvPr/>
-        </p:nvSpPr>
-        <p:spPr>
-          <a:xfrm>
-            <a:off x="0" y="4983480"/>
-            <a:ext cx="9144000" cy="164592"/>
-          </a:xfrm>
-          <a:prstGeom prst="rect">
-            <a:avLst/>
-          </a:prstGeom>
-          <a:solidFill>
-            <a:srgbClr val="B8FF4A"/>
-          </a:solidFill>
-          <a:ln/>
-        </p:spPr>
-      </p:sp>
-      <p:sp>
-        <p:nvSpPr>
-          <p:cNvPr id="5" name="Text 3"/>
-          <p:cNvSpPr/>
-          <p:nvPr/>
-        </p:nvSpPr>
-        <p:spPr>
-          <a:xfrm>
-            <a:off x="731520" y="640080"/>
-            <a:ext cx="7315200" cy="548640"/>
-          </a:xfrm>
-          <a:prstGeom prst="rect">
-            <a:avLst/>
-          </a:prstGeom>
-          <a:noFill/>
-          <a:ln/>
-        </p:spPr>
-        <p:txBody>
-          <a:bodyPr wrap="square" rtlCol="0" anchor="ctr"/>
-          <a:lstStyle/>
-          <a:p>
-            <a:pPr indent="0" marL="0">
-              <a:buNone/>
-            </a:pPr>
-            <a:r>
-              <a:rPr lang="en-US" sz="3200" b="1" dirty="0">
-                <a:solidFill>
-                  <a:srgbClr val="FFFFFF"/>
-                </a:solidFill>
-                <a:latin typeface="Arial" pitchFamily="34" charset="0"/>
-                <a:ea typeface="Arial" pitchFamily="34" charset="-122"/>
-                <a:cs typeface="Arial" pitchFamily="34" charset="-120"/>
-              </a:rPr>
-              <a:t>The Architecture</a:t>
-            </a:r>
-            <a:endParaRPr lang="en-US" sz="3200" dirty="0"/>
-          </a:p>
-        </p:txBody>
-      </p:sp>
-      <p:sp>
-        <p:nvSpPr>
-          <p:cNvPr id="6" name="Text 4"/>
-          <p:cNvSpPr/>
-          <p:nvPr/>
-        </p:nvSpPr>
-        <p:spPr>
-          <a:xfrm>
-            <a:off x="731520" y="1188720"/>
-            <a:ext cx="6400800" cy="365760"/>
-          </a:xfrm>
-          <a:prstGeom prst="rect">
-            <a:avLst/>
-          </a:prstGeom>
-          <a:noFill/>
-          <a:ln/>
-        </p:spPr>
-        <p:txBody>
-          <a:bodyPr wrap="square" rtlCol="0" anchor="ctr"/>
-          <a:lstStyle/>
-          <a:p>
-            <a:pPr indent="0" marL="0">
-              <a:buNone/>
-            </a:pPr>
-            <a:r>
-              <a:rPr lang="en-US" sz="1600" dirty="0">
-                <a:solidFill>
-                  <a:srgbClr val="B8FF4A"/>
-                </a:solidFill>
-                <a:latin typeface="Arial" pitchFamily="34" charset="0"/>
-                <a:ea typeface="Arial" pitchFamily="34" charset="-122"/>
-                <a:cs typeface="Arial" pitchFamily="34" charset="-120"/>
-              </a:rPr>
-              <a:t>Orchestration and inference are separate.</a:t>
-            </a:r>
-            <a:endParaRPr lang="en-US" sz="1600" dirty="0"/>
-          </a:p>
-        </p:txBody>
-      </p:sp>
-      <p:sp>
-        <p:nvSpPr>
-          <p:cNvPr id="7" name="Shape 5"/>
-          <p:cNvSpPr/>
-          <p:nvPr/>
-        </p:nvSpPr>
-        <p:spPr>
-          <a:xfrm>
-            <a:off x="731520" y="1828800"/>
-            <a:ext cx="3474720" cy="2011680"/>
-          </a:xfrm>
-          <a:prstGeom prst="roundRect">
-            <a:avLst>
-              <a:gd name="adj" fmla="val 4545"/>
-            </a:avLst>
-          </a:prstGeom>
-          <a:solidFill>
-            <a:srgbClr val="1A1D2E"/>
-          </a:solidFill>
-          <a:ln/>
-        </p:spPr>
-      </p:sp>
-      <p:sp>
-        <p:nvSpPr>
-          <p:cNvPr id="8" name="Text 6"/>
-          <p:cNvSpPr/>
-          <p:nvPr/>
-        </p:nvSpPr>
-        <p:spPr>
-          <a:xfrm>
-            <a:off x="731520" y="1920240"/>
-            <a:ext cx="3474720" cy="365760"/>
-          </a:xfrm>
-          <a:prstGeom prst="rect">
-            <a:avLst/>
-          </a:prstGeom>
-          <a:noFill/>
-          <a:ln/>
-        </p:spPr>
-        <p:txBody>
-          <a:bodyPr wrap="square" rtlCol="0" anchor="ctr"/>
-          <a:lstStyle/>
-          <a:p>
-            <a:pPr algn="ctr" indent="0" marL="0">
-              <a:buNone/>
-            </a:pPr>
-            <a:r>
-              <a:rPr lang="en-US" sz="1300" b="1" dirty="0">
-                <a:solidFill>
-                  <a:srgbClr val="B8FF4A"/>
-                </a:solidFill>
-                <a:latin typeface="Arial" pitchFamily="34" charset="0"/>
-                <a:ea typeface="Arial" pitchFamily="34" charset="-122"/>
-                <a:cs typeface="Arial" pitchFamily="34" charset="-120"/>
-              </a:rPr>
-              <a:t>Your Agent (OpenClaw)</a:t>
-            </a:r>
-            <a:endParaRPr lang="en-US" sz="1300" dirty="0"/>
-          </a:p>
-        </p:txBody>
-      </p:sp>
-      <p:sp>
-        <p:nvSpPr>
-          <p:cNvPr id="9" name="Text 7"/>
-          <p:cNvSpPr/>
-          <p:nvPr/>
-        </p:nvSpPr>
-        <p:spPr>
-          <a:xfrm>
-            <a:off x="914400" y="2286000"/>
-            <a:ext cx="3108960" cy="1371600"/>
-          </a:xfrm>
-          <a:prstGeom prst="rect">
-            <a:avLst/>
-          </a:prstGeom>
-          <a:noFill/>
-          <a:ln/>
-        </p:spPr>
-        <p:txBody>
-          <a:bodyPr wrap="square" rtlCol="0" anchor="ctr"/>
-          <a:lstStyle/>
-          <a:p>
-            <a:pPr indent="0" marL="0">
-              <a:buNone/>
-            </a:pPr>
-            <a:r>
-              <a:rPr lang="en-US" sz="1100" dirty="0">
-                <a:solidFill>
-                  <a:srgbClr val="9CA3AF"/>
-                </a:solidFill>
-                <a:latin typeface="Arial" pitchFamily="34" charset="0"/>
-                <a:ea typeface="Arial" pitchFamily="34" charset="-122"/>
-                <a:cs typeface="Arial" pitchFamily="34" charset="-120"/>
-              </a:rPr>
-              <a:t>Agent logic (CPU)</a:t>
-            </a:r>
-            <a:endParaRPr lang="en-US" sz="1100" dirty="0"/>
-          </a:p>
-          <a:p>
-            <a:pPr indent="0" marL="0">
-              <a:buNone/>
-            </a:pPr>
-            <a:r>
-              <a:rPr lang="en-US" sz="1100" dirty="0">
-                <a:solidFill>
-                  <a:srgbClr val="9CA3AF"/>
-                </a:solidFill>
-                <a:latin typeface="Arial" pitchFamily="34" charset="0"/>
-                <a:ea typeface="Arial" pitchFamily="34" charset="-122"/>
-                <a:cs typeface="Arial" pitchFamily="34" charset="-120"/>
-              </a:rPr>
-              <a:t>Tool calling</a:t>
-            </a:r>
-            <a:endParaRPr lang="en-US" sz="1100" dirty="0"/>
-          </a:p>
-          <a:p>
-            <a:pPr indent="0" marL="0">
-              <a:buNone/>
-            </a:pPr>
-            <a:r>
-              <a:rPr lang="en-US" sz="1100" dirty="0">
-                <a:solidFill>
-                  <a:srgbClr val="9CA3AF"/>
-                </a:solidFill>
-                <a:latin typeface="Arial" pitchFamily="34" charset="0"/>
-                <a:ea typeface="Arial" pitchFamily="34" charset="-122"/>
-                <a:cs typeface="Arial" pitchFamily="34" charset="-120"/>
-              </a:rPr>
-              <a:t>WebSocket gateway</a:t>
-            </a:r>
-            <a:endParaRPr lang="en-US" sz="1100" dirty="0"/>
-          </a:p>
-          <a:p>
-            <a:pPr indent="0" marL="0">
-              <a:buNone/>
-            </a:pPr>
-            <a:endParaRPr lang="en-US" sz="1100" dirty="0"/>
-          </a:p>
-          <a:p>
-            <a:pPr indent="0" marL="0">
-              <a:buNone/>
-            </a:pPr>
-            <a:r>
-              <a:rPr lang="en-US" sz="1100" dirty="0">
-                <a:solidFill>
-                  <a:srgbClr val="9CA3AF"/>
-                </a:solidFill>
-                <a:latin typeface="Arial" pitchFamily="34" charset="0"/>
-                <a:ea typeface="Arial" pitchFamily="34" charset="-122"/>
-                <a:cs typeface="Arial" pitchFamily="34" charset="-120"/>
-              </a:rPr>
-              <a:t>Runs anywhere  |  $0.01/hr</a:t>
-            </a:r>
-            <a:endParaRPr lang="en-US" sz="1100" dirty="0"/>
-          </a:p>
-        </p:txBody>
-      </p:sp>
-      <p:sp>
-        <p:nvSpPr>
-          <p:cNvPr id="10" name="Text 8"/>
-          <p:cNvSpPr/>
-          <p:nvPr/>
-        </p:nvSpPr>
-        <p:spPr>
-          <a:xfrm>
-            <a:off x="4206240" y="2560320"/>
-            <a:ext cx="731520" cy="365760"/>
-          </a:xfrm>
-          <a:prstGeom prst="rect">
-            <a:avLst/>
-          </a:prstGeom>
-          <a:noFill/>
-          <a:ln/>
-        </p:spPr>
-        <p:txBody>
-          <a:bodyPr wrap="square" rtlCol="0" anchor="ctr"/>
-          <a:lstStyle/>
-          <a:p>
-            <a:pPr algn="ctr" indent="0" marL="0">
-              <a:buNone/>
-            </a:pPr>
-            <a:r>
-              <a:rPr lang="en-US" sz="1100" b="1" dirty="0">
-                <a:solidFill>
-                  <a:srgbClr val="B8FF4A"/>
-                </a:solidFill>
-                <a:latin typeface="Arial" pitchFamily="34" charset="0"/>
-                <a:ea typeface="Arial" pitchFamily="34" charset="-122"/>
-                <a:cs typeface="Arial" pitchFamily="34" charset="-120"/>
-              </a:rPr>
-              <a:t>API</a:t>
-            </a:r>
-            <a:endParaRPr lang="en-US" sz="1100" dirty="0"/>
-          </a:p>
-        </p:txBody>
-      </p:sp>
-      <p:sp>
-        <p:nvSpPr>
-          <p:cNvPr id="11" name="Shape 9"/>
-          <p:cNvSpPr/>
-          <p:nvPr/>
-        </p:nvSpPr>
-        <p:spPr>
-          <a:xfrm>
-            <a:off x="4297680" y="3017520"/>
-            <a:ext cx="548640" cy="0"/>
-          </a:xfrm>
-          <a:prstGeom prst="line">
-            <a:avLst/>
-          </a:prstGeom>
-          <a:noFill/>
-          <a:ln w="25400">
-            <a:solidFill>
-              <a:srgbClr val="B8FF4A"/>
-            </a:solidFill>
-            <a:prstDash val="solid"/>
-          </a:ln>
-        </p:spPr>
-      </p:sp>
-      <p:sp>
-        <p:nvSpPr>
-          <p:cNvPr id="12" name="Shape 10"/>
-          <p:cNvSpPr/>
-          <p:nvPr/>
-        </p:nvSpPr>
-        <p:spPr>
-          <a:xfrm>
-            <a:off x="4937760" y="1828800"/>
-            <a:ext cx="3474720" cy="2011680"/>
-          </a:xfrm>
-          <a:prstGeom prst="roundRect">
-            <a:avLst>
-              <a:gd name="adj" fmla="val 4545"/>
-            </a:avLst>
-          </a:prstGeom>
-          <a:solidFill>
-            <a:srgbClr val="1A1D2E"/>
-          </a:solidFill>
-          <a:ln/>
-        </p:spPr>
-      </p:sp>
-      <p:sp>
-        <p:nvSpPr>
-          <p:cNvPr id="13" name="Text 11"/>
-          <p:cNvSpPr/>
-          <p:nvPr/>
-        </p:nvSpPr>
-        <p:spPr>
-          <a:xfrm>
-            <a:off x="4937760" y="1920240"/>
-            <a:ext cx="3474720" cy="365760"/>
-          </a:xfrm>
-          <a:prstGeom prst="rect">
-            <a:avLst/>
-          </a:prstGeom>
-          <a:noFill/>
-          <a:ln/>
-        </p:spPr>
-        <p:txBody>
-          <a:bodyPr wrap="square" rtlCol="0" anchor="ctr"/>
-          <a:lstStyle/>
-          <a:p>
-            <a:pPr algn="ctr" indent="0" marL="0">
-              <a:buNone/>
-            </a:pPr>
-            <a:r>
-              <a:rPr lang="en-US" sz="1300" b="1" dirty="0">
-                <a:solidFill>
-                  <a:srgbClr val="B8FF4A"/>
-                </a:solidFill>
-                <a:latin typeface="Arial" pitchFamily="34" charset="0"/>
-                <a:ea typeface="Arial" pitchFamily="34" charset="-122"/>
-                <a:cs typeface="Arial" pitchFamily="34" charset="-120"/>
-              </a:rPr>
-              <a:t>Token Factory (Nebius)</a:t>
-            </a:r>
-            <a:endParaRPr lang="en-US" sz="1300" dirty="0"/>
-          </a:p>
-        </p:txBody>
-      </p:sp>
-      <p:sp>
-        <p:nvSpPr>
-          <p:cNvPr id="14" name="Text 12"/>
-          <p:cNvSpPr/>
-          <p:nvPr/>
-        </p:nvSpPr>
-        <p:spPr>
-          <a:xfrm>
-            <a:off x="5120640" y="2286000"/>
-            <a:ext cx="3108960" cy="1371600"/>
-          </a:xfrm>
-          <a:prstGeom prst="rect">
-            <a:avLst/>
-          </a:prstGeom>
-          <a:noFill/>
-          <a:ln/>
-        </p:spPr>
-        <p:txBody>
-          <a:bodyPr wrap="square" rtlCol="0" anchor="ctr"/>
-          <a:lstStyle/>
-          <a:p>
-            <a:pPr indent="0" marL="0">
-              <a:buNone/>
-            </a:pPr>
-            <a:r>
-              <a:rPr lang="en-US" sz="1100" dirty="0">
-                <a:solidFill>
-                  <a:srgbClr val="9CA3AF"/>
-                </a:solidFill>
-                <a:latin typeface="Arial" pitchFamily="34" charset="0"/>
-                <a:ea typeface="Arial" pitchFamily="34" charset="-122"/>
-                <a:cs typeface="Arial" pitchFamily="34" charset="-120"/>
-              </a:rPr>
-              <a:t>Model inference (GPU)</a:t>
-            </a:r>
-            <a:endParaRPr lang="en-US" sz="1100" dirty="0"/>
-          </a:p>
-          <a:p>
-            <a:pPr indent="0" marL="0">
-              <a:buNone/>
-            </a:pPr>
-            <a:r>
-              <a:rPr lang="en-US" sz="1100" dirty="0">
-                <a:solidFill>
-                  <a:srgbClr val="9CA3AF"/>
-                </a:solidFill>
-                <a:latin typeface="Arial" pitchFamily="34" charset="0"/>
-                <a:ea typeface="Arial" pitchFamily="34" charset="-122"/>
-                <a:cs typeface="Arial" pitchFamily="34" charset="-120"/>
-              </a:rPr>
-              <a:t>Llama / GLM / Qwen</a:t>
-            </a:r>
-            <a:endParaRPr lang="en-US" sz="1100" dirty="0"/>
-          </a:p>
-          <a:p>
-            <a:pPr indent="0" marL="0">
-              <a:buNone/>
-            </a:pPr>
-            <a:endParaRPr lang="en-US" sz="1100" dirty="0"/>
-          </a:p>
-          <a:p>
-            <a:pPr indent="0" marL="0">
-              <a:buNone/>
-            </a:pPr>
-            <a:r>
-              <a:rPr lang="en-US" sz="1100" dirty="0">
-                <a:solidFill>
-                  <a:srgbClr val="9CA3AF"/>
-                </a:solidFill>
-                <a:latin typeface="Arial" pitchFamily="34" charset="0"/>
-                <a:ea typeface="Arial" pitchFamily="34" charset="-122"/>
-                <a:cs typeface="Arial" pitchFamily="34" charset="-120"/>
-              </a:rPr>
-              <a:t>Pay per token  |  No GPU needed</a:t>
-            </a:r>
-            <a:endParaRPr lang="en-US" sz="1100" dirty="0"/>
-          </a:p>
-        </p:txBody>
-      </p:sp>
+      </p:pic>
     </p:spTree>
   </p:cSld>
   <p:clrMapOvr>
@@ -16352,7 +14600,7 @@
                 <a:ea typeface="Arial" pitchFamily="34" charset="-122"/>
                 <a:cs typeface="Arial" pitchFamily="34" charset="-120"/>
               </a:rPr>
-              <a:t>2. Navigate to Token Factory in the sidebar</a:t>
+              <a:t>2. Navigate to Token Factory</a:t>
             </a:r>
             <a:endParaRPr lang="en-US" sz="1400" dirty="0"/>
           </a:p>
@@ -16407,11 +14655,11 @@
         <p:spPr>
           <a:xfrm>
             <a:off x="731520" y="2651760"/>
-            <a:ext cx="7680960" cy="457200"/>
+            <a:ext cx="7680960" cy="914400"/>
           </a:xfrm>
           <a:prstGeom prst="roundRect">
             <a:avLst>
-              <a:gd name="adj" fmla="val 16000"/>
+              <a:gd name="adj" fmla="val 8000"/>
             </a:avLst>
           </a:prstGeom>
           <a:solidFill>
@@ -16429,7 +14677,7 @@
         <p:spPr>
           <a:xfrm>
             <a:off x="868680" y="2724912"/>
-            <a:ext cx="7406640" cy="310896"/>
+            <a:ext cx="7406640" cy="768096"/>
           </a:xfrm>
           <a:prstGeom prst="rect">
             <a:avLst/>
@@ -16451,7 +14699,7 @@
               <a:buNone/>
             </a:pPr>
             <a:r>
-              <a:rPr lang="en-US" sz="1100" dirty="0">
+              <a:rPr lang="en-US" sz="1000" dirty="0">
                 <a:solidFill>
                   <a:srgbClr val="B8FF4A"/>
                 </a:solidFill>
@@ -16461,52 +14709,8 @@
               </a:rPr>
               <a:t>export NEBIUS_API_KEY="your-key-here"</a:t>
             </a:r>
-            <a:endParaRPr lang="en-US" sz="1100" dirty="0"/>
-          </a:p>
-        </p:txBody>
-      </p:sp>
-      <p:sp>
-        <p:nvSpPr>
-          <p:cNvPr id="9" name="Shape 7"/>
-          <p:cNvSpPr/>
-          <p:nvPr/>
-        </p:nvSpPr>
-        <p:spPr>
-          <a:xfrm>
-            <a:off x="731520" y="3291840"/>
-            <a:ext cx="7680960" cy="822960"/>
-          </a:xfrm>
-          <a:prstGeom prst="roundRect">
-            <a:avLst>
-              <a:gd name="adj" fmla="val 8889"/>
-            </a:avLst>
-          </a:prstGeom>
-          <a:solidFill>
-            <a:srgbClr val="161927"/>
-          </a:solidFill>
-          <a:ln/>
-        </p:spPr>
-      </p:sp>
-      <p:sp>
-        <p:nvSpPr>
-          <p:cNvPr id="10" name="Text 8"/>
-          <p:cNvSpPr/>
-          <p:nvPr/>
-        </p:nvSpPr>
-        <p:spPr>
-          <a:xfrm>
-            <a:off x="868680" y="3364992"/>
-            <a:ext cx="7406640" cy="676656"/>
-          </a:xfrm>
-          <a:prstGeom prst="rect">
-            <a:avLst/>
-          </a:prstGeom>
-          <a:noFill/>
-          <a:ln/>
-        </p:spPr>
-        <p:txBody>
-          <a:bodyPr wrap="square" rtlCol="0" anchor="t"/>
-          <a:lstStyle/>
+            <a:endParaRPr lang="en-US" sz="1000" dirty="0"/>
+          </a:p>
           <a:p>
             <a:pPr indent="0" marL="0">
               <a:spcBef>
@@ -16517,18 +14721,7 @@
               </a:spcAft>
               <a:buNone/>
             </a:pPr>
-            <a:r>
-              <a:rPr lang="en-US" sz="900" dirty="0">
-                <a:solidFill>
-                  <a:srgbClr val="B8FF4A"/>
-                </a:solidFill>
-                <a:latin typeface="Courier New" pitchFamily="34" charset="0"/>
-                <a:ea typeface="Courier New" pitchFamily="34" charset="-122"/>
-                <a:cs typeface="Courier New" pitchFamily="34" charset="-120"/>
-              </a:rPr>
-              <a:t># Persist across sessions:</a:t>
-            </a:r>
-            <a:endParaRPr lang="en-US" sz="900" dirty="0"/>
+            <a:endParaRPr lang="en-US" sz="1000" dirty="0"/>
           </a:p>
           <a:p>
             <a:pPr indent="0" marL="0">
@@ -16541,7 +14734,7 @@
               <a:buNone/>
             </a:pPr>
             <a:r>
-              <a:rPr lang="en-US" sz="900" dirty="0">
+              <a:rPr lang="en-US" sz="1000" dirty="0">
                 <a:solidFill>
                   <a:srgbClr val="B8FF4A"/>
                 </a:solidFill>
@@ -16549,9 +14742,9 @@
                 <a:ea typeface="Courier New" pitchFamily="34" charset="-122"/>
                 <a:cs typeface="Courier New" pitchFamily="34" charset="-120"/>
               </a:rPr>
-              <a:t>echo 'export NEBIUS_API_KEY="your-key-here"' &gt;&gt; ~/.zshrc  # macOS</a:t>
-            </a:r>
-            <a:endParaRPr lang="en-US" sz="900" dirty="0"/>
+              <a:t># Persist:</a:t>
+            </a:r>
+            <a:endParaRPr lang="en-US" sz="1000" dirty="0"/>
           </a:p>
           <a:p>
             <a:pPr indent="0" marL="0">
@@ -16564,7 +14757,7 @@
               <a:buNone/>
             </a:pPr>
             <a:r>
-              <a:rPr lang="en-US" sz="900" dirty="0">
+              <a:rPr lang="en-US" sz="1000" dirty="0">
                 <a:solidFill>
                   <a:srgbClr val="B8FF4A"/>
                 </a:solidFill>
@@ -16572,21 +14765,21 @@
                 <a:ea typeface="Courier New" pitchFamily="34" charset="-122"/>
                 <a:cs typeface="Courier New" pitchFamily="34" charset="-120"/>
               </a:rPr>
-              <a:t>echo 'export NEBIUS_API_KEY="your-key-here"' &gt;&gt; ~/.bashrc  # Linux</a:t>
-            </a:r>
-            <a:endParaRPr lang="en-US" sz="900" dirty="0"/>
+              <a:t>echo 'export NEBIUS_API_KEY="..."' &gt;&gt; ~/.zshrc</a:t>
+            </a:r>
+            <a:endParaRPr lang="en-US" sz="1000" dirty="0"/>
           </a:p>
         </p:txBody>
       </p:sp>
       <p:sp>
         <p:nvSpPr>
-          <p:cNvPr id="11" name="Text 9"/>
+          <p:cNvPr id="9" name="Text 7"/>
           <p:cNvSpPr/>
           <p:nvPr/>
         </p:nvSpPr>
         <p:spPr>
           <a:xfrm>
-            <a:off x="731520" y="4297680"/>
+            <a:off x="731520" y="3840480"/>
             <a:ext cx="7315200" cy="274320"/>
           </a:xfrm>
           <a:prstGeom prst="rect">
@@ -17012,7 +15205,7 @@
     <p:bg>
       <p:bgPr>
         <a:solidFill>
-          <a:srgbClr val="0F1117"/>
+          <a:srgbClr val="FFFFFF"/>
         </a:solidFill>
       </p:bgPr>
     </p:bg>
@@ -17030,520 +15223,30 @@
           <a:chExt cx="0" cy="0"/>
         </a:xfrm>
       </p:grpSpPr>
-      <p:sp>
-        <p:nvSpPr>
-          <p:cNvPr id="2" name="Text 0"/>
-          <p:cNvSpPr/>
+      <p:pic>
+        <p:nvPicPr>
+          <p:cNvPr id="2" name="Image 0" descr="/tmp/nebius-easy-hard.jpeg">    </p:cNvPr>
+          <p:cNvPicPr>
+            <a:picLocks noChangeAspect="1"/>
+          </p:cNvPicPr>
           <p:nvPr/>
-        </p:nvSpPr>
+        </p:nvPicPr>
+        <p:blipFill>
+          <a:blip r:embed="rId1"/>
+          <a:stretch>
+            <a:fillRect/>
+          </a:stretch>
+        </p:blipFill>
         <p:spPr>
           <a:xfrm>
-            <a:off x="365760" y="228600"/>
-            <a:ext cx="1097280" cy="274320"/>
+            <a:off x="0" y="0"/>
+            <a:ext cx="9144000" cy="5143500"/>
           </a:xfrm>
           <a:prstGeom prst="rect">
             <a:avLst/>
           </a:prstGeom>
-          <a:noFill/>
-          <a:ln/>
         </p:spPr>
-        <p:txBody>
-          <a:bodyPr wrap="square" rtlCol="0" anchor="ctr"/>
-          <a:lstStyle/>
-          <a:p>
-            <a:pPr indent="0" marL="0">
-              <a:buNone/>
-            </a:pPr>
-            <a:r>
-              <a:rPr lang="en-US" sz="1000" b="1" spc="400" kern="0" dirty="0">
-                <a:solidFill>
-                  <a:srgbClr val="B8FF4A"/>
-                </a:solidFill>
-                <a:latin typeface="Arial" pitchFamily="34" charset="0"/>
-                <a:ea typeface="Arial" pitchFamily="34" charset="-122"/>
-                <a:cs typeface="Arial" pitchFamily="34" charset="-120"/>
-              </a:rPr>
-              <a:t>NEBIUS</a:t>
-            </a:r>
-            <a:endParaRPr lang="en-US" sz="1000" dirty="0"/>
-          </a:p>
-        </p:txBody>
-      </p:sp>
-      <p:sp>
-        <p:nvSpPr>
-          <p:cNvPr id="3" name="Text 1"/>
-          <p:cNvSpPr/>
-          <p:nvPr/>
-        </p:nvSpPr>
-        <p:spPr>
-          <a:xfrm>
-            <a:off x="365760" y="4709160"/>
-            <a:ext cx="1097280" cy="274320"/>
-          </a:xfrm>
-          <a:prstGeom prst="rect">
-            <a:avLst/>
-          </a:prstGeom>
-          <a:noFill/>
-          <a:ln/>
-        </p:spPr>
-        <p:txBody>
-          <a:bodyPr wrap="square" rtlCol="0" anchor="ctr"/>
-          <a:lstStyle/>
-          <a:p>
-            <a:pPr indent="0" marL="0">
-              <a:buNone/>
-            </a:pPr>
-            <a:r>
-              <a:rPr lang="en-US" sz="900" dirty="0">
-                <a:solidFill>
-                  <a:srgbClr val="555555"/>
-                </a:solidFill>
-                <a:latin typeface="Arial" pitchFamily="34" charset="0"/>
-                <a:ea typeface="Arial" pitchFamily="34" charset="-122"/>
-                <a:cs typeface="Arial" pitchFamily="34" charset="-120"/>
-              </a:rPr>
-              <a:t>ClawCamp</a:t>
-            </a:r>
-            <a:endParaRPr lang="en-US" sz="900" dirty="0"/>
-          </a:p>
-        </p:txBody>
-      </p:sp>
-      <p:sp>
-        <p:nvSpPr>
-          <p:cNvPr id="4" name="Shape 2"/>
-          <p:cNvSpPr/>
-          <p:nvPr/>
-        </p:nvSpPr>
-        <p:spPr>
-          <a:xfrm>
-            <a:off x="0" y="4983480"/>
-            <a:ext cx="9144000" cy="164592"/>
-          </a:xfrm>
-          <a:prstGeom prst="rect">
-            <a:avLst/>
-          </a:prstGeom>
-          <a:solidFill>
-            <a:srgbClr val="B8FF4A"/>
-          </a:solidFill>
-          <a:ln/>
-        </p:spPr>
-      </p:sp>
-      <p:sp>
-        <p:nvSpPr>
-          <p:cNvPr id="5" name="Text 3"/>
-          <p:cNvSpPr/>
-          <p:nvPr/>
-        </p:nvSpPr>
-        <p:spPr>
-          <a:xfrm>
-            <a:off x="731520" y="640080"/>
-            <a:ext cx="7315200" cy="548640"/>
-          </a:xfrm>
-          <a:prstGeom prst="rect">
-            <a:avLst/>
-          </a:prstGeom>
-          <a:noFill/>
-          <a:ln/>
-        </p:spPr>
-        <p:txBody>
-          <a:bodyPr wrap="square" rtlCol="0" anchor="ctr"/>
-          <a:lstStyle/>
-          <a:p>
-            <a:pPr indent="0" marL="0">
-              <a:buNone/>
-            </a:pPr>
-            <a:r>
-              <a:rPr lang="en-US" sz="2800" b="1" dirty="0">
-                <a:solidFill>
-                  <a:srgbClr val="FFFFFF"/>
-                </a:solidFill>
-                <a:latin typeface="Arial" pitchFamily="34" charset="0"/>
-                <a:ea typeface="Arial" pitchFamily="34" charset="-122"/>
-                <a:cs typeface="Arial" pitchFamily="34" charset="-120"/>
-              </a:rPr>
-              <a:t>Step 3 — Connect to Token Factory</a:t>
-            </a:r>
-            <a:endParaRPr lang="en-US" sz="2800" dirty="0"/>
-          </a:p>
-        </p:txBody>
-      </p:sp>
-      <p:sp>
-        <p:nvSpPr>
-          <p:cNvPr id="6" name="Text 4"/>
-          <p:cNvSpPr/>
-          <p:nvPr/>
-        </p:nvSpPr>
-        <p:spPr>
-          <a:xfrm>
-            <a:off x="731520" y="1188720"/>
-            <a:ext cx="4572000" cy="274320"/>
-          </a:xfrm>
-          <a:prstGeom prst="rect">
-            <a:avLst/>
-          </a:prstGeom>
-          <a:noFill/>
-          <a:ln/>
-        </p:spPr>
-        <p:txBody>
-          <a:bodyPr wrap="square" rtlCol="0" anchor="ctr"/>
-          <a:lstStyle/>
-          <a:p>
-            <a:pPr indent="0" marL="0">
-              <a:buNone/>
-            </a:pPr>
-            <a:r>
-              <a:rPr lang="en-US" sz="1400" b="1" dirty="0">
-                <a:solidFill>
-                  <a:srgbClr val="B8FF4A"/>
-                </a:solidFill>
-                <a:latin typeface="Arial" pitchFamily="34" charset="0"/>
-                <a:ea typeface="Arial" pitchFamily="34" charset="-122"/>
-                <a:cs typeface="Arial" pitchFamily="34" charset="-120"/>
-              </a:rPr>
-              <a:t>Option A: Quick onboard (CLI)</a:t>
-            </a:r>
-            <a:endParaRPr lang="en-US" sz="1400" dirty="0"/>
-          </a:p>
-        </p:txBody>
-      </p:sp>
-      <p:sp>
-        <p:nvSpPr>
-          <p:cNvPr id="7" name="Shape 5"/>
-          <p:cNvSpPr/>
-          <p:nvPr/>
-        </p:nvSpPr>
-        <p:spPr>
-          <a:xfrm>
-            <a:off x="731520" y="1554480"/>
-            <a:ext cx="7680960" cy="1371600"/>
-          </a:xfrm>
-          <a:prstGeom prst="roundRect">
-            <a:avLst>
-              <a:gd name="adj" fmla="val 5333"/>
-            </a:avLst>
-          </a:prstGeom>
-          <a:solidFill>
-            <a:srgbClr val="161927"/>
-          </a:solidFill>
-          <a:ln/>
-        </p:spPr>
-      </p:sp>
-      <p:sp>
-        <p:nvSpPr>
-          <p:cNvPr id="8" name="Text 6"/>
-          <p:cNvSpPr/>
-          <p:nvPr/>
-        </p:nvSpPr>
-        <p:spPr>
-          <a:xfrm>
-            <a:off x="868680" y="1627632"/>
-            <a:ext cx="7406640" cy="1225296"/>
-          </a:xfrm>
-          <a:prstGeom prst="rect">
-            <a:avLst/>
-          </a:prstGeom>
-          <a:noFill/>
-          <a:ln/>
-        </p:spPr>
-        <p:txBody>
-          <a:bodyPr wrap="square" rtlCol="0" anchor="t"/>
-          <a:lstStyle/>
-          <a:p>
-            <a:pPr indent="0" marL="0">
-              <a:spcBef>
-                <a:spcPts val="200"/>
-              </a:spcBef>
-              <a:spcAft>
-                <a:spcPts val="200"/>
-              </a:spcAft>
-              <a:buNone/>
-            </a:pPr>
-            <a:r>
-              <a:rPr lang="en-US" sz="900" dirty="0">
-                <a:solidFill>
-                  <a:srgbClr val="B8FF4A"/>
-                </a:solidFill>
-                <a:latin typeface="Courier New" pitchFamily="34" charset="0"/>
-                <a:ea typeface="Courier New" pitchFamily="34" charset="-122"/>
-                <a:cs typeface="Courier New" pitchFamily="34" charset="-120"/>
-              </a:rPr>
-              <a:t>openclaw onboard --non-interactive \</a:t>
-            </a:r>
-            <a:endParaRPr lang="en-US" sz="900" dirty="0"/>
-          </a:p>
-          <a:p>
-            <a:pPr indent="0" marL="0">
-              <a:spcBef>
-                <a:spcPts val="200"/>
-              </a:spcBef>
-              <a:spcAft>
-                <a:spcPts val="200"/>
-              </a:spcAft>
-              <a:buNone/>
-            </a:pPr>
-            <a:r>
-              <a:rPr lang="en-US" sz="900" dirty="0">
-                <a:solidFill>
-                  <a:srgbClr val="B8FF4A"/>
-                </a:solidFill>
-                <a:latin typeface="Courier New" pitchFamily="34" charset="0"/>
-                <a:ea typeface="Courier New" pitchFamily="34" charset="-122"/>
-                <a:cs typeface="Courier New" pitchFamily="34" charset="-120"/>
-              </a:rPr>
-              <a:t>  --auth-choice custom-api-key \</a:t>
-            </a:r>
-            <a:endParaRPr lang="en-US" sz="900" dirty="0"/>
-          </a:p>
-          <a:p>
-            <a:pPr indent="0" marL="0">
-              <a:spcBef>
-                <a:spcPts val="200"/>
-              </a:spcBef>
-              <a:spcAft>
-                <a:spcPts val="200"/>
-              </a:spcAft>
-              <a:buNone/>
-            </a:pPr>
-            <a:r>
-              <a:rPr lang="en-US" sz="900" dirty="0">
-                <a:solidFill>
-                  <a:srgbClr val="B8FF4A"/>
-                </a:solidFill>
-                <a:latin typeface="Courier New" pitchFamily="34" charset="0"/>
-                <a:ea typeface="Courier New" pitchFamily="34" charset="-122"/>
-                <a:cs typeface="Courier New" pitchFamily="34" charset="-120"/>
-              </a:rPr>
-              <a:t>  --custom-base-url "https://api.tokenfactory.nebius.com/v1" \</a:t>
-            </a:r>
-            <a:endParaRPr lang="en-US" sz="900" dirty="0"/>
-          </a:p>
-          <a:p>
-            <a:pPr indent="0" marL="0">
-              <a:spcBef>
-                <a:spcPts val="200"/>
-              </a:spcBef>
-              <a:spcAft>
-                <a:spcPts val="200"/>
-              </a:spcAft>
-              <a:buNone/>
-            </a:pPr>
-            <a:r>
-              <a:rPr lang="en-US" sz="900" dirty="0">
-                <a:solidFill>
-                  <a:srgbClr val="B8FF4A"/>
-                </a:solidFill>
-                <a:latin typeface="Courier New" pitchFamily="34" charset="0"/>
-                <a:ea typeface="Courier New" pitchFamily="34" charset="-122"/>
-                <a:cs typeface="Courier New" pitchFamily="34" charset="-120"/>
-              </a:rPr>
-              <a:t>  --custom-model-id "meta-llama/Meta-Llama-3.1-70B-Instruct" \</a:t>
-            </a:r>
-            <a:endParaRPr lang="en-US" sz="900" dirty="0"/>
-          </a:p>
-          <a:p>
-            <a:pPr indent="0" marL="0">
-              <a:spcBef>
-                <a:spcPts val="200"/>
-              </a:spcBef>
-              <a:spcAft>
-                <a:spcPts val="200"/>
-              </a:spcAft>
-              <a:buNone/>
-            </a:pPr>
-            <a:r>
-              <a:rPr lang="en-US" sz="900" dirty="0">
-                <a:solidFill>
-                  <a:srgbClr val="B8FF4A"/>
-                </a:solidFill>
-                <a:latin typeface="Courier New" pitchFamily="34" charset="0"/>
-                <a:ea typeface="Courier New" pitchFamily="34" charset="-122"/>
-                <a:cs typeface="Courier New" pitchFamily="34" charset="-120"/>
-              </a:rPr>
-              <a:t>  --custom-api-key "$NEBIUS_API_KEY" \</a:t>
-            </a:r>
-            <a:endParaRPr lang="en-US" sz="900" dirty="0"/>
-          </a:p>
-          <a:p>
-            <a:pPr indent="0" marL="0">
-              <a:spcBef>
-                <a:spcPts val="200"/>
-              </a:spcBef>
-              <a:spcAft>
-                <a:spcPts val="200"/>
-              </a:spcAft>
-              <a:buNone/>
-            </a:pPr>
-            <a:r>
-              <a:rPr lang="en-US" sz="900" dirty="0">
-                <a:solidFill>
-                  <a:srgbClr val="B8FF4A"/>
-                </a:solidFill>
-                <a:latin typeface="Courier New" pitchFamily="34" charset="0"/>
-                <a:ea typeface="Courier New" pitchFamily="34" charset="-122"/>
-                <a:cs typeface="Courier New" pitchFamily="34" charset="-120"/>
-              </a:rPr>
-              <a:t>  --secret-input-mode plaintext \</a:t>
-            </a:r>
-            <a:endParaRPr lang="en-US" sz="900" dirty="0"/>
-          </a:p>
-          <a:p>
-            <a:pPr indent="0" marL="0">
-              <a:spcBef>
-                <a:spcPts val="200"/>
-              </a:spcBef>
-              <a:spcAft>
-                <a:spcPts val="200"/>
-              </a:spcAft>
-              <a:buNone/>
-            </a:pPr>
-            <a:r>
-              <a:rPr lang="en-US" sz="900" dirty="0">
-                <a:solidFill>
-                  <a:srgbClr val="B8FF4A"/>
-                </a:solidFill>
-                <a:latin typeface="Courier New" pitchFamily="34" charset="0"/>
-                <a:ea typeface="Courier New" pitchFamily="34" charset="-122"/>
-                <a:cs typeface="Courier New" pitchFamily="34" charset="-120"/>
-              </a:rPr>
-              <a:t>  --custom-compatibility openai</a:t>
-            </a:r>
-            <a:endParaRPr lang="en-US" sz="900" dirty="0"/>
-          </a:p>
-        </p:txBody>
-      </p:sp>
-      <p:sp>
-        <p:nvSpPr>
-          <p:cNvPr id="9" name="Text 7"/>
-          <p:cNvSpPr/>
-          <p:nvPr/>
-        </p:nvSpPr>
-        <p:spPr>
-          <a:xfrm>
-            <a:off x="731520" y="3108960"/>
-            <a:ext cx="7315200" cy="274320"/>
-          </a:xfrm>
-          <a:prstGeom prst="rect">
-            <a:avLst/>
-          </a:prstGeom>
-          <a:noFill/>
-          <a:ln/>
-        </p:spPr>
-        <p:txBody>
-          <a:bodyPr wrap="square" rtlCol="0" anchor="ctr"/>
-          <a:lstStyle/>
-          <a:p>
-            <a:pPr indent="0" marL="0">
-              <a:buNone/>
-            </a:pPr>
-            <a:r>
-              <a:rPr lang="en-US" sz="1200" b="1" dirty="0">
-                <a:solidFill>
-                  <a:srgbClr val="B8FF4A"/>
-                </a:solidFill>
-                <a:latin typeface="Arial" pitchFamily="34" charset="0"/>
-                <a:ea typeface="Arial" pitchFamily="34" charset="-122"/>
-                <a:cs typeface="Arial" pitchFamily="34" charset="-120"/>
-              </a:rPr>
-              <a:t>Option B: Config file (recommended for production) — see next slide</a:t>
-            </a:r>
-            <a:endParaRPr lang="en-US" sz="1200" dirty="0"/>
-          </a:p>
-        </p:txBody>
-      </p:sp>
-      <p:sp>
-        <p:nvSpPr>
-          <p:cNvPr id="10" name="Text 8"/>
-          <p:cNvSpPr/>
-          <p:nvPr/>
-        </p:nvSpPr>
-        <p:spPr>
-          <a:xfrm>
-            <a:off x="731520" y="3474720"/>
-            <a:ext cx="7315200" cy="1097280"/>
-          </a:xfrm>
-          <a:prstGeom prst="rect">
-            <a:avLst/>
-          </a:prstGeom>
-          <a:noFill/>
-          <a:ln/>
-        </p:spPr>
-        <p:txBody>
-          <a:bodyPr wrap="square" rtlCol="0" anchor="ctr"/>
-          <a:lstStyle/>
-          <a:p>
-            <a:pPr marL="342900" indent="-342900">
-              <a:buSzPct val="100000"/>
-              <a:buChar char="•"/>
-            </a:pPr>
-            <a:r>
-              <a:rPr lang="en-US" sz="1100" dirty="0">
-                <a:solidFill>
-                  <a:srgbClr val="9CA3AF"/>
-                </a:solidFill>
-                <a:latin typeface="Arial" pitchFamily="34" charset="0"/>
-                <a:ea typeface="Arial" pitchFamily="34" charset="-122"/>
-                <a:cs typeface="Arial" pitchFamily="34" charset="-120"/>
-              </a:rPr>
-              <a:t>mode: "merge" keeps built-in providers while adding Nebius</a:t>
-            </a:r>
-            <a:endParaRPr lang="en-US" sz="1100" dirty="0"/>
-          </a:p>
-          <a:p>
-            <a:pPr marL="342900" indent="-342900">
-              <a:buSzPct val="100000"/>
-              <a:buChar char="•"/>
-            </a:pPr>
-            <a:r>
-              <a:rPr lang="en-US" sz="1100" dirty="0">
-                <a:solidFill>
-                  <a:srgbClr val="9CA3AF"/>
-                </a:solidFill>
-                <a:latin typeface="Arial" pitchFamily="34" charset="0"/>
-                <a:ea typeface="Arial" pitchFamily="34" charset="-122"/>
-                <a:cs typeface="Arial" pitchFamily="34" charset="-120"/>
-              </a:rPr>
-              <a:t>apiKey: "${NEBIUS_API_KEY}" reads from your env variable</a:t>
-            </a:r>
-            <a:endParaRPr lang="en-US" sz="1100" dirty="0"/>
-          </a:p>
-          <a:p>
-            <a:pPr marL="342900" indent="-342900">
-              <a:buSzPct val="100000"/>
-              <a:buChar char="•"/>
-            </a:pPr>
-            <a:r>
-              <a:rPr lang="en-US" sz="1100" dirty="0">
-                <a:solidFill>
-                  <a:srgbClr val="9CA3AF"/>
-                </a:solidFill>
-                <a:latin typeface="Arial" pitchFamily="34" charset="0"/>
-                <a:ea typeface="Arial" pitchFamily="34" charset="-122"/>
-                <a:cs typeface="Arial" pitchFamily="34" charset="-120"/>
-              </a:rPr>
-              <a:t>api: "openai-completions" — Token Factory is OpenAI-compatible</a:t>
-            </a:r>
-            <a:endParaRPr lang="en-US" sz="1100" dirty="0"/>
-          </a:p>
-          <a:p>
-            <a:pPr marL="342900" indent="-342900">
-              <a:buSzPct val="100000"/>
-              <a:buChar char="•"/>
-            </a:pPr>
-            <a:r>
-              <a:rPr lang="en-US" sz="1100" dirty="0">
-                <a:solidFill>
-                  <a:srgbClr val="9CA3AF"/>
-                </a:solidFill>
-                <a:latin typeface="Arial" pitchFamily="34" charset="0"/>
-                <a:ea typeface="Arial" pitchFamily="34" charset="-122"/>
-                <a:cs typeface="Arial" pitchFamily="34" charset="-120"/>
-              </a:rPr>
-              <a:t>Model aliases let you switch fast: /model llama70b</a:t>
-            </a:r>
-            <a:endParaRPr lang="en-US" sz="1100" dirty="0"/>
-          </a:p>
-        </p:txBody>
-      </p:sp>
+      </p:pic>
     </p:spTree>
   </p:cSld>
   <p:clrMapOvr>
@@ -17707,7 +15410,7 @@
                 <a:ea typeface="Arial" pitchFamily="34" charset="-122"/>
                 <a:cs typeface="Arial" pitchFamily="34" charset="-120"/>
               </a:rPr>
-              <a:t>Config File: ~/.openclaw/openclaw.json</a:t>
+              <a:t>Config: ~/.openclaw/openclaw.json</a:t>
             </a:r>
             <a:endParaRPr lang="en-US" sz="2400" dirty="0"/>
           </a:p>
@@ -18234,7 +15937,7 @@
                 <a:ea typeface="Courier New" pitchFamily="34" charset="-122"/>
                 <a:cs typeface="Courier New" pitchFamily="34" charset="-120"/>
               </a:rPr>
-              <a:t>    model: { primary: "nebius/meta-llama/Meta-Llama-3.1-70B-Instruct" },</a:t>
+              <a:t>    model: { primary: "nebius/meta-llama/..." },</a:t>
             </a:r>
             <a:endParaRPr lang="en-US" sz="800" dirty="0"/>
           </a:p>
@@ -18280,7 +15983,7 @@
                 <a:ea typeface="Courier New" pitchFamily="34" charset="-122"/>
                 <a:cs typeface="Courier New" pitchFamily="34" charset="-120"/>
               </a:rPr>
-              <a:t>      "nebius/meta-llama/Meta-Llama-3.1-70B-Instruct": { alias: "llama70b" },</a:t>
+              <a:t>      "nebius/.../Llama-3.1-70B": { alias: "llama70b" },</a:t>
             </a:r>
             <a:endParaRPr lang="en-US" sz="800" dirty="0"/>
           </a:p>
@@ -18326,7 +16029,7 @@
                 <a:ea typeface="Courier New" pitchFamily="34" charset="-122"/>
                 <a:cs typeface="Courier New" pitchFamily="34" charset="-120"/>
               </a:rPr>
-              <a:t>      "nebius/deepseek-ai/DeepSeek-R1": { alias: "deepseek" }</a:t>
+              <a:t>      "nebius/.../DeepSeek-R1": { alias: "deepseek" }</a:t>
             </a:r>
             <a:endParaRPr lang="en-US" sz="800" dirty="0"/>
           </a:p>

--- a/workshops/running-openclaw-on-nebius.pptx
+++ b/workshops/running-openclaw-on-nebius.pptx
@@ -3229,7 +3229,7 @@
                 <a:ea typeface="Courier New" pitchFamily="34" charset="-122"/>
                 <a:cs typeface="Courier New" pitchFamily="34" charset="-120"/>
               </a:rPr>
-              <a:t>/models          # List all models</a:t>
+              <a:t>/models        # List all models</a:t>
             </a:r>
             <a:endParaRPr lang="en-US" sz="1000" dirty="0"/>
           </a:p>
@@ -3252,7 +3252,7 @@
                 <a:ea typeface="Courier New" pitchFamily="34" charset="-122"/>
                 <a:cs typeface="Courier New" pitchFamily="34" charset="-120"/>
               </a:rPr>
-              <a:t>/model llama70b  # Switch model</a:t>
+              <a:t>/model kimi    # Switch to Kimi K2.5</a:t>
             </a:r>
             <a:endParaRPr lang="en-US" sz="1000" dirty="0"/>
           </a:p>
@@ -3275,7 +3275,7 @@
                 <a:ea typeface="Courier New" pitchFamily="34" charset="-122"/>
                 <a:cs typeface="Courier New" pitchFamily="34" charset="-120"/>
               </a:rPr>
-              <a:t>/status          # Check connection</a:t>
+              <a:t>/status        # Check connection</a:t>
             </a:r>
             <a:endParaRPr lang="en-US" sz="1000" dirty="0"/>
           </a:p>
@@ -3314,7 +3314,7 @@
                 <a:ea typeface="Arial" pitchFamily="34" charset="-122"/>
                 <a:cs typeface="Arial" pitchFamily="34" charset="-120"/>
               </a:rPr>
-              <a:t>Your agent is live. No GPU on your machine.</a:t>
+              <a:t>Your agent is live. Connected to Kimi K2.5 on Nebius.</a:t>
             </a:r>
             <a:endParaRPr lang="en-US" sz="1400" dirty="0"/>
           </a:p>
@@ -3603,7 +3603,7 @@
                           <a:ea typeface="Arial" pitchFamily="34" charset="-122"/>
                           <a:cs typeface="Arial" pitchFamily="34" charset="-120"/>
                         </a:rPr>
-                        <a:t>Speed</a:t>
+                        <a:t>ID</a:t>
                       </a:r>
                       <a:endParaRPr lang="en-US" sz="1000" dirty="0">
                         <a:latin typeface="Arial" charset="0"/>
@@ -3671,7 +3671,7 @@
                           <a:ea typeface="Arial" pitchFamily="34" charset="-122"/>
                           <a:cs typeface="Arial" pitchFamily="34" charset="-120"/>
                         </a:rPr>
-                        <a:t>Quality</a:t>
+                        <a:t>Speed</a:t>
                       </a:r>
                       <a:endParaRPr lang="en-US" sz="1000" dirty="0">
                         <a:latin typeface="Arial" charset="0"/>
@@ -3809,7 +3809,75 @@
                           <a:ea typeface="Arial" pitchFamily="34" charset="-122"/>
                           <a:cs typeface="Arial" pitchFamily="34" charset="-120"/>
                         </a:rPr>
-                        <a:t>Llama 3.1 70B</a:t>
+                        <a:t>Kimi K2.5</a:t>
+                      </a:r>
+                      <a:endParaRPr lang="en-US" sz="900" dirty="0">
+                        <a:latin typeface="Arial" charset="0"/>
+                        <a:ea typeface="Arial" charset="0"/>
+                        <a:cs typeface="Arial" charset="0"/>
+                      </a:endParaRPr>
+                    </a:p>
+                  </a:txBody>
+                  <a:tcPr marL="91440" marR="91440" marT="45720" marB="45720">
+                    <a:lnL w="6350" cap="flat" cmpd="sng" algn="ctr">
+                      <a:solidFill>
+                        <a:srgbClr val="2A2D3E"/>
+                      </a:solidFill>
+                      <a:prstDash val="solid"/>
+                      <a:round/>
+                      <a:headEnd type="none" w="med" len="med"/>
+                      <a:tailEnd type="none" w="med" len="med"/>
+                    </a:lnL>
+                    <a:lnR w="6350" cap="flat" cmpd="sng" algn="ctr">
+                      <a:solidFill>
+                        <a:srgbClr val="2A2D3E"/>
+                      </a:solidFill>
+                      <a:prstDash val="solid"/>
+                      <a:round/>
+                      <a:headEnd type="none" w="med" len="med"/>
+                      <a:tailEnd type="none" w="med" len="med"/>
+                    </a:lnR>
+                    <a:lnT w="6350" cap="flat" cmpd="sng" algn="ctr">
+                      <a:solidFill>
+                        <a:srgbClr val="2A2D3E"/>
+                      </a:solidFill>
+                      <a:prstDash val="solid"/>
+                      <a:round/>
+                      <a:headEnd type="none" w="med" len="med"/>
+                      <a:tailEnd type="none" w="med" len="med"/>
+                    </a:lnT>
+                    <a:lnB w="6350" cap="flat" cmpd="sng" algn="ctr">
+                      <a:solidFill>
+                        <a:srgbClr val="2A2D3E"/>
+                      </a:solidFill>
+                      <a:prstDash val="solid"/>
+                      <a:round/>
+                      <a:headEnd type="none" w="med" len="med"/>
+                      <a:tailEnd type="none" w="med" len="med"/>
+                    </a:lnB>
+                    <a:solidFill>
+                      <a:srgbClr val="1A1D2E"/>
+                    </a:solidFill>
+                  </a:tcPr>
+                </a:tc>
+                <a:tc>
+                  <a:txBody>
+                    <a:bodyPr/>
+                    <a:lstStyle/>
+                    <a:p>
+                      <a:pPr indent="0" marL="0">
+                        <a:buNone/>
+                      </a:pPr>
+                      <a:r>
+                        <a:rPr lang="en-US" sz="900" dirty="0">
+                          <a:solidFill>
+                            <a:srgbClr val="FFFFFF"/>
+                          </a:solidFill>
+                          <a:latin typeface="Arial" pitchFamily="34" charset="0"/>
+                          <a:ea typeface="Arial" pitchFamily="34" charset="-122"/>
+                          <a:cs typeface="Arial" pitchFamily="34" charset="-120"/>
+                        </a:rPr>
+                        <a:t>moonshotai/Kimi-K2.5</a:t>
                       </a:r>
                       <a:endParaRPr lang="en-US" sz="900" dirty="0">
                         <a:latin typeface="Arial" charset="0"/>
@@ -3945,7 +4013,77 @@
                           <a:ea typeface="Arial" pitchFamily="34" charset="-122"/>
                           <a:cs typeface="Arial" pitchFamily="34" charset="-120"/>
                         </a:rPr>
-                        <a:t>High</a:t>
+                        <a:t>Recommended all-rounder</a:t>
+                      </a:r>
+                      <a:endParaRPr lang="en-US" sz="900" dirty="0">
+                        <a:latin typeface="Arial" charset="0"/>
+                        <a:ea typeface="Arial" charset="0"/>
+                        <a:cs typeface="Arial" charset="0"/>
+                      </a:endParaRPr>
+                    </a:p>
+                  </a:txBody>
+                  <a:tcPr marL="91440" marR="91440" marT="45720" marB="45720">
+                    <a:lnL w="6350" cap="flat" cmpd="sng" algn="ctr">
+                      <a:solidFill>
+                        <a:srgbClr val="2A2D3E"/>
+                      </a:solidFill>
+                      <a:prstDash val="solid"/>
+                      <a:round/>
+                      <a:headEnd type="none" w="med" len="med"/>
+                      <a:tailEnd type="none" w="med" len="med"/>
+                    </a:lnL>
+                    <a:lnR w="6350" cap="flat" cmpd="sng" algn="ctr">
+                      <a:solidFill>
+                        <a:srgbClr val="2A2D3E"/>
+                      </a:solidFill>
+                      <a:prstDash val="solid"/>
+                      <a:round/>
+                      <a:headEnd type="none" w="med" len="med"/>
+                      <a:tailEnd type="none" w="med" len="med"/>
+                    </a:lnR>
+                    <a:lnT w="6350" cap="flat" cmpd="sng" algn="ctr">
+                      <a:solidFill>
+                        <a:srgbClr val="2A2D3E"/>
+                      </a:solidFill>
+                      <a:prstDash val="solid"/>
+                      <a:round/>
+                      <a:headEnd type="none" w="med" len="med"/>
+                      <a:tailEnd type="none" w="med" len="med"/>
+                    </a:lnT>
+                    <a:lnB w="6350" cap="flat" cmpd="sng" algn="ctr">
+                      <a:solidFill>
+                        <a:srgbClr val="2A2D3E"/>
+                      </a:solidFill>
+                      <a:prstDash val="solid"/>
+                      <a:round/>
+                      <a:headEnd type="none" w="med" len="med"/>
+                      <a:tailEnd type="none" w="med" len="med"/>
+                    </a:lnB>
+                    <a:solidFill>
+                      <a:srgbClr val="1A1D2E"/>
+                    </a:solidFill>
+                  </a:tcPr>
+                </a:tc>
+              </a:tr>
+              <a:tr h="320040">
+                <a:tc>
+                  <a:txBody>
+                    <a:bodyPr/>
+                    <a:lstStyle/>
+                    <a:p>
+                      <a:pPr indent="0" marL="0">
+                        <a:buNone/>
+                      </a:pPr>
+                      <a:r>
+                        <a:rPr lang="en-US" sz="900" dirty="0">
+                          <a:solidFill>
+                            <a:srgbClr val="FFFFFF"/>
+                          </a:solidFill>
+                          <a:latin typeface="Arial" pitchFamily="34" charset="0"/>
+                          <a:ea typeface="Arial" pitchFamily="34" charset="-122"/>
+                          <a:cs typeface="Arial" pitchFamily="34" charset="-120"/>
+                        </a:rPr>
+                        <a:t>Llama 3.3 70B</a:t>
                       </a:r>
                       <a:endParaRPr lang="en-US" sz="900" dirty="0">
                         <a:latin typeface="Arial" charset="0"/>
@@ -4013,7 +4151,417 @@
                           <a:ea typeface="Arial" pitchFamily="34" charset="-122"/>
                           <a:cs typeface="Arial" pitchFamily="34" charset="-120"/>
                         </a:rPr>
-                        <a:t>General agents, tool calling</a:t>
+                        <a:t>meta-llama/Llama-3.3-70B-Instruct-fast</a:t>
+                      </a:r>
+                      <a:endParaRPr lang="en-US" sz="900" dirty="0">
+                        <a:latin typeface="Arial" charset="0"/>
+                        <a:ea typeface="Arial" charset="0"/>
+                        <a:cs typeface="Arial" charset="0"/>
+                      </a:endParaRPr>
+                    </a:p>
+                  </a:txBody>
+                  <a:tcPr marL="91440" marR="91440" marT="45720" marB="45720">
+                    <a:lnL w="6350" cap="flat" cmpd="sng" algn="ctr">
+                      <a:solidFill>
+                        <a:srgbClr val="2A2D3E"/>
+                      </a:solidFill>
+                      <a:prstDash val="solid"/>
+                      <a:round/>
+                      <a:headEnd type="none" w="med" len="med"/>
+                      <a:tailEnd type="none" w="med" len="med"/>
+                    </a:lnL>
+                    <a:lnR w="6350" cap="flat" cmpd="sng" algn="ctr">
+                      <a:solidFill>
+                        <a:srgbClr val="2A2D3E"/>
+                      </a:solidFill>
+                      <a:prstDash val="solid"/>
+                      <a:round/>
+                      <a:headEnd type="none" w="med" len="med"/>
+                      <a:tailEnd type="none" w="med" len="med"/>
+                    </a:lnR>
+                    <a:lnT w="6350" cap="flat" cmpd="sng" algn="ctr">
+                      <a:solidFill>
+                        <a:srgbClr val="2A2D3E"/>
+                      </a:solidFill>
+                      <a:prstDash val="solid"/>
+                      <a:round/>
+                      <a:headEnd type="none" w="med" len="med"/>
+                      <a:tailEnd type="none" w="med" len="med"/>
+                    </a:lnT>
+                    <a:lnB w="6350" cap="flat" cmpd="sng" algn="ctr">
+                      <a:solidFill>
+                        <a:srgbClr val="2A2D3E"/>
+                      </a:solidFill>
+                      <a:prstDash val="solid"/>
+                      <a:round/>
+                      <a:headEnd type="none" w="med" len="med"/>
+                      <a:tailEnd type="none" w="med" len="med"/>
+                    </a:lnB>
+                    <a:solidFill>
+                      <a:srgbClr val="1A1D2E"/>
+                    </a:solidFill>
+                  </a:tcPr>
+                </a:tc>
+                <a:tc>
+                  <a:txBody>
+                    <a:bodyPr/>
+                    <a:lstStyle/>
+                    <a:p>
+                      <a:pPr indent="0" marL="0">
+                        <a:buNone/>
+                      </a:pPr>
+                      <a:r>
+                        <a:rPr lang="en-US" sz="900" dirty="0">
+                          <a:solidFill>
+                            <a:srgbClr val="FFFFFF"/>
+                          </a:solidFill>
+                          <a:latin typeface="Arial" pitchFamily="34" charset="0"/>
+                          <a:ea typeface="Arial" pitchFamily="34" charset="-122"/>
+                          <a:cs typeface="Arial" pitchFamily="34" charset="-120"/>
+                        </a:rPr>
+                        <a:t>Fast</a:t>
+                      </a:r>
+                      <a:endParaRPr lang="en-US" sz="900" dirty="0">
+                        <a:latin typeface="Arial" charset="0"/>
+                        <a:ea typeface="Arial" charset="0"/>
+                        <a:cs typeface="Arial" charset="0"/>
+                      </a:endParaRPr>
+                    </a:p>
+                  </a:txBody>
+                  <a:tcPr marL="91440" marR="91440" marT="45720" marB="45720">
+                    <a:lnL w="6350" cap="flat" cmpd="sng" algn="ctr">
+                      <a:solidFill>
+                        <a:srgbClr val="2A2D3E"/>
+                      </a:solidFill>
+                      <a:prstDash val="solid"/>
+                      <a:round/>
+                      <a:headEnd type="none" w="med" len="med"/>
+                      <a:tailEnd type="none" w="med" len="med"/>
+                    </a:lnL>
+                    <a:lnR w="6350" cap="flat" cmpd="sng" algn="ctr">
+                      <a:solidFill>
+                        <a:srgbClr val="2A2D3E"/>
+                      </a:solidFill>
+                      <a:prstDash val="solid"/>
+                      <a:round/>
+                      <a:headEnd type="none" w="med" len="med"/>
+                      <a:tailEnd type="none" w="med" len="med"/>
+                    </a:lnR>
+                    <a:lnT w="6350" cap="flat" cmpd="sng" algn="ctr">
+                      <a:solidFill>
+                        <a:srgbClr val="2A2D3E"/>
+                      </a:solidFill>
+                      <a:prstDash val="solid"/>
+                      <a:round/>
+                      <a:headEnd type="none" w="med" len="med"/>
+                      <a:tailEnd type="none" w="med" len="med"/>
+                    </a:lnT>
+                    <a:lnB w="6350" cap="flat" cmpd="sng" algn="ctr">
+                      <a:solidFill>
+                        <a:srgbClr val="2A2D3E"/>
+                      </a:solidFill>
+                      <a:prstDash val="solid"/>
+                      <a:round/>
+                      <a:headEnd type="none" w="med" len="med"/>
+                      <a:tailEnd type="none" w="med" len="med"/>
+                    </a:lnB>
+                    <a:solidFill>
+                      <a:srgbClr val="1A1D2E"/>
+                    </a:solidFill>
+                  </a:tcPr>
+                </a:tc>
+                <a:tc>
+                  <a:txBody>
+                    <a:bodyPr/>
+                    <a:lstStyle/>
+                    <a:p>
+                      <a:pPr indent="0" marL="0">
+                        <a:buNone/>
+                      </a:pPr>
+                      <a:r>
+                        <a:rPr lang="en-US" sz="900" dirty="0">
+                          <a:solidFill>
+                            <a:srgbClr val="FFFFFF"/>
+                          </a:solidFill>
+                          <a:latin typeface="Arial" pitchFamily="34" charset="0"/>
+                          <a:ea typeface="Arial" pitchFamily="34" charset="-122"/>
+                          <a:cs typeface="Arial" pitchFamily="34" charset="-120"/>
+                        </a:rPr>
+                        <a:t>Tool calling</a:t>
+                      </a:r>
+                      <a:endParaRPr lang="en-US" sz="900" dirty="0">
+                        <a:latin typeface="Arial" charset="0"/>
+                        <a:ea typeface="Arial" charset="0"/>
+                        <a:cs typeface="Arial" charset="0"/>
+                      </a:endParaRPr>
+                    </a:p>
+                  </a:txBody>
+                  <a:tcPr marL="91440" marR="91440" marT="45720" marB="45720">
+                    <a:lnL w="6350" cap="flat" cmpd="sng" algn="ctr">
+                      <a:solidFill>
+                        <a:srgbClr val="2A2D3E"/>
+                      </a:solidFill>
+                      <a:prstDash val="solid"/>
+                      <a:round/>
+                      <a:headEnd type="none" w="med" len="med"/>
+                      <a:tailEnd type="none" w="med" len="med"/>
+                    </a:lnL>
+                    <a:lnR w="6350" cap="flat" cmpd="sng" algn="ctr">
+                      <a:solidFill>
+                        <a:srgbClr val="2A2D3E"/>
+                      </a:solidFill>
+                      <a:prstDash val="solid"/>
+                      <a:round/>
+                      <a:headEnd type="none" w="med" len="med"/>
+                      <a:tailEnd type="none" w="med" len="med"/>
+                    </a:lnR>
+                    <a:lnT w="6350" cap="flat" cmpd="sng" algn="ctr">
+                      <a:solidFill>
+                        <a:srgbClr val="2A2D3E"/>
+                      </a:solidFill>
+                      <a:prstDash val="solid"/>
+                      <a:round/>
+                      <a:headEnd type="none" w="med" len="med"/>
+                      <a:tailEnd type="none" w="med" len="med"/>
+                    </a:lnT>
+                    <a:lnB w="6350" cap="flat" cmpd="sng" algn="ctr">
+                      <a:solidFill>
+                        <a:srgbClr val="2A2D3E"/>
+                      </a:solidFill>
+                      <a:prstDash val="solid"/>
+                      <a:round/>
+                      <a:headEnd type="none" w="med" len="med"/>
+                      <a:tailEnd type="none" w="med" len="med"/>
+                    </a:lnB>
+                    <a:solidFill>
+                      <a:srgbClr val="1A1D2E"/>
+                    </a:solidFill>
+                  </a:tcPr>
+                </a:tc>
+              </a:tr>
+              <a:tr h="320040">
+                <a:tc>
+                  <a:txBody>
+                    <a:bodyPr/>
+                    <a:lstStyle/>
+                    <a:p>
+                      <a:pPr indent="0" marL="0">
+                        <a:buNone/>
+                      </a:pPr>
+                      <a:r>
+                        <a:rPr lang="en-US" sz="900" dirty="0">
+                          <a:solidFill>
+                            <a:srgbClr val="FFFFFF"/>
+                          </a:solidFill>
+                          <a:latin typeface="Arial" pitchFamily="34" charset="0"/>
+                          <a:ea typeface="Arial" pitchFamily="34" charset="-122"/>
+                          <a:cs typeface="Arial" pitchFamily="34" charset="-120"/>
+                        </a:rPr>
+                        <a:t>DeepSeek-R1</a:t>
+                      </a:r>
+                      <a:endParaRPr lang="en-US" sz="900" dirty="0">
+                        <a:latin typeface="Arial" charset="0"/>
+                        <a:ea typeface="Arial" charset="0"/>
+                        <a:cs typeface="Arial" charset="0"/>
+                      </a:endParaRPr>
+                    </a:p>
+                  </a:txBody>
+                  <a:tcPr marL="91440" marR="91440" marT="45720" marB="45720">
+                    <a:lnL w="6350" cap="flat" cmpd="sng" algn="ctr">
+                      <a:solidFill>
+                        <a:srgbClr val="2A2D3E"/>
+                      </a:solidFill>
+                      <a:prstDash val="solid"/>
+                      <a:round/>
+                      <a:headEnd type="none" w="med" len="med"/>
+                      <a:tailEnd type="none" w="med" len="med"/>
+                    </a:lnL>
+                    <a:lnR w="6350" cap="flat" cmpd="sng" algn="ctr">
+                      <a:solidFill>
+                        <a:srgbClr val="2A2D3E"/>
+                      </a:solidFill>
+                      <a:prstDash val="solid"/>
+                      <a:round/>
+                      <a:headEnd type="none" w="med" len="med"/>
+                      <a:tailEnd type="none" w="med" len="med"/>
+                    </a:lnR>
+                    <a:lnT w="6350" cap="flat" cmpd="sng" algn="ctr">
+                      <a:solidFill>
+                        <a:srgbClr val="2A2D3E"/>
+                      </a:solidFill>
+                      <a:prstDash val="solid"/>
+                      <a:round/>
+                      <a:headEnd type="none" w="med" len="med"/>
+                      <a:tailEnd type="none" w="med" len="med"/>
+                    </a:lnT>
+                    <a:lnB w="6350" cap="flat" cmpd="sng" algn="ctr">
+                      <a:solidFill>
+                        <a:srgbClr val="2A2D3E"/>
+                      </a:solidFill>
+                      <a:prstDash val="solid"/>
+                      <a:round/>
+                      <a:headEnd type="none" w="med" len="med"/>
+                      <a:tailEnd type="none" w="med" len="med"/>
+                    </a:lnB>
+                    <a:solidFill>
+                      <a:srgbClr val="1A1D2E"/>
+                    </a:solidFill>
+                  </a:tcPr>
+                </a:tc>
+                <a:tc>
+                  <a:txBody>
+                    <a:bodyPr/>
+                    <a:lstStyle/>
+                    <a:p>
+                      <a:pPr indent="0" marL="0">
+                        <a:buNone/>
+                      </a:pPr>
+                      <a:r>
+                        <a:rPr lang="en-US" sz="900" dirty="0">
+                          <a:solidFill>
+                            <a:srgbClr val="FFFFFF"/>
+                          </a:solidFill>
+                          <a:latin typeface="Arial" pitchFamily="34" charset="0"/>
+                          <a:ea typeface="Arial" pitchFamily="34" charset="-122"/>
+                          <a:cs typeface="Arial" pitchFamily="34" charset="-120"/>
+                        </a:rPr>
+                        <a:t>deepseek-ai/DeepSeek-R1-0528</a:t>
+                      </a:r>
+                      <a:endParaRPr lang="en-US" sz="900" dirty="0">
+                        <a:latin typeface="Arial" charset="0"/>
+                        <a:ea typeface="Arial" charset="0"/>
+                        <a:cs typeface="Arial" charset="0"/>
+                      </a:endParaRPr>
+                    </a:p>
+                  </a:txBody>
+                  <a:tcPr marL="91440" marR="91440" marT="45720" marB="45720">
+                    <a:lnL w="6350" cap="flat" cmpd="sng" algn="ctr">
+                      <a:solidFill>
+                        <a:srgbClr val="2A2D3E"/>
+                      </a:solidFill>
+                      <a:prstDash val="solid"/>
+                      <a:round/>
+                      <a:headEnd type="none" w="med" len="med"/>
+                      <a:tailEnd type="none" w="med" len="med"/>
+                    </a:lnL>
+                    <a:lnR w="6350" cap="flat" cmpd="sng" algn="ctr">
+                      <a:solidFill>
+                        <a:srgbClr val="2A2D3E"/>
+                      </a:solidFill>
+                      <a:prstDash val="solid"/>
+                      <a:round/>
+                      <a:headEnd type="none" w="med" len="med"/>
+                      <a:tailEnd type="none" w="med" len="med"/>
+                    </a:lnR>
+                    <a:lnT w="6350" cap="flat" cmpd="sng" algn="ctr">
+                      <a:solidFill>
+                        <a:srgbClr val="2A2D3E"/>
+                      </a:solidFill>
+                      <a:prstDash val="solid"/>
+                      <a:round/>
+                      <a:headEnd type="none" w="med" len="med"/>
+                      <a:tailEnd type="none" w="med" len="med"/>
+                    </a:lnT>
+                    <a:lnB w="6350" cap="flat" cmpd="sng" algn="ctr">
+                      <a:solidFill>
+                        <a:srgbClr val="2A2D3E"/>
+                      </a:solidFill>
+                      <a:prstDash val="solid"/>
+                      <a:round/>
+                      <a:headEnd type="none" w="med" len="med"/>
+                      <a:tailEnd type="none" w="med" len="med"/>
+                    </a:lnB>
+                    <a:solidFill>
+                      <a:srgbClr val="1A1D2E"/>
+                    </a:solidFill>
+                  </a:tcPr>
+                </a:tc>
+                <a:tc>
+                  <a:txBody>
+                    <a:bodyPr/>
+                    <a:lstStyle/>
+                    <a:p>
+                      <a:pPr indent="0" marL="0">
+                        <a:buNone/>
+                      </a:pPr>
+                      <a:r>
+                        <a:rPr lang="en-US" sz="900" dirty="0">
+                          <a:solidFill>
+                            <a:srgbClr val="FFFFFF"/>
+                          </a:solidFill>
+                          <a:latin typeface="Arial" pitchFamily="34" charset="0"/>
+                          <a:ea typeface="Arial" pitchFamily="34" charset="-122"/>
+                          <a:cs typeface="Arial" pitchFamily="34" charset="-120"/>
+                        </a:rPr>
+                        <a:t>Medium</a:t>
+                      </a:r>
+                      <a:endParaRPr lang="en-US" sz="900" dirty="0">
+                        <a:latin typeface="Arial" charset="0"/>
+                        <a:ea typeface="Arial" charset="0"/>
+                        <a:cs typeface="Arial" charset="0"/>
+                      </a:endParaRPr>
+                    </a:p>
+                  </a:txBody>
+                  <a:tcPr marL="91440" marR="91440" marT="45720" marB="45720">
+                    <a:lnL w="6350" cap="flat" cmpd="sng" algn="ctr">
+                      <a:solidFill>
+                        <a:srgbClr val="2A2D3E"/>
+                      </a:solidFill>
+                      <a:prstDash val="solid"/>
+                      <a:round/>
+                      <a:headEnd type="none" w="med" len="med"/>
+                      <a:tailEnd type="none" w="med" len="med"/>
+                    </a:lnL>
+                    <a:lnR w="6350" cap="flat" cmpd="sng" algn="ctr">
+                      <a:solidFill>
+                        <a:srgbClr val="2A2D3E"/>
+                      </a:solidFill>
+                      <a:prstDash val="solid"/>
+                      <a:round/>
+                      <a:headEnd type="none" w="med" len="med"/>
+                      <a:tailEnd type="none" w="med" len="med"/>
+                    </a:lnR>
+                    <a:lnT w="6350" cap="flat" cmpd="sng" algn="ctr">
+                      <a:solidFill>
+                        <a:srgbClr val="2A2D3E"/>
+                      </a:solidFill>
+                      <a:prstDash val="solid"/>
+                      <a:round/>
+                      <a:headEnd type="none" w="med" len="med"/>
+                      <a:tailEnd type="none" w="med" len="med"/>
+                    </a:lnT>
+                    <a:lnB w="6350" cap="flat" cmpd="sng" algn="ctr">
+                      <a:solidFill>
+                        <a:srgbClr val="2A2D3E"/>
+                      </a:solidFill>
+                      <a:prstDash val="solid"/>
+                      <a:round/>
+                      <a:headEnd type="none" w="med" len="med"/>
+                      <a:tailEnd type="none" w="med" len="med"/>
+                    </a:lnB>
+                    <a:solidFill>
+                      <a:srgbClr val="1A1D2E"/>
+                    </a:solidFill>
+                  </a:tcPr>
+                </a:tc>
+                <a:tc>
+                  <a:txBody>
+                    <a:bodyPr/>
+                    <a:lstStyle/>
+                    <a:p>
+                      <a:pPr indent="0" marL="0">
+                        <a:buNone/>
+                      </a:pPr>
+                      <a:r>
+                        <a:rPr lang="en-US" sz="900" dirty="0">
+                          <a:solidFill>
+                            <a:srgbClr val="FFFFFF"/>
+                          </a:solidFill>
+                          <a:latin typeface="Arial" pitchFamily="34" charset="0"/>
+                          <a:ea typeface="Arial" pitchFamily="34" charset="-122"/>
+                          <a:cs typeface="Arial" pitchFamily="34" charset="-120"/>
+                        </a:rPr>
+                        <a:t>Reasoning</a:t>
                       </a:r>
                       <a:endParaRPr lang="en-US" sz="900" dirty="0">
                         <a:latin typeface="Arial" charset="0"/>
@@ -4151,7 +4699,7 @@
                           <a:ea typeface="Arial" pitchFamily="34" charset="-122"/>
                           <a:cs typeface="Arial" pitchFamily="34" charset="-120"/>
                         </a:rPr>
-                        <a:t>Very Fast</a:t>
+                        <a:t>zai-org/GLM-5</a:t>
                       </a:r>
                       <a:endParaRPr lang="en-US" sz="900" dirty="0">
                         <a:latin typeface="Arial" charset="0"/>
@@ -4219,7 +4767,7 @@
                           <a:ea typeface="Arial" pitchFamily="34" charset="-122"/>
                           <a:cs typeface="Arial" pitchFamily="34" charset="-120"/>
                         </a:rPr>
-                        <a:t>Good</a:t>
+                        <a:t>Very Fast</a:t>
                       </a:r>
                       <a:endParaRPr lang="en-US" sz="900" dirty="0">
                         <a:latin typeface="Arial" charset="0"/>
@@ -4357,7 +4905,7 @@
                           <a:ea typeface="Arial" pitchFamily="34" charset="-122"/>
                           <a:cs typeface="Arial" pitchFamily="34" charset="-120"/>
                         </a:rPr>
-                        <a:t>DeepSeek-R1</a:t>
+                        <a:t>Qwen3</a:t>
                       </a:r>
                       <a:endParaRPr lang="en-US" sz="900" dirty="0">
                         <a:latin typeface="Arial" charset="0"/>
@@ -4425,213 +4973,7 @@
                           <a:ea typeface="Arial" pitchFamily="34" charset="-122"/>
                           <a:cs typeface="Arial" pitchFamily="34" charset="-120"/>
                         </a:rPr>
-                        <a:t>Medium</a:t>
-                      </a:r>
-                      <a:endParaRPr lang="en-US" sz="900" dirty="0">
-                        <a:latin typeface="Arial" charset="0"/>
-                        <a:ea typeface="Arial" charset="0"/>
-                        <a:cs typeface="Arial" charset="0"/>
-                      </a:endParaRPr>
-                    </a:p>
-                  </a:txBody>
-                  <a:tcPr marL="91440" marR="91440" marT="45720" marB="45720">
-                    <a:lnL w="6350" cap="flat" cmpd="sng" algn="ctr">
-                      <a:solidFill>
-                        <a:srgbClr val="2A2D3E"/>
-                      </a:solidFill>
-                      <a:prstDash val="solid"/>
-                      <a:round/>
-                      <a:headEnd type="none" w="med" len="med"/>
-                      <a:tailEnd type="none" w="med" len="med"/>
-                    </a:lnL>
-                    <a:lnR w="6350" cap="flat" cmpd="sng" algn="ctr">
-                      <a:solidFill>
-                        <a:srgbClr val="2A2D3E"/>
-                      </a:solidFill>
-                      <a:prstDash val="solid"/>
-                      <a:round/>
-                      <a:headEnd type="none" w="med" len="med"/>
-                      <a:tailEnd type="none" w="med" len="med"/>
-                    </a:lnR>
-                    <a:lnT w="6350" cap="flat" cmpd="sng" algn="ctr">
-                      <a:solidFill>
-                        <a:srgbClr val="2A2D3E"/>
-                      </a:solidFill>
-                      <a:prstDash val="solid"/>
-                      <a:round/>
-                      <a:headEnd type="none" w="med" len="med"/>
-                      <a:tailEnd type="none" w="med" len="med"/>
-                    </a:lnT>
-                    <a:lnB w="6350" cap="flat" cmpd="sng" algn="ctr">
-                      <a:solidFill>
-                        <a:srgbClr val="2A2D3E"/>
-                      </a:solidFill>
-                      <a:prstDash val="solid"/>
-                      <a:round/>
-                      <a:headEnd type="none" w="med" len="med"/>
-                      <a:tailEnd type="none" w="med" len="med"/>
-                    </a:lnB>
-                    <a:solidFill>
-                      <a:srgbClr val="1A1D2E"/>
-                    </a:solidFill>
-                  </a:tcPr>
-                </a:tc>
-                <a:tc>
-                  <a:txBody>
-                    <a:bodyPr/>
-                    <a:lstStyle/>
-                    <a:p>
-                      <a:pPr indent="0" marL="0">
-                        <a:buNone/>
-                      </a:pPr>
-                      <a:r>
-                        <a:rPr lang="en-US" sz="900" dirty="0">
-                          <a:solidFill>
-                            <a:srgbClr val="FFFFFF"/>
-                          </a:solidFill>
-                          <a:latin typeface="Arial" pitchFamily="34" charset="0"/>
-                          <a:ea typeface="Arial" pitchFamily="34" charset="-122"/>
-                          <a:cs typeface="Arial" pitchFamily="34" charset="-120"/>
-                        </a:rPr>
-                        <a:t>Very High</a:t>
-                      </a:r>
-                      <a:endParaRPr lang="en-US" sz="900" dirty="0">
-                        <a:latin typeface="Arial" charset="0"/>
-                        <a:ea typeface="Arial" charset="0"/>
-                        <a:cs typeface="Arial" charset="0"/>
-                      </a:endParaRPr>
-                    </a:p>
-                  </a:txBody>
-                  <a:tcPr marL="91440" marR="91440" marT="45720" marB="45720">
-                    <a:lnL w="6350" cap="flat" cmpd="sng" algn="ctr">
-                      <a:solidFill>
-                        <a:srgbClr val="2A2D3E"/>
-                      </a:solidFill>
-                      <a:prstDash val="solid"/>
-                      <a:round/>
-                      <a:headEnd type="none" w="med" len="med"/>
-                      <a:tailEnd type="none" w="med" len="med"/>
-                    </a:lnL>
-                    <a:lnR w="6350" cap="flat" cmpd="sng" algn="ctr">
-                      <a:solidFill>
-                        <a:srgbClr val="2A2D3E"/>
-                      </a:solidFill>
-                      <a:prstDash val="solid"/>
-                      <a:round/>
-                      <a:headEnd type="none" w="med" len="med"/>
-                      <a:tailEnd type="none" w="med" len="med"/>
-                    </a:lnR>
-                    <a:lnT w="6350" cap="flat" cmpd="sng" algn="ctr">
-                      <a:solidFill>
-                        <a:srgbClr val="2A2D3E"/>
-                      </a:solidFill>
-                      <a:prstDash val="solid"/>
-                      <a:round/>
-                      <a:headEnd type="none" w="med" len="med"/>
-                      <a:tailEnd type="none" w="med" len="med"/>
-                    </a:lnT>
-                    <a:lnB w="6350" cap="flat" cmpd="sng" algn="ctr">
-                      <a:solidFill>
-                        <a:srgbClr val="2A2D3E"/>
-                      </a:solidFill>
-                      <a:prstDash val="solid"/>
-                      <a:round/>
-                      <a:headEnd type="none" w="med" len="med"/>
-                      <a:tailEnd type="none" w="med" len="med"/>
-                    </a:lnB>
-                    <a:solidFill>
-                      <a:srgbClr val="1A1D2E"/>
-                    </a:solidFill>
-                  </a:tcPr>
-                </a:tc>
-                <a:tc>
-                  <a:txBody>
-                    <a:bodyPr/>
-                    <a:lstStyle/>
-                    <a:p>
-                      <a:pPr indent="0" marL="0">
-                        <a:buNone/>
-                      </a:pPr>
-                      <a:r>
-                        <a:rPr lang="en-US" sz="900" dirty="0">
-                          <a:solidFill>
-                            <a:srgbClr val="FFFFFF"/>
-                          </a:solidFill>
-                          <a:latin typeface="Arial" pitchFamily="34" charset="0"/>
-                          <a:ea typeface="Arial" pitchFamily="34" charset="-122"/>
-                          <a:cs typeface="Arial" pitchFamily="34" charset="-120"/>
-                        </a:rPr>
-                        <a:t>Reasoning, complex chains</a:t>
-                      </a:r>
-                      <a:endParaRPr lang="en-US" sz="900" dirty="0">
-                        <a:latin typeface="Arial" charset="0"/>
-                        <a:ea typeface="Arial" charset="0"/>
-                        <a:cs typeface="Arial" charset="0"/>
-                      </a:endParaRPr>
-                    </a:p>
-                  </a:txBody>
-                  <a:tcPr marL="91440" marR="91440" marT="45720" marB="45720">
-                    <a:lnL w="6350" cap="flat" cmpd="sng" algn="ctr">
-                      <a:solidFill>
-                        <a:srgbClr val="2A2D3E"/>
-                      </a:solidFill>
-                      <a:prstDash val="solid"/>
-                      <a:round/>
-                      <a:headEnd type="none" w="med" len="med"/>
-                      <a:tailEnd type="none" w="med" len="med"/>
-                    </a:lnL>
-                    <a:lnR w="6350" cap="flat" cmpd="sng" algn="ctr">
-                      <a:solidFill>
-                        <a:srgbClr val="2A2D3E"/>
-                      </a:solidFill>
-                      <a:prstDash val="solid"/>
-                      <a:round/>
-                      <a:headEnd type="none" w="med" len="med"/>
-                      <a:tailEnd type="none" w="med" len="med"/>
-                    </a:lnR>
-                    <a:lnT w="6350" cap="flat" cmpd="sng" algn="ctr">
-                      <a:solidFill>
-                        <a:srgbClr val="2A2D3E"/>
-                      </a:solidFill>
-                      <a:prstDash val="solid"/>
-                      <a:round/>
-                      <a:headEnd type="none" w="med" len="med"/>
-                      <a:tailEnd type="none" w="med" len="med"/>
-                    </a:lnT>
-                    <a:lnB w="6350" cap="flat" cmpd="sng" algn="ctr">
-                      <a:solidFill>
-                        <a:srgbClr val="2A2D3E"/>
-                      </a:solidFill>
-                      <a:prstDash val="solid"/>
-                      <a:round/>
-                      <a:headEnd type="none" w="med" len="med"/>
-                      <a:tailEnd type="none" w="med" len="med"/>
-                    </a:lnB>
-                    <a:solidFill>
-                      <a:srgbClr val="1A1D2E"/>
-                    </a:solidFill>
-                  </a:tcPr>
-                </a:tc>
-              </a:tr>
-              <a:tr h="320040">
-                <a:tc>
-                  <a:txBody>
-                    <a:bodyPr/>
-                    <a:lstStyle/>
-                    <a:p>
-                      <a:pPr indent="0" marL="0">
-                        <a:buNone/>
-                      </a:pPr>
-                      <a:r>
-                        <a:rPr lang="en-US" sz="900" dirty="0">
-                          <a:solidFill>
-                            <a:srgbClr val="FFFFFF"/>
-                          </a:solidFill>
-                          <a:latin typeface="Arial" pitchFamily="34" charset="0"/>
-                          <a:ea typeface="Arial" pitchFamily="34" charset="-122"/>
-                          <a:cs typeface="Arial" pitchFamily="34" charset="-120"/>
-                        </a:rPr>
-                        <a:t>Qwen3.5-35B</a:t>
+                        <a:t>Qwen/Qwen3-30B-A3B</a:t>
                       </a:r>
                       <a:endParaRPr lang="en-US" sz="900" dirty="0">
                         <a:latin typeface="Arial" charset="0"/>
@@ -4767,74 +5109,6 @@
                           <a:ea typeface="Arial" pitchFamily="34" charset="-122"/>
                           <a:cs typeface="Arial" pitchFamily="34" charset="-120"/>
                         </a:rPr>
-                        <a:t>High</a:t>
-                      </a:r>
-                      <a:endParaRPr lang="en-US" sz="900" dirty="0">
-                        <a:latin typeface="Arial" charset="0"/>
-                        <a:ea typeface="Arial" charset="0"/>
-                        <a:cs typeface="Arial" charset="0"/>
-                      </a:endParaRPr>
-                    </a:p>
-                  </a:txBody>
-                  <a:tcPr marL="91440" marR="91440" marT="45720" marB="45720">
-                    <a:lnL w="6350" cap="flat" cmpd="sng" algn="ctr">
-                      <a:solidFill>
-                        <a:srgbClr val="2A2D3E"/>
-                      </a:solidFill>
-                      <a:prstDash val="solid"/>
-                      <a:round/>
-                      <a:headEnd type="none" w="med" len="med"/>
-                      <a:tailEnd type="none" w="med" len="med"/>
-                    </a:lnL>
-                    <a:lnR w="6350" cap="flat" cmpd="sng" algn="ctr">
-                      <a:solidFill>
-                        <a:srgbClr val="2A2D3E"/>
-                      </a:solidFill>
-                      <a:prstDash val="solid"/>
-                      <a:round/>
-                      <a:headEnd type="none" w="med" len="med"/>
-                      <a:tailEnd type="none" w="med" len="med"/>
-                    </a:lnR>
-                    <a:lnT w="6350" cap="flat" cmpd="sng" algn="ctr">
-                      <a:solidFill>
-                        <a:srgbClr val="2A2D3E"/>
-                      </a:solidFill>
-                      <a:prstDash val="solid"/>
-                      <a:round/>
-                      <a:headEnd type="none" w="med" len="med"/>
-                      <a:tailEnd type="none" w="med" len="med"/>
-                    </a:lnT>
-                    <a:lnB w="6350" cap="flat" cmpd="sng" algn="ctr">
-                      <a:solidFill>
-                        <a:srgbClr val="2A2D3E"/>
-                      </a:solidFill>
-                      <a:prstDash val="solid"/>
-                      <a:round/>
-                      <a:headEnd type="none" w="med" len="med"/>
-                      <a:tailEnd type="none" w="med" len="med"/>
-                    </a:lnB>
-                    <a:solidFill>
-                      <a:srgbClr val="1A1D2E"/>
-                    </a:solidFill>
-                  </a:tcPr>
-                </a:tc>
-                <a:tc>
-                  <a:txBody>
-                    <a:bodyPr/>
-                    <a:lstStyle/>
-                    <a:p>
-                      <a:pPr indent="0" marL="0">
-                        <a:buNone/>
-                      </a:pPr>
-                      <a:r>
-                        <a:rPr lang="en-US" sz="900" dirty="0">
-                          <a:solidFill>
-                            <a:srgbClr val="FFFFFF"/>
-                          </a:solidFill>
-                          <a:latin typeface="Arial" pitchFamily="34" charset="0"/>
-                          <a:ea typeface="Arial" pitchFamily="34" charset="-122"/>
-                          <a:cs typeface="Arial" pitchFamily="34" charset="-120"/>
-                        </a:rPr>
                         <a:t>Code, multilingual</a:t>
                       </a:r>
                       <a:endParaRPr lang="en-US" sz="900" dirty="0">
@@ -4887,284 +5161,116 @@
                   </a:tcPr>
                 </a:tc>
               </a:tr>
-              <a:tr h="320040">
-                <a:tc>
-                  <a:txBody>
-                    <a:bodyPr/>
-                    <a:lstStyle/>
-                    <a:p>
-                      <a:pPr indent="0" marL="0">
-                        <a:buNone/>
-                      </a:pPr>
-                      <a:r>
-                        <a:rPr lang="en-US" sz="900" dirty="0">
-                          <a:solidFill>
-                            <a:srgbClr val="FFFFFF"/>
-                          </a:solidFill>
-                          <a:latin typeface="Arial" pitchFamily="34" charset="0"/>
-                          <a:ea typeface="Arial" pitchFamily="34" charset="-122"/>
-                          <a:cs typeface="Arial" pitchFamily="34" charset="-120"/>
-                        </a:rPr>
-                        <a:t>Mistral Large</a:t>
-                      </a:r>
-                      <a:endParaRPr lang="en-US" sz="900" dirty="0">
-                        <a:latin typeface="Arial" charset="0"/>
-                        <a:ea typeface="Arial" charset="0"/>
-                        <a:cs typeface="Arial" charset="0"/>
-                      </a:endParaRPr>
-                    </a:p>
-                  </a:txBody>
-                  <a:tcPr marL="91440" marR="91440" marT="45720" marB="45720">
-                    <a:lnL w="6350" cap="flat" cmpd="sng" algn="ctr">
-                      <a:solidFill>
-                        <a:srgbClr val="2A2D3E"/>
-                      </a:solidFill>
-                      <a:prstDash val="solid"/>
-                      <a:round/>
-                      <a:headEnd type="none" w="med" len="med"/>
-                      <a:tailEnd type="none" w="med" len="med"/>
-                    </a:lnL>
-                    <a:lnR w="6350" cap="flat" cmpd="sng" algn="ctr">
-                      <a:solidFill>
-                        <a:srgbClr val="2A2D3E"/>
-                      </a:solidFill>
-                      <a:prstDash val="solid"/>
-                      <a:round/>
-                      <a:headEnd type="none" w="med" len="med"/>
-                      <a:tailEnd type="none" w="med" len="med"/>
-                    </a:lnR>
-                    <a:lnT w="6350" cap="flat" cmpd="sng" algn="ctr">
-                      <a:solidFill>
-                        <a:srgbClr val="2A2D3E"/>
-                      </a:solidFill>
-                      <a:prstDash val="solid"/>
-                      <a:round/>
-                      <a:headEnd type="none" w="med" len="med"/>
-                      <a:tailEnd type="none" w="med" len="med"/>
-                    </a:lnT>
-                    <a:lnB w="6350" cap="flat" cmpd="sng" algn="ctr">
-                      <a:solidFill>
-                        <a:srgbClr val="2A2D3E"/>
-                      </a:solidFill>
-                      <a:prstDash val="solid"/>
-                      <a:round/>
-                      <a:headEnd type="none" w="med" len="med"/>
-                      <a:tailEnd type="none" w="med" len="med"/>
-                    </a:lnB>
-                    <a:solidFill>
-                      <a:srgbClr val="1A1D2E"/>
-                    </a:solidFill>
-                  </a:tcPr>
-                </a:tc>
-                <a:tc>
-                  <a:txBody>
-                    <a:bodyPr/>
-                    <a:lstStyle/>
-                    <a:p>
-                      <a:pPr indent="0" marL="0">
-                        <a:buNone/>
-                      </a:pPr>
-                      <a:r>
-                        <a:rPr lang="en-US" sz="900" dirty="0">
-                          <a:solidFill>
-                            <a:srgbClr val="FFFFFF"/>
-                          </a:solidFill>
-                          <a:latin typeface="Arial" pitchFamily="34" charset="0"/>
-                          <a:ea typeface="Arial" pitchFamily="34" charset="-122"/>
-                          <a:cs typeface="Arial" pitchFamily="34" charset="-120"/>
-                        </a:rPr>
-                        <a:t>Fast</a:t>
-                      </a:r>
-                      <a:endParaRPr lang="en-US" sz="900" dirty="0">
-                        <a:latin typeface="Arial" charset="0"/>
-                        <a:ea typeface="Arial" charset="0"/>
-                        <a:cs typeface="Arial" charset="0"/>
-                      </a:endParaRPr>
-                    </a:p>
-                  </a:txBody>
-                  <a:tcPr marL="91440" marR="91440" marT="45720" marB="45720">
-                    <a:lnL w="6350" cap="flat" cmpd="sng" algn="ctr">
-                      <a:solidFill>
-                        <a:srgbClr val="2A2D3E"/>
-                      </a:solidFill>
-                      <a:prstDash val="solid"/>
-                      <a:round/>
-                      <a:headEnd type="none" w="med" len="med"/>
-                      <a:tailEnd type="none" w="med" len="med"/>
-                    </a:lnL>
-                    <a:lnR w="6350" cap="flat" cmpd="sng" algn="ctr">
-                      <a:solidFill>
-                        <a:srgbClr val="2A2D3E"/>
-                      </a:solidFill>
-                      <a:prstDash val="solid"/>
-                      <a:round/>
-                      <a:headEnd type="none" w="med" len="med"/>
-                      <a:tailEnd type="none" w="med" len="med"/>
-                    </a:lnR>
-                    <a:lnT w="6350" cap="flat" cmpd="sng" algn="ctr">
-                      <a:solidFill>
-                        <a:srgbClr val="2A2D3E"/>
-                      </a:solidFill>
-                      <a:prstDash val="solid"/>
-                      <a:round/>
-                      <a:headEnd type="none" w="med" len="med"/>
-                      <a:tailEnd type="none" w="med" len="med"/>
-                    </a:lnT>
-                    <a:lnB w="6350" cap="flat" cmpd="sng" algn="ctr">
-                      <a:solidFill>
-                        <a:srgbClr val="2A2D3E"/>
-                      </a:solidFill>
-                      <a:prstDash val="solid"/>
-                      <a:round/>
-                      <a:headEnd type="none" w="med" len="med"/>
-                      <a:tailEnd type="none" w="med" len="med"/>
-                    </a:lnB>
-                    <a:solidFill>
-                      <a:srgbClr val="1A1D2E"/>
-                    </a:solidFill>
-                  </a:tcPr>
-                </a:tc>
-                <a:tc>
-                  <a:txBody>
-                    <a:bodyPr/>
-                    <a:lstStyle/>
-                    <a:p>
-                      <a:pPr indent="0" marL="0">
-                        <a:buNone/>
-                      </a:pPr>
-                      <a:r>
-                        <a:rPr lang="en-US" sz="900" dirty="0">
-                          <a:solidFill>
-                            <a:srgbClr val="FFFFFF"/>
-                          </a:solidFill>
-                          <a:latin typeface="Arial" pitchFamily="34" charset="0"/>
-                          <a:ea typeface="Arial" pitchFamily="34" charset="-122"/>
-                          <a:cs typeface="Arial" pitchFamily="34" charset="-120"/>
-                        </a:rPr>
-                        <a:t>High</a:t>
-                      </a:r>
-                      <a:endParaRPr lang="en-US" sz="900" dirty="0">
-                        <a:latin typeface="Arial" charset="0"/>
-                        <a:ea typeface="Arial" charset="0"/>
-                        <a:cs typeface="Arial" charset="0"/>
-                      </a:endParaRPr>
-                    </a:p>
-                  </a:txBody>
-                  <a:tcPr marL="91440" marR="91440" marT="45720" marB="45720">
-                    <a:lnL w="6350" cap="flat" cmpd="sng" algn="ctr">
-                      <a:solidFill>
-                        <a:srgbClr val="2A2D3E"/>
-                      </a:solidFill>
-                      <a:prstDash val="solid"/>
-                      <a:round/>
-                      <a:headEnd type="none" w="med" len="med"/>
-                      <a:tailEnd type="none" w="med" len="med"/>
-                    </a:lnL>
-                    <a:lnR w="6350" cap="flat" cmpd="sng" algn="ctr">
-                      <a:solidFill>
-                        <a:srgbClr val="2A2D3E"/>
-                      </a:solidFill>
-                      <a:prstDash val="solid"/>
-                      <a:round/>
-                      <a:headEnd type="none" w="med" len="med"/>
-                      <a:tailEnd type="none" w="med" len="med"/>
-                    </a:lnR>
-                    <a:lnT w="6350" cap="flat" cmpd="sng" algn="ctr">
-                      <a:solidFill>
-                        <a:srgbClr val="2A2D3E"/>
-                      </a:solidFill>
-                      <a:prstDash val="solid"/>
-                      <a:round/>
-                      <a:headEnd type="none" w="med" len="med"/>
-                      <a:tailEnd type="none" w="med" len="med"/>
-                    </a:lnT>
-                    <a:lnB w="6350" cap="flat" cmpd="sng" algn="ctr">
-                      <a:solidFill>
-                        <a:srgbClr val="2A2D3E"/>
-                      </a:solidFill>
-                      <a:prstDash val="solid"/>
-                      <a:round/>
-                      <a:headEnd type="none" w="med" len="med"/>
-                      <a:tailEnd type="none" w="med" len="med"/>
-                    </a:lnB>
-                    <a:solidFill>
-                      <a:srgbClr val="1A1D2E"/>
-                    </a:solidFill>
-                  </a:tcPr>
-                </a:tc>
-                <a:tc>
-                  <a:txBody>
-                    <a:bodyPr/>
-                    <a:lstStyle/>
-                    <a:p>
-                      <a:pPr indent="0" marL="0">
-                        <a:buNone/>
-                      </a:pPr>
-                      <a:r>
-                        <a:rPr lang="en-US" sz="900" dirty="0">
-                          <a:solidFill>
-                            <a:srgbClr val="FFFFFF"/>
-                          </a:solidFill>
-                          <a:latin typeface="Arial" pitchFamily="34" charset="0"/>
-                          <a:ea typeface="Arial" pitchFamily="34" charset="-122"/>
-                          <a:cs typeface="Arial" pitchFamily="34" charset="-120"/>
-                        </a:rPr>
-                        <a:t>European languages</a:t>
-                      </a:r>
-                      <a:endParaRPr lang="en-US" sz="900" dirty="0">
-                        <a:latin typeface="Arial" charset="0"/>
-                        <a:ea typeface="Arial" charset="0"/>
-                        <a:cs typeface="Arial" charset="0"/>
-                      </a:endParaRPr>
-                    </a:p>
-                  </a:txBody>
-                  <a:tcPr marL="91440" marR="91440" marT="45720" marB="45720">
-                    <a:lnL w="6350" cap="flat" cmpd="sng" algn="ctr">
-                      <a:solidFill>
-                        <a:srgbClr val="2A2D3E"/>
-                      </a:solidFill>
-                      <a:prstDash val="solid"/>
-                      <a:round/>
-                      <a:headEnd type="none" w="med" len="med"/>
-                      <a:tailEnd type="none" w="med" len="med"/>
-                    </a:lnL>
-                    <a:lnR w="6350" cap="flat" cmpd="sng" algn="ctr">
-                      <a:solidFill>
-                        <a:srgbClr val="2A2D3E"/>
-                      </a:solidFill>
-                      <a:prstDash val="solid"/>
-                      <a:round/>
-                      <a:headEnd type="none" w="med" len="med"/>
-                      <a:tailEnd type="none" w="med" len="med"/>
-                    </a:lnR>
-                    <a:lnT w="6350" cap="flat" cmpd="sng" algn="ctr">
-                      <a:solidFill>
-                        <a:srgbClr val="2A2D3E"/>
-                      </a:solidFill>
-                      <a:prstDash val="solid"/>
-                      <a:round/>
-                      <a:headEnd type="none" w="med" len="med"/>
-                      <a:tailEnd type="none" w="med" len="med"/>
-                    </a:lnT>
-                    <a:lnB w="6350" cap="flat" cmpd="sng" algn="ctr">
-                      <a:solidFill>
-                        <a:srgbClr val="2A2D3E"/>
-                      </a:solidFill>
-                      <a:prstDash val="solid"/>
-                      <a:round/>
-                      <a:headEnd type="none" w="med" len="med"/>
-                      <a:tailEnd type="none" w="med" len="med"/>
-                    </a:lnB>
-                    <a:solidFill>
-                      <a:srgbClr val="1A1D2E"/>
-                    </a:solidFill>
-                  </a:tcPr>
-                </a:tc>
-              </a:tr>
             </a:tbl>
           </a:graphicData>
         </a:graphic>
       </p:graphicFrame>
+      <p:sp>
+        <p:nvSpPr>
+          <p:cNvPr id="7" name="Text 4"/>
+          <p:cNvSpPr/>
+          <p:nvPr/>
+        </p:nvSpPr>
+        <p:spPr>
+          <a:xfrm>
+            <a:off x="731520" y="3474720"/>
+            <a:ext cx="2743200" cy="274320"/>
+          </a:xfrm>
+          <a:prstGeom prst="rect">
+            <a:avLst/>
+          </a:prstGeom>
+          <a:noFill/>
+          <a:ln/>
+        </p:spPr>
+        <p:txBody>
+          <a:bodyPr wrap="square" rtlCol="0" anchor="ctr"/>
+          <a:lstStyle/>
+          <a:p>
+            <a:pPr indent="0" marL="0">
+              <a:buNone/>
+            </a:pPr>
+            <a:r>
+              <a:rPr lang="en-US" sz="1200" dirty="0">
+                <a:solidFill>
+                  <a:srgbClr val="9CA3AF"/>
+                </a:solidFill>
+                <a:latin typeface="Arial" pitchFamily="34" charset="0"/>
+                <a:ea typeface="Arial" pitchFamily="34" charset="-122"/>
+                <a:cs typeface="Arial" pitchFamily="34" charset="-120"/>
+              </a:rPr>
+              <a:t>Switch anytime:</a:t>
+            </a:r>
+            <a:endParaRPr lang="en-US" sz="1200" dirty="0"/>
+          </a:p>
+        </p:txBody>
+      </p:sp>
+      <p:sp>
+        <p:nvSpPr>
+          <p:cNvPr id="8" name="Shape 5"/>
+          <p:cNvSpPr/>
+          <p:nvPr/>
+        </p:nvSpPr>
+        <p:spPr>
+          <a:xfrm>
+            <a:off x="731520" y="3840480"/>
+            <a:ext cx="7680960" cy="411480"/>
+          </a:xfrm>
+          <a:prstGeom prst="roundRect">
+            <a:avLst>
+              <a:gd name="adj" fmla="val 17778"/>
+            </a:avLst>
+          </a:prstGeom>
+          <a:solidFill>
+            <a:srgbClr val="161927"/>
+          </a:solidFill>
+          <a:ln/>
+        </p:spPr>
+      </p:sp>
+      <p:sp>
+        <p:nvSpPr>
+          <p:cNvPr id="9" name="Text 6"/>
+          <p:cNvSpPr/>
+          <p:nvPr/>
+        </p:nvSpPr>
+        <p:spPr>
+          <a:xfrm>
+            <a:off x="868680" y="3913632"/>
+            <a:ext cx="7406640" cy="265176"/>
+          </a:xfrm>
+          <a:prstGeom prst="rect">
+            <a:avLst/>
+          </a:prstGeom>
+          <a:noFill/>
+          <a:ln/>
+        </p:spPr>
+        <p:txBody>
+          <a:bodyPr wrap="square" rtlCol="0" anchor="t"/>
+          <a:lstStyle/>
+          <a:p>
+            <a:pPr indent="0" marL="0">
+              <a:spcBef>
+                <a:spcPts val="200"/>
+              </a:spcBef>
+              <a:spcAft>
+                <a:spcPts val="200"/>
+              </a:spcAft>
+              <a:buNone/>
+            </a:pPr>
+            <a:r>
+              <a:rPr lang="en-US" sz="1000" dirty="0">
+                <a:solidFill>
+                  <a:srgbClr val="B8FF4A"/>
+                </a:solidFill>
+                <a:latin typeface="Courier New" pitchFamily="34" charset="0"/>
+                <a:ea typeface="Courier New" pitchFamily="34" charset="-122"/>
+                <a:cs typeface="Courier New" pitchFamily="34" charset="-120"/>
+              </a:rPr>
+              <a:t>/model kimi    # or /model llama70b, /model deepseek</a:t>
+            </a:r>
+            <a:endParaRPr lang="en-US" sz="1000" dirty="0"/>
+          </a:p>
+        </p:txBody>
+      </p:sp>
     </p:spTree>
   </p:cSld>
   <p:clrMapOvr>
@@ -5810,7 +5916,30 @@
                 <a:ea typeface="Courier New" pitchFamily="34" charset="-122"/>
                 <a:cs typeface="Courier New" pitchFamily="34" charset="-120"/>
               </a:rPr>
-              <a:t>  --custom-base-url "https://api.tokenfactory.nebius.com/v1" \</a:t>
+              <a:t>  --custom-base-url "https://api.tokenfactory.nebius.com/v1/" \</a:t>
+            </a:r>
+            <a:endParaRPr lang="en-US" sz="900" dirty="0"/>
+          </a:p>
+          <a:p>
+            <a:pPr indent="0" marL="0">
+              <a:spcBef>
+                <a:spcPts val="200"/>
+              </a:spcBef>
+              <a:spcAft>
+                <a:spcPts val="200"/>
+              </a:spcAft>
+              <a:buNone/>
+            </a:pPr>
+            <a:r>
+              <a:rPr lang="en-US" sz="900" dirty="0">
+                <a:solidFill>
+                  <a:srgbClr val="B8FF4A"/>
+                </a:solidFill>
+                <a:latin typeface="Courier New" pitchFamily="34" charset="0"/>
+                <a:ea typeface="Courier New" pitchFamily="34" charset="-122"/>
+                <a:cs typeface="Courier New" pitchFamily="34" charset="-120"/>
+              </a:rPr>
+              <a:t>  --custom-model-id "moonshotai/Kimi-K2.5" \</a:t>
             </a:r>
             <a:endParaRPr lang="en-US" sz="900" dirty="0"/>
           </a:p>
@@ -6285,7 +6414,7 @@
                 <a:ea typeface="Arial" pitchFamily="34" charset="-122"/>
                 <a:cs typeface="Arial" pitchFamily="34" charset="-120"/>
               </a:rPr>
-              <a:t>Token Factory supports JSON mode natively.</a:t>
+              <a:t>Works with Kimi K2.5, Llama 3.3, and DeepSeek-R1.</a:t>
             </a:r>
             <a:endParaRPr lang="en-US" sz="1400" dirty="0"/>
           </a:p>
@@ -6703,7 +6832,7 @@
                 <a:ea typeface="Arial" pitchFamily="34" charset="-122"/>
                 <a:cs typeface="Arial" pitchFamily="34" charset="-120"/>
               </a:rPr>
-              <a:t>Auto-scales to zero. Spins up on demand. No VM management.</a:t>
+              <a:t>Auto-scales to zero. Spins up on demand.</a:t>
             </a:r>
             <a:endParaRPr lang="en-US" sz="1400" dirty="0"/>
           </a:p>
@@ -8311,7 +8440,7 @@
                 <a:ea typeface="Arial" pitchFamily="34" charset="-122"/>
                 <a:cs typeface="Arial" pitchFamily="34" charset="-120"/>
               </a:rPr>
-              <a:t>Bind to loopback in dev, 0.0.0.0 behind proxy in prod</a:t>
+              <a:t>Bind to loopback in dev, 0.0.0.0 behind proxy</a:t>
             </a:r>
             <a:endParaRPr lang="en-US" sz="1400" dirty="0"/>
           </a:p>
@@ -9510,7 +9639,7 @@
                           <a:ea typeface="Arial" pitchFamily="34" charset="-122"/>
                           <a:cs typeface="Arial" pitchFamily="34" charset="-120"/>
                         </a:rPr>
-                        <a:t>/model glm5</a:t>
+                        <a:t>/model kimi</a:t>
                       </a:r>
                       <a:endParaRPr lang="en-US" sz="900" dirty="0">
                         <a:latin typeface="Arial" charset="0"/>
@@ -10523,7 +10652,7 @@
                           <a:ea typeface="Arial" pitchFamily="34" charset="-122"/>
                           <a:cs typeface="Arial" pitchFamily="34" charset="-120"/>
                         </a:rPr>
-                        <a:t>Token Factory</a:t>
+                        <a:t>Token Factory Docs</a:t>
                       </a:r>
                       <a:endParaRPr lang="en-US" sz="900" dirty="0">
                         <a:latin typeface="Arial" charset="0"/>
@@ -10591,7 +10720,145 @@
                           <a:ea typeface="Arial" pitchFamily="34" charset="-122"/>
                           <a:cs typeface="Arial" pitchFamily="34" charset="-120"/>
                         </a:rPr>
-                        <a:t>console.nebius.com</a:t>
+                        <a:t>docs.tokenfactory.nebius.com</a:t>
+                      </a:r>
+                      <a:endParaRPr lang="en-US" sz="900" dirty="0">
+                        <a:latin typeface="Arial" charset="0"/>
+                        <a:ea typeface="Arial" charset="0"/>
+                        <a:cs typeface="Arial" charset="0"/>
+                      </a:endParaRPr>
+                    </a:p>
+                  </a:txBody>
+                  <a:tcPr marL="91440" marR="91440" marT="45720" marB="45720">
+                    <a:lnL w="6350" cap="flat" cmpd="sng" algn="ctr">
+                      <a:solidFill>
+                        <a:srgbClr val="2A2D3E"/>
+                      </a:solidFill>
+                      <a:prstDash val="solid"/>
+                      <a:round/>
+                      <a:headEnd type="none" w="med" len="med"/>
+                      <a:tailEnd type="none" w="med" len="med"/>
+                    </a:lnL>
+                    <a:lnR w="6350" cap="flat" cmpd="sng" algn="ctr">
+                      <a:solidFill>
+                        <a:srgbClr val="2A2D3E"/>
+                      </a:solidFill>
+                      <a:prstDash val="solid"/>
+                      <a:round/>
+                      <a:headEnd type="none" w="med" len="med"/>
+                      <a:tailEnd type="none" w="med" len="med"/>
+                    </a:lnR>
+                    <a:lnT w="6350" cap="flat" cmpd="sng" algn="ctr">
+                      <a:solidFill>
+                        <a:srgbClr val="2A2D3E"/>
+                      </a:solidFill>
+                      <a:prstDash val="solid"/>
+                      <a:round/>
+                      <a:headEnd type="none" w="med" len="med"/>
+                      <a:tailEnd type="none" w="med" len="med"/>
+                    </a:lnT>
+                    <a:lnB w="6350" cap="flat" cmpd="sng" algn="ctr">
+                      <a:solidFill>
+                        <a:srgbClr val="2A2D3E"/>
+                      </a:solidFill>
+                      <a:prstDash val="solid"/>
+                      <a:round/>
+                      <a:headEnd type="none" w="med" len="med"/>
+                      <a:tailEnd type="none" w="med" len="med"/>
+                    </a:lnB>
+                    <a:solidFill>
+                      <a:srgbClr val="1A1D2E"/>
+                    </a:solidFill>
+                  </a:tcPr>
+                </a:tc>
+              </a:tr>
+              <a:tr h="320040">
+                <a:tc>
+                  <a:txBody>
+                    <a:bodyPr/>
+                    <a:lstStyle/>
+                    <a:p>
+                      <a:pPr indent="0" marL="0">
+                        <a:buNone/>
+                      </a:pPr>
+                      <a:r>
+                        <a:rPr lang="en-US" sz="900" dirty="0">
+                          <a:solidFill>
+                            <a:srgbClr val="FFFFFF"/>
+                          </a:solidFill>
+                          <a:latin typeface="Arial" pitchFamily="34" charset="0"/>
+                          <a:ea typeface="Arial" pitchFamily="34" charset="-122"/>
+                          <a:cs typeface="Arial" pitchFamily="34" charset="-120"/>
+                        </a:rPr>
+                        <a:t>Cookbook Repo</a:t>
+                      </a:r>
+                      <a:endParaRPr lang="en-US" sz="900" dirty="0">
+                        <a:latin typeface="Arial" charset="0"/>
+                        <a:ea typeface="Arial" charset="0"/>
+                        <a:cs typeface="Arial" charset="0"/>
+                      </a:endParaRPr>
+                    </a:p>
+                  </a:txBody>
+                  <a:tcPr marL="91440" marR="91440" marT="45720" marB="45720">
+                    <a:lnL w="6350" cap="flat" cmpd="sng" algn="ctr">
+                      <a:solidFill>
+                        <a:srgbClr val="2A2D3E"/>
+                      </a:solidFill>
+                      <a:prstDash val="solid"/>
+                      <a:round/>
+                      <a:headEnd type="none" w="med" len="med"/>
+                      <a:tailEnd type="none" w="med" len="med"/>
+                    </a:lnL>
+                    <a:lnR w="6350" cap="flat" cmpd="sng" algn="ctr">
+                      <a:solidFill>
+                        <a:srgbClr val="2A2D3E"/>
+                      </a:solidFill>
+                      <a:prstDash val="solid"/>
+                      <a:round/>
+                      <a:headEnd type="none" w="med" len="med"/>
+                      <a:tailEnd type="none" w="med" len="med"/>
+                    </a:lnR>
+                    <a:lnT w="6350" cap="flat" cmpd="sng" algn="ctr">
+                      <a:solidFill>
+                        <a:srgbClr val="2A2D3E"/>
+                      </a:solidFill>
+                      <a:prstDash val="solid"/>
+                      <a:round/>
+                      <a:headEnd type="none" w="med" len="med"/>
+                      <a:tailEnd type="none" w="med" len="med"/>
+                    </a:lnT>
+                    <a:lnB w="6350" cap="flat" cmpd="sng" algn="ctr">
+                      <a:solidFill>
+                        <a:srgbClr val="2A2D3E"/>
+                      </a:solidFill>
+                      <a:prstDash val="solid"/>
+                      <a:round/>
+                      <a:headEnd type="none" w="med" len="med"/>
+                      <a:tailEnd type="none" w="med" len="med"/>
+                    </a:lnB>
+                    <a:solidFill>
+                      <a:srgbClr val="1A1D2E"/>
+                    </a:solidFill>
+                  </a:tcPr>
+                </a:tc>
+                <a:tc>
+                  <a:txBody>
+                    <a:bodyPr/>
+                    <a:lstStyle/>
+                    <a:p>
+                      <a:pPr indent="0" marL="0">
+                        <a:buNone/>
+                      </a:pPr>
+                      <a:r>
+                        <a:rPr lang="en-US" sz="900" dirty="0">
+                          <a:solidFill>
+                            <a:srgbClr val="FFFFFF"/>
+                          </a:solidFill>
+                          <a:latin typeface="Arial" pitchFamily="34" charset="0"/>
+                          <a:ea typeface="Arial" pitchFamily="34" charset="-122"/>
+                          <a:cs typeface="Arial" pitchFamily="34" charset="-120"/>
+                        </a:rPr>
+                        <a:t>github.com/nebius/token-factory-cookbook</a:t>
                       </a:r>
                       <a:endParaRPr lang="en-US" sz="900" dirty="0">
                         <a:latin typeface="Arial" charset="0"/>
@@ -12356,7 +12623,7 @@
                 <a:ea typeface="Arial" pitchFamily="34" charset="-122"/>
                 <a:cs typeface="Arial" pitchFamily="34" charset="-120"/>
               </a:rPr>
-              <a:t>You don't need to use Claude or OpenAI.</a:t>
+              <a:t>You don't need Claude or OpenAI.</a:t>
             </a:r>
             <a:endParaRPr lang="en-US" sz="1600" dirty="0"/>
           </a:p>
@@ -12681,7 +12948,7 @@
                           <a:ea typeface="Arial" pitchFamily="34" charset="-122"/>
                           <a:cs typeface="Arial" pitchFamily="34" charset="-120"/>
                         </a:rPr>
-                        <a:t>Llama 3.1 70B, GLM-5, DeepSeek-R1</a:t>
+                        <a:t>Kimi K2.5, Llama 3.3 70B, DeepSeek-R1</a:t>
                       </a:r>
                       <a:endParaRPr lang="en-US" sz="900" dirty="0">
                         <a:latin typeface="Arial" charset="0"/>
@@ -14336,45 +14603,6 @@
           </a:graphicData>
         </a:graphic>
       </p:graphicFrame>
-      <p:sp>
-        <p:nvSpPr>
-          <p:cNvPr id="7" name="Text 4"/>
-          <p:cNvSpPr/>
-          <p:nvPr/>
-        </p:nvSpPr>
-        <p:spPr>
-          <a:xfrm>
-            <a:off x="731520" y="3474720"/>
-            <a:ext cx="7315200" cy="365760"/>
-          </a:xfrm>
-          <a:prstGeom prst="rect">
-            <a:avLst/>
-          </a:prstGeom>
-          <a:noFill/>
-          <a:ln/>
-        </p:spPr>
-        <p:txBody>
-          <a:bodyPr wrap="square" rtlCol="0" anchor="ctr"/>
-          <a:lstStyle/>
-          <a:p>
-            <a:pPr indent="0" marL="0">
-              <a:buNone/>
-            </a:pPr>
-            <a:r>
-              <a:rPr lang="en-US" sz="1400" b="1" dirty="0">
-                <a:solidFill>
-                  <a:srgbClr val="FFFFFF"/>
-                </a:solidFill>
-                <a:latin typeface="Arial" pitchFamily="34" charset="0"/>
-                <a:ea typeface="Arial" pitchFamily="34" charset="-122"/>
-                <a:cs typeface="Arial" pitchFamily="34" charset="-120"/>
-              </a:rPr>
-              <a:t>We'll start with npm (fastest), then show Docker and Serverless.</a:t>
-            </a:r>
-            <a:endParaRPr lang="en-US" sz="1400" dirty="0"/>
-          </a:p>
-        </p:txBody>
-      </p:sp>
     </p:spTree>
   </p:cSld>
   <p:clrMapOvr>
@@ -15592,7 +15820,7 @@
                 <a:ea typeface="Courier New" pitchFamily="34" charset="-122"/>
                 <a:cs typeface="Courier New" pitchFamily="34" charset="-120"/>
               </a:rPr>
-              <a:t>        baseUrl: "https://api.tokenfactory.nebius.com/v1",</a:t>
+              <a:t>        baseUrl: "https://api.tokenfactory.nebius.com/v1/",</a:t>
             </a:r>
             <a:endParaRPr lang="en-US" sz="800" dirty="0"/>
           </a:p>
@@ -15684,7 +15912,7 @@
                 <a:ea typeface="Courier New" pitchFamily="34" charset="-122"/>
                 <a:cs typeface="Courier New" pitchFamily="34" charset="-120"/>
               </a:rPr>
-              <a:t>          { id: "meta-llama/Meta-Llama-3.1-70B-Instruct",</a:t>
+              <a:t>          { id: "moonshotai/Kimi-K2.5",</a:t>
             </a:r>
             <a:endParaRPr lang="en-US" sz="800" dirty="0"/>
           </a:p>
@@ -15707,7 +15935,7 @@
                 <a:ea typeface="Courier New" pitchFamily="34" charset="-122"/>
                 <a:cs typeface="Courier New" pitchFamily="34" charset="-120"/>
               </a:rPr>
-              <a:t>            name: "Llama 3.1 70B", contextWindow: 128000 },</a:t>
+              <a:t>            name: "Kimi K2.5", contextWindow: 128000 },</a:t>
             </a:r>
             <a:endParaRPr lang="en-US" sz="800" dirty="0"/>
           </a:p>
@@ -15730,7 +15958,7 @@
                 <a:ea typeface="Courier New" pitchFamily="34" charset="-122"/>
                 <a:cs typeface="Courier New" pitchFamily="34" charset="-120"/>
               </a:rPr>
-              <a:t>          { id: "zai-org/GLM-5",</a:t>
+              <a:t>          { id: "meta-llama/Llama-3.3-70B-Instruct-fast",</a:t>
             </a:r>
             <a:endParaRPr lang="en-US" sz="800" dirty="0"/>
           </a:p>
@@ -15753,7 +15981,7 @@
                 <a:ea typeface="Courier New" pitchFamily="34" charset="-122"/>
                 <a:cs typeface="Courier New" pitchFamily="34" charset="-120"/>
               </a:rPr>
-              <a:t>            name: "GLM-5", contextWindow: 128000 },</a:t>
+              <a:t>            name: "Llama 3.3 70B", contextWindow: 128000 },</a:t>
             </a:r>
             <a:endParaRPr lang="en-US" sz="800" dirty="0"/>
           </a:p>
@@ -15776,7 +16004,7 @@
                 <a:ea typeface="Courier New" pitchFamily="34" charset="-122"/>
                 <a:cs typeface="Courier New" pitchFamily="34" charset="-120"/>
               </a:rPr>
-              <a:t>          { id: "deepseek-ai/DeepSeek-R1",</a:t>
+              <a:t>          { id: "deepseek-ai/DeepSeek-R1-0528",</a:t>
             </a:r>
             <a:endParaRPr lang="en-US" sz="800" dirty="0"/>
           </a:p>
@@ -15937,7 +16165,7 @@
                 <a:ea typeface="Courier New" pitchFamily="34" charset="-122"/>
                 <a:cs typeface="Courier New" pitchFamily="34" charset="-120"/>
               </a:rPr>
-              <a:t>    model: { primary: "nebius/meta-llama/..." },</a:t>
+              <a:t>    model: { primary: "nebius/moonshotai/Kimi-K2.5" },</a:t>
             </a:r>
             <a:endParaRPr lang="en-US" sz="800" dirty="0"/>
           </a:p>
@@ -15983,7 +16211,7 @@
                 <a:ea typeface="Courier New" pitchFamily="34" charset="-122"/>
                 <a:cs typeface="Courier New" pitchFamily="34" charset="-120"/>
               </a:rPr>
-              <a:t>      "nebius/.../Llama-3.1-70B": { alias: "llama70b" },</a:t>
+              <a:t>      "nebius/moonshotai/Kimi-K2.5": { alias: "kimi" },</a:t>
             </a:r>
             <a:endParaRPr lang="en-US" sz="800" dirty="0"/>
           </a:p>
@@ -16006,7 +16234,7 @@
                 <a:ea typeface="Courier New" pitchFamily="34" charset="-122"/>
                 <a:cs typeface="Courier New" pitchFamily="34" charset="-120"/>
               </a:rPr>
-              <a:t>      "nebius/zai-org/GLM-5": { alias: "glm5" },</a:t>
+              <a:t>      "nebius/.../Llama-3.3-70B": { alias: "llama70b" },</a:t>
             </a:r>
             <a:endParaRPr lang="en-US" sz="800" dirty="0"/>
           </a:p>
@@ -16029,7 +16257,7 @@
                 <a:ea typeface="Courier New" pitchFamily="34" charset="-122"/>
                 <a:cs typeface="Courier New" pitchFamily="34" charset="-120"/>
               </a:rPr>
-              <a:t>      "nebius/.../DeepSeek-R1": { alias: "deepseek" }</a:t>
+              <a:t>      "nebius/.../DeepSeek-R1-0528": { alias: "deepseek" }</a:t>
             </a:r>
             <a:endParaRPr lang="en-US" sz="800" dirty="0"/>
           </a:p>
